--- a/python_course_4p/4_api_app/4_api_app.pptx
+++ b/python_course_4p/4_api_app/4_api_app.pptx
@@ -5,7 +5,7 @@
     <p:sldMasterId id="2147483648" r:id="rId1"/>
   </p:sldMasterIdLst>
   <p:notesMasterIdLst>
-    <p:notesMasterId r:id="rId18"/>
+    <p:notesMasterId r:id="rId24"/>
   </p:notesMasterIdLst>
   <p:sldIdLst>
     <p:sldId id="322" r:id="rId2"/>
@@ -24,6 +24,12 @@
     <p:sldId id="351" r:id="rId15"/>
     <p:sldId id="349" r:id="rId16"/>
     <p:sldId id="348" r:id="rId17"/>
+    <p:sldId id="352" r:id="rId18"/>
+    <p:sldId id="353" r:id="rId19"/>
+    <p:sldId id="355" r:id="rId20"/>
+    <p:sldId id="356" r:id="rId21"/>
+    <p:sldId id="357" r:id="rId22"/>
+    <p:sldId id="358" r:id="rId23"/>
   </p:sldIdLst>
   <p:sldSz cx="12192000" cy="6858000"/>
   <p:notesSz cx="6858000" cy="9144000"/>
@@ -224,7 +230,7 @@
           <a:p>
             <a:fld id="{7D183437-14DE-4969-B062-63D9C4A2E219}" type="datetimeFigureOut">
               <a:rPr lang="nl-NL" smtClean="0"/>
-              <a:t>20-10-2026</a:t>
+              <a:t>26-10-2026</a:t>
             </a:fld>
             <a:endParaRPr lang="nl-NL"/>
           </a:p>
@@ -641,7 +647,7 @@
           <a:p>
             <a:fld id="{0EBB069A-003F-4FC0-8534-236B0C5C7B5F}" type="datetimeFigureOut">
               <a:rPr lang="en-NL" smtClean="0"/>
-              <a:t>20/10/2026</a:t>
+              <a:t>26/10/2026</a:t>
             </a:fld>
             <a:endParaRPr lang="en-NL"/>
           </a:p>
@@ -841,7 +847,7 @@
           <a:p>
             <a:fld id="{0EBB069A-003F-4FC0-8534-236B0C5C7B5F}" type="datetimeFigureOut">
               <a:rPr lang="en-NL" smtClean="0"/>
-              <a:t>20/10/2026</a:t>
+              <a:t>26/10/2026</a:t>
             </a:fld>
             <a:endParaRPr lang="en-NL"/>
           </a:p>
@@ -1051,7 +1057,7 @@
           <a:p>
             <a:fld id="{0EBB069A-003F-4FC0-8534-236B0C5C7B5F}" type="datetimeFigureOut">
               <a:rPr lang="en-NL" smtClean="0"/>
-              <a:t>20/10/2026</a:t>
+              <a:t>26/10/2026</a:t>
             </a:fld>
             <a:endParaRPr lang="en-NL"/>
           </a:p>
@@ -1251,7 +1257,7 @@
           <a:p>
             <a:fld id="{0EBB069A-003F-4FC0-8534-236B0C5C7B5F}" type="datetimeFigureOut">
               <a:rPr lang="en-NL" smtClean="0"/>
-              <a:t>20/10/2026</a:t>
+              <a:t>26/10/2026</a:t>
             </a:fld>
             <a:endParaRPr lang="en-NL"/>
           </a:p>
@@ -1527,7 +1533,7 @@
           <a:p>
             <a:fld id="{0EBB069A-003F-4FC0-8534-236B0C5C7B5F}" type="datetimeFigureOut">
               <a:rPr lang="en-NL" smtClean="0"/>
-              <a:t>20/10/2026</a:t>
+              <a:t>26/10/2026</a:t>
             </a:fld>
             <a:endParaRPr lang="en-NL"/>
           </a:p>
@@ -1795,7 +1801,7 @@
           <a:p>
             <a:fld id="{0EBB069A-003F-4FC0-8534-236B0C5C7B5F}" type="datetimeFigureOut">
               <a:rPr lang="en-NL" smtClean="0"/>
-              <a:t>20/10/2026</a:t>
+              <a:t>26/10/2026</a:t>
             </a:fld>
             <a:endParaRPr lang="en-NL"/>
           </a:p>
@@ -2210,7 +2216,7 @@
           <a:p>
             <a:fld id="{0EBB069A-003F-4FC0-8534-236B0C5C7B5F}" type="datetimeFigureOut">
               <a:rPr lang="en-NL" smtClean="0"/>
-              <a:t>20/10/2026</a:t>
+              <a:t>26/10/2026</a:t>
             </a:fld>
             <a:endParaRPr lang="en-NL"/>
           </a:p>
@@ -2352,7 +2358,7 @@
           <a:p>
             <a:fld id="{0EBB069A-003F-4FC0-8534-236B0C5C7B5F}" type="datetimeFigureOut">
               <a:rPr lang="en-NL" smtClean="0"/>
-              <a:t>20/10/2026</a:t>
+              <a:t>26/10/2026</a:t>
             </a:fld>
             <a:endParaRPr lang="en-NL"/>
           </a:p>
@@ -2465,7 +2471,7 @@
           <a:p>
             <a:fld id="{0EBB069A-003F-4FC0-8534-236B0C5C7B5F}" type="datetimeFigureOut">
               <a:rPr lang="en-NL" smtClean="0"/>
-              <a:t>20/10/2026</a:t>
+              <a:t>26/10/2026</a:t>
             </a:fld>
             <a:endParaRPr lang="en-NL"/>
           </a:p>
@@ -2778,7 +2784,7 @@
           <a:p>
             <a:fld id="{0EBB069A-003F-4FC0-8534-236B0C5C7B5F}" type="datetimeFigureOut">
               <a:rPr lang="en-NL" smtClean="0"/>
-              <a:t>20/10/2026</a:t>
+              <a:t>26/10/2026</a:t>
             </a:fld>
             <a:endParaRPr lang="en-NL"/>
           </a:p>
@@ -3067,7 +3073,7 @@
           <a:p>
             <a:fld id="{0EBB069A-003F-4FC0-8534-236B0C5C7B5F}" type="datetimeFigureOut">
               <a:rPr lang="en-NL" smtClean="0"/>
-              <a:t>20/10/2026</a:t>
+              <a:t>26/10/2026</a:t>
             </a:fld>
             <a:endParaRPr lang="en-NL"/>
           </a:p>
@@ -3310,7 +3316,7 @@
           <a:p>
             <a:fld id="{0EBB069A-003F-4FC0-8534-236B0C5C7B5F}" type="datetimeFigureOut">
               <a:rPr lang="en-NL" smtClean="0"/>
-              <a:t>20/10/2026</a:t>
+              <a:t>26/10/2026</a:t>
             </a:fld>
             <a:endParaRPr lang="en-NL"/>
           </a:p>
@@ -3890,7 +3896,7 @@
               <a:buNone/>
             </a:pPr>
             <a:r>
-              <a:rPr lang="nl-NL" sz="2000" dirty="0"/>
+              <a:rPr lang="nl-NL" sz="1800" dirty="0"/>
               <a:t>Valideer Python data structuren met classes en type hints.</a:t>
             </a:r>
           </a:p>
@@ -3901,17 +3907,17 @@
               </a:spcAft>
               <a:buNone/>
             </a:pPr>
-            <a:endParaRPr lang="nl-NL" sz="2000" dirty="0"/>
-          </a:p>
-          <a:p>
-            <a:pPr marL="0" indent="0">
-              <a:spcAft>
-                <a:spcPts val="600"/>
-              </a:spcAft>
-              <a:buNone/>
-            </a:pPr>
-            <a:r>
-              <a:rPr lang="nl-NL" sz="2000" dirty="0"/>
+            <a:endParaRPr lang="nl-NL" sz="1800" dirty="0"/>
+          </a:p>
+          <a:p>
+            <a:pPr marL="0" indent="0">
+              <a:spcAft>
+                <a:spcPts val="600"/>
+              </a:spcAft>
+              <a:buNone/>
+            </a:pPr>
+            <a:r>
+              <a:rPr lang="nl-NL" sz="1800" dirty="0"/>
               <a:t>Definieer data structuur als een class.</a:t>
             </a:r>
           </a:p>
@@ -3922,17 +3928,17 @@
               </a:spcAft>
               <a:buNone/>
             </a:pPr>
-            <a:endParaRPr lang="nl-NL" sz="2000" dirty="0"/>
-          </a:p>
-          <a:p>
-            <a:pPr marL="0" indent="0">
-              <a:spcAft>
-                <a:spcPts val="600"/>
-              </a:spcAft>
-              <a:buNone/>
-            </a:pPr>
-            <a:r>
-              <a:rPr lang="nl-NL" sz="2000" dirty="0"/>
+            <a:endParaRPr lang="nl-NL" sz="1800" dirty="0"/>
+          </a:p>
+          <a:p>
+            <a:pPr marL="0" indent="0">
+              <a:spcAft>
+                <a:spcPts val="600"/>
+              </a:spcAft>
+              <a:buNone/>
+            </a:pPr>
+            <a:r>
+              <a:rPr lang="nl-NL" sz="1800" dirty="0"/>
               <a:t>Valideer data als:</a:t>
             </a:r>
           </a:p>
@@ -3945,7 +3951,7 @@
               <a:buChar char="-"/>
             </a:pPr>
             <a:r>
-              <a:rPr lang="nl-NL" sz="2000" dirty="0"/>
+              <a:rPr lang="nl-NL" sz="1800" dirty="0"/>
               <a:t>argumenten</a:t>
             </a:r>
           </a:p>
@@ -3958,10 +3964,10 @@
               <a:buChar char="-"/>
             </a:pPr>
             <a:r>
-              <a:rPr lang="nl-NL" sz="2000" dirty="0" err="1"/>
+              <a:rPr lang="nl-NL" sz="1800" dirty="0" err="1"/>
               <a:t>dict</a:t>
             </a:r>
-            <a:endParaRPr lang="nl-NL" sz="2000" dirty="0"/>
+            <a:endParaRPr lang="nl-NL" sz="1800" dirty="0"/>
           </a:p>
           <a:p>
             <a:pPr>
@@ -3972,7 +3978,7 @@
               <a:buChar char="-"/>
             </a:pPr>
             <a:r>
-              <a:rPr lang="nl-NL" sz="2000" dirty="0"/>
+              <a:rPr lang="nl-NL" sz="1800" dirty="0"/>
               <a:t>JSON</a:t>
             </a:r>
           </a:p>
@@ -4941,7 +4947,7 @@
         </p:spPr>
         <p:txBody>
           <a:bodyPr>
-            <a:normAutofit fontScale="92500" lnSpcReduction="20000"/>
+            <a:noAutofit/>
           </a:bodyPr>
           <a:lstStyle/>
           <a:p>
@@ -4952,7 +4958,7 @@
               <a:buNone/>
             </a:pPr>
             <a:r>
-              <a:rPr lang="nl-NL" sz="2000" dirty="0"/>
+              <a:rPr lang="nl-NL" sz="1800" dirty="0"/>
               <a:t>Type hints standaard in Python, wel verschillen tussen versies!</a:t>
             </a:r>
           </a:p>
@@ -4964,7 +4970,7 @@
               <a:buNone/>
             </a:pPr>
             <a:r>
-              <a:rPr lang="nl-NL" sz="2000" dirty="0"/>
+              <a:rPr lang="nl-NL" sz="1800" dirty="0"/>
               <a:t>		</a:t>
             </a:r>
           </a:p>
@@ -5594,37 +5600,37 @@
               </a:spcAft>
               <a:buNone/>
             </a:pPr>
-            <a:endParaRPr lang="nl-NL" sz="2000" dirty="0"/>
-          </a:p>
-          <a:p>
-            <a:pPr marL="0" indent="0">
-              <a:spcAft>
-                <a:spcPts val="600"/>
-              </a:spcAft>
-              <a:buNone/>
-            </a:pPr>
-            <a:endParaRPr lang="nl-NL" sz="2000" dirty="0"/>
-          </a:p>
-          <a:p>
-            <a:pPr marL="0" indent="0">
-              <a:spcAft>
-                <a:spcPts val="600"/>
-              </a:spcAft>
-              <a:buNone/>
-            </a:pPr>
-            <a:r>
-              <a:rPr lang="nl-NL" sz="2000" dirty="0"/>
+            <a:endParaRPr lang="nl-NL" sz="1800" dirty="0"/>
+          </a:p>
+          <a:p>
+            <a:pPr marL="0" indent="0">
+              <a:spcAft>
+                <a:spcPts val="600"/>
+              </a:spcAft>
+              <a:buNone/>
+            </a:pPr>
+            <a:endParaRPr lang="nl-NL" sz="1800" dirty="0"/>
+          </a:p>
+          <a:p>
+            <a:pPr marL="0" indent="0">
+              <a:spcAft>
+                <a:spcPts val="600"/>
+              </a:spcAft>
+              <a:buNone/>
+            </a:pPr>
+            <a:r>
+              <a:rPr lang="nl-NL" sz="1800" dirty="0"/>
               <a:t>Geef met </a:t>
             </a:r>
             <a:r>
-              <a:rPr lang="nl-NL" sz="2000" dirty="0">
+              <a:rPr lang="nl-NL" sz="1800" dirty="0">
                 <a:latin typeface="Courier New" panose="02070309020205020404" pitchFamily="49" charset="0"/>
                 <a:cs typeface="Courier New" panose="02070309020205020404" pitchFamily="49" charset="0"/>
               </a:rPr>
               <a:t>=</a:t>
             </a:r>
             <a:r>
-              <a:rPr lang="nl-NL" sz="2000" dirty="0"/>
+              <a:rPr lang="nl-NL" sz="1800" dirty="0"/>
               <a:t> een standaard waarde op voor attributen.</a:t>
             </a:r>
           </a:p>
@@ -5635,17 +5641,17 @@
               </a:spcAft>
               <a:buNone/>
             </a:pPr>
-            <a:endParaRPr lang="nl-NL" sz="2000" dirty="0"/>
-          </a:p>
-          <a:p>
-            <a:pPr marL="0" indent="0">
-              <a:spcAft>
-                <a:spcPts val="600"/>
-              </a:spcAft>
-              <a:buNone/>
-            </a:pPr>
-            <a:r>
-              <a:rPr lang="nl-NL" sz="2000" dirty="0"/>
+            <a:endParaRPr lang="nl-NL" sz="1800" dirty="0"/>
+          </a:p>
+          <a:p>
+            <a:pPr marL="0" indent="0">
+              <a:spcAft>
+                <a:spcPts val="600"/>
+              </a:spcAft>
+              <a:buNone/>
+            </a:pPr>
+            <a:r>
+              <a:rPr lang="nl-NL" sz="1800" dirty="0"/>
               <a:t>Attribuut niet meer verplicht bij initialisatie of validatie.</a:t>
             </a:r>
           </a:p>
@@ -6251,8 +6257,8 @@
               <a:buNone/>
             </a:pPr>
             <a:r>
-              <a:rPr lang="nl-NL" sz="2000" dirty="0"/>
-              <a:t>De standaard waarde is constant en wordt bepaald in de class definitie…</a:t>
+              <a:rPr lang="nl-NL" sz="1800" dirty="0"/>
+              <a:t>De standaard waarde is constant en wordt vastgesteld met de definitie…</a:t>
             </a:r>
           </a:p>
         </p:txBody>
@@ -7935,8 +7941,8 @@
               <a:buNone/>
             </a:pPr>
             <a:r>
-              <a:rPr lang="nl-NL" sz="2000" dirty="0"/>
-              <a:t>De standaard waarde is constant en wordt bepaald tijdens class definitie…</a:t>
+              <a:rPr lang="nl-NL" sz="1800" dirty="0"/>
+              <a:t>De standaard waarde is constant en wordt vastgesteld met de definitie…</a:t>
             </a:r>
           </a:p>
           <a:p>
@@ -7947,7 +7953,7 @@
               <a:buFont typeface="Arial" panose="020B0604020202020204" pitchFamily="34" charset="0"/>
               <a:buNone/>
             </a:pPr>
-            <a:endParaRPr lang="nl-NL" sz="2000" dirty="0"/>
+            <a:endParaRPr lang="nl-NL" sz="1800" dirty="0"/>
           </a:p>
           <a:p>
             <a:pPr marL="0" indent="0">
@@ -7957,37 +7963,37 @@
               <a:buFont typeface="Arial" panose="020B0604020202020204" pitchFamily="34" charset="0"/>
               <a:buNone/>
             </a:pPr>
-            <a:endParaRPr lang="nl-NL" sz="2000" dirty="0"/>
-          </a:p>
-          <a:p>
-            <a:pPr marL="0" indent="0">
-              <a:spcAft>
-                <a:spcPts val="600"/>
-              </a:spcAft>
-              <a:buNone/>
-            </a:pPr>
-            <a:endParaRPr lang="nl-NL" sz="2000" dirty="0"/>
-          </a:p>
-          <a:p>
-            <a:pPr marL="0" indent="0">
-              <a:spcAft>
-                <a:spcPts val="600"/>
-              </a:spcAft>
-              <a:buNone/>
-            </a:pPr>
-            <a:r>
-              <a:rPr lang="nl-NL" sz="2000" dirty="0"/>
+            <a:endParaRPr lang="nl-NL" sz="1800" dirty="0"/>
+          </a:p>
+          <a:p>
+            <a:pPr marL="0" indent="0">
+              <a:spcAft>
+                <a:spcPts val="600"/>
+              </a:spcAft>
+              <a:buNone/>
+            </a:pPr>
+            <a:endParaRPr lang="nl-NL" sz="1800" dirty="0"/>
+          </a:p>
+          <a:p>
+            <a:pPr marL="0" indent="0">
+              <a:spcAft>
+                <a:spcPts val="600"/>
+              </a:spcAft>
+              <a:buNone/>
+            </a:pPr>
+            <a:r>
+              <a:rPr lang="nl-NL" sz="1800" dirty="0"/>
               <a:t>Maar een </a:t>
             </a:r>
             <a:r>
-              <a:rPr lang="nl-NL" sz="2000" dirty="0" err="1">
+              <a:rPr lang="nl-NL" sz="1800" dirty="0" err="1">
                 <a:latin typeface="Courier New" panose="02070309020205020404" pitchFamily="49" charset="0"/>
                 <a:cs typeface="Courier New" panose="02070309020205020404" pitchFamily="49" charset="0"/>
               </a:rPr>
               <a:t>default_factory</a:t>
             </a:r>
             <a:r>
-              <a:rPr lang="nl-NL" sz="2000" dirty="0"/>
+              <a:rPr lang="nl-NL" sz="1800" dirty="0"/>
               <a:t> wordt bij elke initialisatie uitgevoerd!</a:t>
             </a:r>
           </a:p>
@@ -7999,7 +8005,7 @@
               <a:buFont typeface="Arial" panose="020B0604020202020204" pitchFamily="34" charset="0"/>
               <a:buNone/>
             </a:pPr>
-            <a:endParaRPr lang="nl-NL" sz="2000" dirty="0"/>
+            <a:endParaRPr lang="nl-NL" sz="1800" dirty="0"/>
           </a:p>
         </p:txBody>
       </p:sp>
@@ -8109,18 +8115,18 @@
               <a:buNone/>
             </a:pPr>
             <a:r>
-              <a:rPr lang="nl-NL" sz="2000" dirty="0"/>
+              <a:rPr lang="nl-NL" sz="1800" dirty="0"/>
               <a:t>Een </a:t>
             </a:r>
             <a:r>
-              <a:rPr lang="nl-NL" sz="2000" dirty="0">
+              <a:rPr lang="nl-NL" sz="1800" dirty="0">
                 <a:latin typeface="Courier New" panose="02070309020205020404" pitchFamily="49" charset="0"/>
                 <a:cs typeface="Courier New" panose="02070309020205020404" pitchFamily="49" charset="0"/>
               </a:rPr>
               <a:t>Field</a:t>
             </a:r>
             <a:r>
-              <a:rPr lang="nl-NL" sz="2000" dirty="0"/>
+              <a:rPr lang="nl-NL" sz="1800" dirty="0"/>
               <a:t> kan extra controles uitvoeren:</a:t>
             </a:r>
           </a:p>
@@ -8131,21 +8137,21 @@
               </a:spcAft>
               <a:buNone/>
             </a:pPr>
-            <a:endParaRPr lang="nl-NL" sz="2000" dirty="0"/>
-          </a:p>
-          <a:p>
-            <a:pPr marL="0" indent="0">
-              <a:spcAft>
-                <a:spcPts val="600"/>
-              </a:spcAft>
-              <a:buNone/>
-            </a:pPr>
-            <a:r>
-              <a:rPr lang="nl-NL" sz="2000" dirty="0" err="1"/>
+            <a:endParaRPr lang="nl-NL" sz="1800" dirty="0"/>
+          </a:p>
+          <a:p>
+            <a:pPr marL="0" indent="0">
+              <a:spcAft>
+                <a:spcPts val="600"/>
+              </a:spcAft>
+              <a:buNone/>
+            </a:pPr>
+            <a:r>
+              <a:rPr lang="nl-NL" sz="1800" dirty="0" err="1"/>
               <a:t>str</a:t>
             </a:r>
             <a:r>
-              <a:rPr lang="nl-NL" sz="2000" dirty="0"/>
+              <a:rPr lang="nl-NL" sz="1800" dirty="0"/>
               <a:t>:</a:t>
             </a:r>
           </a:p>
@@ -8191,38 +8197,38 @@
               </a:rPr>
               <a:t>pattern</a:t>
             </a:r>
-            <a:endParaRPr lang="nl-NL" sz="2000" dirty="0"/>
-          </a:p>
-          <a:p>
-            <a:pPr marL="0" indent="0">
-              <a:spcAft>
-                <a:spcPts val="600"/>
-              </a:spcAft>
-              <a:buNone/>
-            </a:pPr>
-            <a:endParaRPr lang="nl-NL" sz="2000" dirty="0"/>
-          </a:p>
-          <a:p>
-            <a:pPr marL="0" indent="0">
-              <a:spcAft>
-                <a:spcPts val="600"/>
-              </a:spcAft>
-              <a:buNone/>
-            </a:pPr>
-            <a:r>
-              <a:rPr lang="nl-NL" sz="2000" dirty="0" err="1"/>
+            <a:endParaRPr lang="nl-NL" sz="1800" dirty="0"/>
+          </a:p>
+          <a:p>
+            <a:pPr marL="0" indent="0">
+              <a:spcAft>
+                <a:spcPts val="600"/>
+              </a:spcAft>
+              <a:buNone/>
+            </a:pPr>
+            <a:endParaRPr lang="nl-NL" sz="1800" dirty="0"/>
+          </a:p>
+          <a:p>
+            <a:pPr marL="0" indent="0">
+              <a:spcAft>
+                <a:spcPts val="600"/>
+              </a:spcAft>
+              <a:buNone/>
+            </a:pPr>
+            <a:r>
+              <a:rPr lang="nl-NL" sz="1800" dirty="0" err="1"/>
               <a:t>dict</a:t>
             </a:r>
             <a:r>
-              <a:rPr lang="nl-NL" sz="2000" dirty="0"/>
+              <a:rPr lang="nl-NL" sz="1800" dirty="0"/>
               <a:t> / list / </a:t>
             </a:r>
             <a:r>
-              <a:rPr lang="nl-NL" sz="2000" dirty="0" err="1"/>
+              <a:rPr lang="nl-NL" sz="1800" dirty="0" err="1"/>
               <a:t>tuple</a:t>
             </a:r>
             <a:r>
-              <a:rPr lang="nl-NL" sz="2000" dirty="0"/>
+              <a:rPr lang="nl-NL" sz="1800" dirty="0"/>
               <a:t>:</a:t>
             </a:r>
           </a:p>
@@ -8263,25 +8269,25 @@
               </a:spcAft>
               <a:buNone/>
             </a:pPr>
-            <a:endParaRPr lang="nl-NL" sz="2000" dirty="0"/>
-          </a:p>
-          <a:p>
-            <a:pPr marL="0" indent="0">
-              <a:spcAft>
-                <a:spcPts val="600"/>
-              </a:spcAft>
-              <a:buNone/>
-            </a:pPr>
-            <a:r>
-              <a:rPr lang="nl-NL" sz="2000" dirty="0"/>
+            <a:endParaRPr lang="nl-NL" sz="1800" dirty="0"/>
+          </a:p>
+          <a:p>
+            <a:pPr marL="0" indent="0">
+              <a:spcAft>
+                <a:spcPts val="600"/>
+              </a:spcAft>
+              <a:buNone/>
+            </a:pPr>
+            <a:r>
+              <a:rPr lang="nl-NL" sz="1800" dirty="0"/>
               <a:t>int / </a:t>
             </a:r>
             <a:r>
-              <a:rPr lang="nl-NL" sz="2000" dirty="0" err="1"/>
+              <a:rPr lang="nl-NL" sz="1800" dirty="0" err="1"/>
               <a:t>float</a:t>
             </a:r>
             <a:r>
-              <a:rPr lang="nl-NL" sz="2000" dirty="0"/>
+              <a:rPr lang="nl-NL" sz="1800" dirty="0"/>
               <a:t>:</a:t>
             </a:r>
           </a:p>
@@ -9112,144 +9118,144 @@
               <a:buAutoNum type="arabicPeriod"/>
             </a:pPr>
             <a:r>
-              <a:rPr lang="nl-NL" sz="2000" dirty="0"/>
+              <a:rPr lang="nl-NL" sz="1800" dirty="0"/>
               <a:t>Maak </a:t>
             </a:r>
             <a:r>
-              <a:rPr lang="nl-NL" sz="2000" dirty="0" err="1">
+              <a:rPr lang="nl-NL" sz="1800" dirty="0" err="1">
                 <a:latin typeface="Courier New" panose="02070309020205020404" pitchFamily="49" charset="0"/>
                 <a:cs typeface="Courier New" panose="02070309020205020404" pitchFamily="49" charset="0"/>
               </a:rPr>
               <a:t>BaseModel</a:t>
             </a:r>
             <a:r>
-              <a:rPr lang="nl-NL" sz="2000" dirty="0"/>
+              <a:rPr lang="nl-NL" sz="1800" dirty="0"/>
               <a:t> voor een </a:t>
             </a:r>
             <a:r>
-              <a:rPr lang="nl-NL" sz="2000" dirty="0" err="1">
+              <a:rPr lang="nl-NL" sz="1800" dirty="0" err="1">
                 <a:latin typeface="Courier New" panose="02070309020205020404" pitchFamily="49" charset="0"/>
                 <a:cs typeface="Courier New" panose="02070309020205020404" pitchFamily="49" charset="0"/>
               </a:rPr>
               <a:t>ToDoItem</a:t>
             </a:r>
             <a:r>
-              <a:rPr lang="nl-NL" sz="2000" dirty="0"/>
+              <a:rPr lang="nl-NL" sz="1800" dirty="0"/>
               <a:t> met:</a:t>
             </a:r>
           </a:p>
           <a:p>
             <a:pPr lvl="1"/>
-            <a:endParaRPr lang="nl-NL" sz="2000" dirty="0"/>
+            <a:endParaRPr lang="nl-NL" sz="1800" dirty="0"/>
           </a:p>
           <a:p>
             <a:pPr lvl="1"/>
             <a:r>
-              <a:rPr lang="nl-NL" sz="2000" dirty="0"/>
+              <a:rPr lang="nl-NL" sz="1800" dirty="0"/>
               <a:t>Een uniek ID gegenereerd met </a:t>
             </a:r>
             <a:r>
-              <a:rPr lang="nl-NL" sz="2000" dirty="0">
+              <a:rPr lang="nl-NL" sz="1800" dirty="0">
                 <a:latin typeface="Courier New" panose="02070309020205020404" pitchFamily="49" charset="0"/>
                 <a:cs typeface="Courier New" panose="02070309020205020404" pitchFamily="49" charset="0"/>
               </a:rPr>
               <a:t>uuid.uuid4()</a:t>
             </a:r>
             <a:r>
-              <a:rPr lang="nl-NL" sz="2000" dirty="0"/>
+              <a:rPr lang="nl-NL" sz="1800" dirty="0"/>
               <a:t>.</a:t>
             </a:r>
           </a:p>
           <a:p>
             <a:pPr lvl="1"/>
             <a:r>
-              <a:rPr lang="nl-NL" sz="2000" dirty="0"/>
+              <a:rPr lang="nl-NL" sz="1800" dirty="0"/>
               <a:t>Een verplichte omschrijving.</a:t>
             </a:r>
           </a:p>
           <a:p>
             <a:pPr lvl="1"/>
             <a:r>
-              <a:rPr lang="nl-NL" sz="2000" dirty="0"/>
+              <a:rPr lang="nl-NL" sz="1800" dirty="0"/>
               <a:t>Een prioriteit met opties: </a:t>
             </a:r>
             <a:r>
-              <a:rPr lang="nl-NL" sz="2000" dirty="0">
+              <a:rPr lang="nl-NL" sz="1800" dirty="0">
                 <a:latin typeface="Courier New" panose="02070309020205020404" pitchFamily="49" charset="0"/>
                 <a:cs typeface="Courier New" panose="02070309020205020404" pitchFamily="49" charset="0"/>
               </a:rPr>
               <a:t>Low</a:t>
             </a:r>
             <a:r>
-              <a:rPr lang="nl-NL" sz="2000" dirty="0"/>
+              <a:rPr lang="nl-NL" sz="1800" dirty="0"/>
               <a:t>, </a:t>
             </a:r>
             <a:r>
-              <a:rPr lang="nl-NL" sz="2000" dirty="0">
+              <a:rPr lang="nl-NL" sz="1800" dirty="0">
                 <a:latin typeface="Courier New" panose="02070309020205020404" pitchFamily="49" charset="0"/>
                 <a:cs typeface="Courier New" panose="02070309020205020404" pitchFamily="49" charset="0"/>
               </a:rPr>
               <a:t>Medium</a:t>
             </a:r>
             <a:r>
-              <a:rPr lang="nl-NL" sz="2000" dirty="0"/>
+              <a:rPr lang="nl-NL" sz="1800" dirty="0"/>
               <a:t> (standaard) of </a:t>
             </a:r>
             <a:r>
-              <a:rPr lang="nl-NL" sz="2000" dirty="0">
+              <a:rPr lang="nl-NL" sz="1800" dirty="0">
                 <a:latin typeface="Courier New" panose="02070309020205020404" pitchFamily="49" charset="0"/>
                 <a:cs typeface="Courier New" panose="02070309020205020404" pitchFamily="49" charset="0"/>
               </a:rPr>
               <a:t>High</a:t>
             </a:r>
             <a:r>
-              <a:rPr lang="nl-NL" sz="2000" dirty="0"/>
+              <a:rPr lang="nl-NL" sz="1800" dirty="0"/>
               <a:t>.</a:t>
             </a:r>
           </a:p>
           <a:p>
             <a:pPr lvl="1"/>
             <a:r>
-              <a:rPr lang="nl-NL" sz="2000" dirty="0"/>
+              <a:rPr lang="nl-NL" sz="1800" dirty="0"/>
               <a:t>Een status: </a:t>
             </a:r>
             <a:r>
-              <a:rPr lang="nl-NL" sz="2000" dirty="0">
+              <a:rPr lang="nl-NL" sz="1800" dirty="0">
                 <a:latin typeface="Courier New" panose="02070309020205020404" pitchFamily="49" charset="0"/>
                 <a:cs typeface="Courier New" panose="02070309020205020404" pitchFamily="49" charset="0"/>
               </a:rPr>
               <a:t>Active</a:t>
             </a:r>
             <a:r>
-              <a:rPr lang="nl-NL" sz="2000" dirty="0"/>
+              <a:rPr lang="nl-NL" sz="1800" dirty="0"/>
               <a:t> (standaard) of </a:t>
             </a:r>
             <a:r>
-              <a:rPr lang="nl-NL" sz="2000" dirty="0" err="1">
+              <a:rPr lang="nl-NL" sz="1800" dirty="0" err="1">
                 <a:latin typeface="Courier New" panose="02070309020205020404" pitchFamily="49" charset="0"/>
                 <a:cs typeface="Courier New" panose="02070309020205020404" pitchFamily="49" charset="0"/>
               </a:rPr>
               <a:t>Done</a:t>
             </a:r>
             <a:r>
-              <a:rPr lang="nl-NL" sz="2000" dirty="0"/>
+              <a:rPr lang="nl-NL" sz="1800" dirty="0"/>
               <a:t>.</a:t>
             </a:r>
           </a:p>
           <a:p>
             <a:pPr lvl="1"/>
             <a:r>
-              <a:rPr lang="nl-NL" sz="2000" dirty="0"/>
+              <a:rPr lang="nl-NL" sz="1800" dirty="0"/>
               <a:t>Een aanmaaktijdstip, standaard op huidige tijd.</a:t>
             </a:r>
           </a:p>
           <a:p>
             <a:pPr lvl="1"/>
             <a:r>
-              <a:rPr lang="nl-NL" sz="2000" dirty="0"/>
+              <a:rPr lang="nl-NL" sz="1800" dirty="0"/>
               <a:t>Een afsluittijdstip, standaard niet ingevuld.</a:t>
             </a:r>
-            <a:endParaRPr lang="nl-NL" sz="2000" dirty="0">
+            <a:endParaRPr lang="nl-NL" sz="1800" dirty="0">
               <a:latin typeface="Courier New" panose="02070309020205020404" pitchFamily="49" charset="0"/>
               <a:cs typeface="Courier New" panose="02070309020205020404" pitchFamily="49" charset="0"/>
             </a:endParaRPr>
@@ -9259,7 +9265,7 @@
               <a:buFont typeface="Arial" panose="020B0604020202020204" pitchFamily="34" charset="0"/>
               <a:buAutoNum type="arabicPeriod"/>
             </a:pPr>
-            <a:endParaRPr lang="nl-NL" sz="2000" dirty="0"/>
+            <a:endParaRPr lang="nl-NL" sz="1800" dirty="0"/>
           </a:p>
           <a:p>
             <a:pPr marL="457200" indent="-457200">
@@ -9267,29 +9273,29 @@
               <a:buAutoNum type="arabicPeriod"/>
             </a:pPr>
             <a:r>
-              <a:rPr lang="nl-NL" sz="2000" dirty="0"/>
+              <a:rPr lang="nl-NL" sz="1800" dirty="0"/>
               <a:t>Maak een </a:t>
             </a:r>
             <a:r>
-              <a:rPr lang="nl-NL" sz="2000" dirty="0" err="1">
+              <a:rPr lang="nl-NL" sz="1800" dirty="0" err="1">
                 <a:latin typeface="Courier New" panose="02070309020205020404" pitchFamily="49" charset="0"/>
                 <a:cs typeface="Courier New" panose="02070309020205020404" pitchFamily="49" charset="0"/>
               </a:rPr>
               <a:t>BaseModel</a:t>
             </a:r>
             <a:r>
-              <a:rPr lang="nl-NL" sz="2000" dirty="0"/>
+              <a:rPr lang="nl-NL" sz="1800" dirty="0"/>
               <a:t> voor een lijst van </a:t>
             </a:r>
             <a:r>
-              <a:rPr lang="nl-NL" sz="2000" dirty="0" err="1">
+              <a:rPr lang="nl-NL" sz="1800" dirty="0" err="1">
                 <a:latin typeface="Courier New" panose="02070309020205020404" pitchFamily="49" charset="0"/>
                 <a:cs typeface="Courier New" panose="02070309020205020404" pitchFamily="49" charset="0"/>
               </a:rPr>
               <a:t>ToDoItem</a:t>
             </a:r>
             <a:r>
-              <a:rPr lang="nl-NL" sz="2000" dirty="0"/>
+              <a:rPr lang="nl-NL" sz="1800" dirty="0"/>
               <a:t> objecten.</a:t>
             </a:r>
           </a:p>
@@ -9297,7 +9303,7 @@
             <a:pPr marL="0" indent="0">
               <a:buNone/>
             </a:pPr>
-            <a:endParaRPr lang="nl-NL" sz="2000" dirty="0"/>
+            <a:endParaRPr lang="nl-NL" sz="1800" dirty="0"/>
           </a:p>
         </p:txBody>
       </p:sp>
@@ -9305,6 +9311,2165 @@
     <p:extLst>
       <p:ext uri="{BB962C8B-B14F-4D97-AF65-F5344CB8AC3E}">
         <p14:creationId xmlns:p14="http://schemas.microsoft.com/office/powerpoint/2010/main" val="4213291432"/>
+      </p:ext>
+    </p:extLst>
+  </p:cSld>
+  <p:clrMapOvr>
+    <a:masterClrMapping/>
+  </p:clrMapOvr>
+</p:sld>
+</file>
+
+<file path=ppt/slides/slide17.xml><?xml version="1.0" encoding="utf-8"?>
+<p:sld xmlns:a="http://schemas.openxmlformats.org/drawingml/2006/main" xmlns:r="http://schemas.openxmlformats.org/officeDocument/2006/relationships" xmlns:p="http://schemas.openxmlformats.org/presentationml/2006/main">
+  <p:cSld>
+    <p:spTree>
+      <p:nvGrpSpPr>
+        <p:cNvPr id="1" name="">
+          <a:extLst>
+            <a:ext uri="{FF2B5EF4-FFF2-40B4-BE49-F238E27FC236}">
+              <a16:creationId xmlns:a16="http://schemas.microsoft.com/office/drawing/2014/main" id="{D478153D-3EB3-D404-5179-1E3547FF0ACA}"/>
+            </a:ext>
+          </a:extLst>
+        </p:cNvPr>
+        <p:cNvGrpSpPr/>
+        <p:nvPr/>
+      </p:nvGrpSpPr>
+      <p:grpSpPr>
+        <a:xfrm>
+          <a:off x="0" y="0"/>
+          <a:ext cx="0" cy="0"/>
+          <a:chOff x="0" y="0"/>
+          <a:chExt cx="0" cy="0"/>
+        </a:xfrm>
+      </p:grpSpPr>
+      <p:sp>
+        <p:nvSpPr>
+          <p:cNvPr id="4" name="Title 3">
+            <a:extLst>
+              <a:ext uri="{FF2B5EF4-FFF2-40B4-BE49-F238E27FC236}">
+                <a16:creationId xmlns:a16="http://schemas.microsoft.com/office/drawing/2014/main" id="{A5D8F30E-5864-2BDE-EA04-8E637558C0A0}"/>
+              </a:ext>
+            </a:extLst>
+          </p:cNvPr>
+          <p:cNvSpPr>
+            <a:spLocks noGrp="1"/>
+          </p:cNvSpPr>
+          <p:nvPr>
+            <p:ph type="title"/>
+          </p:nvPr>
+        </p:nvSpPr>
+        <p:spPr/>
+        <p:txBody>
+          <a:bodyPr/>
+          <a:lstStyle/>
+          <a:p>
+            <a:r>
+              <a:rPr lang="nl-NL" dirty="0" err="1"/>
+              <a:t>FastAPI</a:t>
+            </a:r>
+            <a:endParaRPr lang="nl-NL" dirty="0"/>
+          </a:p>
+        </p:txBody>
+      </p:sp>
+      <p:sp>
+        <p:nvSpPr>
+          <p:cNvPr id="5" name="Text Placeholder 4">
+            <a:extLst>
+              <a:ext uri="{FF2B5EF4-FFF2-40B4-BE49-F238E27FC236}">
+                <a16:creationId xmlns:a16="http://schemas.microsoft.com/office/drawing/2014/main" id="{296B9FD7-21FF-09C7-B671-C81EB826F955}"/>
+              </a:ext>
+            </a:extLst>
+          </p:cNvPr>
+          <p:cNvSpPr>
+            <a:spLocks noGrp="1"/>
+          </p:cNvSpPr>
+          <p:nvPr>
+            <p:ph type="body" idx="1"/>
+          </p:nvPr>
+        </p:nvSpPr>
+        <p:spPr/>
+        <p:txBody>
+          <a:bodyPr/>
+          <a:lstStyle/>
+          <a:p>
+            <a:endParaRPr lang="en-NL"/>
+          </a:p>
+        </p:txBody>
+      </p:sp>
+    </p:spTree>
+    <p:extLst>
+      <p:ext uri="{BB962C8B-B14F-4D97-AF65-F5344CB8AC3E}">
+        <p14:creationId xmlns:p14="http://schemas.microsoft.com/office/powerpoint/2010/main" val="1942517938"/>
+      </p:ext>
+    </p:extLst>
+  </p:cSld>
+  <p:clrMapOvr>
+    <a:masterClrMapping/>
+  </p:clrMapOvr>
+</p:sld>
+</file>
+
+<file path=ppt/slides/slide18.xml><?xml version="1.0" encoding="utf-8"?>
+<p:sld xmlns:a="http://schemas.openxmlformats.org/drawingml/2006/main" xmlns:r="http://schemas.openxmlformats.org/officeDocument/2006/relationships" xmlns:p="http://schemas.openxmlformats.org/presentationml/2006/main">
+  <p:cSld>
+    <p:spTree>
+      <p:nvGrpSpPr>
+        <p:cNvPr id="1" name="">
+          <a:extLst>
+            <a:ext uri="{FF2B5EF4-FFF2-40B4-BE49-F238E27FC236}">
+              <a16:creationId xmlns:a16="http://schemas.microsoft.com/office/drawing/2014/main" id="{1D2AD686-FD72-076E-00C2-ABDE0A030064}"/>
+            </a:ext>
+          </a:extLst>
+        </p:cNvPr>
+        <p:cNvGrpSpPr/>
+        <p:nvPr/>
+      </p:nvGrpSpPr>
+      <p:grpSpPr>
+        <a:xfrm>
+          <a:off x="0" y="0"/>
+          <a:ext cx="0" cy="0"/>
+          <a:chOff x="0" y="0"/>
+          <a:chExt cx="0" cy="0"/>
+        </a:xfrm>
+      </p:grpSpPr>
+      <p:sp>
+        <p:nvSpPr>
+          <p:cNvPr id="2" name="Title 1">
+            <a:extLst>
+              <a:ext uri="{FF2B5EF4-FFF2-40B4-BE49-F238E27FC236}">
+                <a16:creationId xmlns:a16="http://schemas.microsoft.com/office/drawing/2014/main" id="{FDBB38CC-E1E2-13C4-CAD7-FEF341191404}"/>
+              </a:ext>
+            </a:extLst>
+          </p:cNvPr>
+          <p:cNvSpPr>
+            <a:spLocks noGrp="1"/>
+          </p:cNvSpPr>
+          <p:nvPr>
+            <p:ph type="title"/>
+          </p:nvPr>
+        </p:nvSpPr>
+        <p:spPr>
+          <a:xfrm>
+            <a:off x="838200" y="365126"/>
+            <a:ext cx="10515600" cy="718608"/>
+          </a:xfrm>
+        </p:spPr>
+        <p:txBody>
+          <a:bodyPr>
+            <a:normAutofit/>
+          </a:bodyPr>
+          <a:lstStyle/>
+          <a:p>
+            <a:r>
+              <a:rPr lang="nl-NL" sz="3600" dirty="0"/>
+              <a:t>API acties</a:t>
+            </a:r>
+            <a:endParaRPr lang="nl-NL" sz="3600" noProof="0" dirty="0"/>
+          </a:p>
+        </p:txBody>
+      </p:sp>
+      <p:sp>
+        <p:nvSpPr>
+          <p:cNvPr id="6" name="Rectangle 5">
+            <a:extLst>
+              <a:ext uri="{FF2B5EF4-FFF2-40B4-BE49-F238E27FC236}">
+                <a16:creationId xmlns:a16="http://schemas.microsoft.com/office/drawing/2014/main" id="{A5A294E0-FF4F-410A-5427-B75C53AFB98B}"/>
+              </a:ext>
+            </a:extLst>
+          </p:cNvPr>
+          <p:cNvSpPr/>
+          <p:nvPr/>
+        </p:nvSpPr>
+        <p:spPr>
+          <a:xfrm>
+            <a:off x="1428750" y="1701800"/>
+            <a:ext cx="3009900" cy="718608"/>
+          </a:xfrm>
+          <a:prstGeom prst="rect">
+            <a:avLst/>
+          </a:prstGeom>
+        </p:spPr>
+        <p:style>
+          <a:lnRef idx="2">
+            <a:schemeClr val="accent3"/>
+          </a:lnRef>
+          <a:fillRef idx="1">
+            <a:schemeClr val="lt1"/>
+          </a:fillRef>
+          <a:effectRef idx="0">
+            <a:schemeClr val="accent3"/>
+          </a:effectRef>
+          <a:fontRef idx="minor">
+            <a:schemeClr val="dk1"/>
+          </a:fontRef>
+        </p:style>
+        <p:txBody>
+          <a:bodyPr rtlCol="0" anchor="ctr"/>
+          <a:lstStyle/>
+          <a:p>
+            <a:pPr algn="ctr"/>
+            <a:r>
+              <a:rPr lang="en-US" dirty="0" err="1"/>
+              <a:t>Overzicht</a:t>
+            </a:r>
+            <a:r>
+              <a:rPr lang="en-US" dirty="0"/>
+              <a:t> TO DO items</a:t>
+            </a:r>
+          </a:p>
+        </p:txBody>
+      </p:sp>
+      <p:sp>
+        <p:nvSpPr>
+          <p:cNvPr id="7" name="Rectangle 6">
+            <a:extLst>
+              <a:ext uri="{FF2B5EF4-FFF2-40B4-BE49-F238E27FC236}">
+                <a16:creationId xmlns:a16="http://schemas.microsoft.com/office/drawing/2014/main" id="{01EC12C5-8409-B1B7-ACD1-37F95B4D320F}"/>
+              </a:ext>
+            </a:extLst>
+          </p:cNvPr>
+          <p:cNvSpPr/>
+          <p:nvPr/>
+        </p:nvSpPr>
+        <p:spPr>
+          <a:xfrm>
+            <a:off x="1428750" y="2851150"/>
+            <a:ext cx="3009900" cy="718608"/>
+          </a:xfrm>
+          <a:prstGeom prst="rect">
+            <a:avLst/>
+          </a:prstGeom>
+        </p:spPr>
+        <p:style>
+          <a:lnRef idx="2">
+            <a:schemeClr val="accent3"/>
+          </a:lnRef>
+          <a:fillRef idx="1">
+            <a:schemeClr val="lt1"/>
+          </a:fillRef>
+          <a:effectRef idx="0">
+            <a:schemeClr val="accent3"/>
+          </a:effectRef>
+          <a:fontRef idx="minor">
+            <a:schemeClr val="dk1"/>
+          </a:fontRef>
+        </p:style>
+        <p:txBody>
+          <a:bodyPr rtlCol="0" anchor="ctr"/>
+          <a:lstStyle/>
+          <a:p>
+            <a:pPr algn="ctr"/>
+            <a:r>
+              <a:rPr lang="en-US" dirty="0"/>
+              <a:t>TO DO item </a:t>
+            </a:r>
+            <a:r>
+              <a:rPr lang="en-US" dirty="0" err="1"/>
+              <a:t>maken</a:t>
+            </a:r>
+            <a:endParaRPr lang="en-US" dirty="0"/>
+          </a:p>
+        </p:txBody>
+      </p:sp>
+      <p:sp>
+        <p:nvSpPr>
+          <p:cNvPr id="8" name="Rectangle 7">
+            <a:extLst>
+              <a:ext uri="{FF2B5EF4-FFF2-40B4-BE49-F238E27FC236}">
+                <a16:creationId xmlns:a16="http://schemas.microsoft.com/office/drawing/2014/main" id="{81C4B974-DE34-9D97-C7FF-E0FF62797FB8}"/>
+              </a:ext>
+            </a:extLst>
+          </p:cNvPr>
+          <p:cNvSpPr/>
+          <p:nvPr/>
+        </p:nvSpPr>
+        <p:spPr>
+          <a:xfrm>
+            <a:off x="1428750" y="4000500"/>
+            <a:ext cx="3009900" cy="718608"/>
+          </a:xfrm>
+          <a:prstGeom prst="rect">
+            <a:avLst/>
+          </a:prstGeom>
+        </p:spPr>
+        <p:style>
+          <a:lnRef idx="2">
+            <a:schemeClr val="accent3"/>
+          </a:lnRef>
+          <a:fillRef idx="1">
+            <a:schemeClr val="lt1"/>
+          </a:fillRef>
+          <a:effectRef idx="0">
+            <a:schemeClr val="accent3"/>
+          </a:effectRef>
+          <a:fontRef idx="minor">
+            <a:schemeClr val="dk1"/>
+          </a:fontRef>
+        </p:style>
+        <p:txBody>
+          <a:bodyPr rtlCol="0" anchor="ctr"/>
+          <a:lstStyle/>
+          <a:p>
+            <a:pPr algn="ctr"/>
+            <a:r>
+              <a:rPr lang="en-US" dirty="0"/>
+              <a:t>TO DO status update</a:t>
+            </a:r>
+          </a:p>
+        </p:txBody>
+      </p:sp>
+      <p:sp>
+        <p:nvSpPr>
+          <p:cNvPr id="9" name="Rectangle 8">
+            <a:extLst>
+              <a:ext uri="{FF2B5EF4-FFF2-40B4-BE49-F238E27FC236}">
+                <a16:creationId xmlns:a16="http://schemas.microsoft.com/office/drawing/2014/main" id="{FBAB83DE-DF4B-11C9-759C-4A03FF6CDE47}"/>
+              </a:ext>
+            </a:extLst>
+          </p:cNvPr>
+          <p:cNvSpPr/>
+          <p:nvPr/>
+        </p:nvSpPr>
+        <p:spPr>
+          <a:xfrm>
+            <a:off x="1428750" y="5149850"/>
+            <a:ext cx="3009900" cy="718608"/>
+          </a:xfrm>
+          <a:prstGeom prst="rect">
+            <a:avLst/>
+          </a:prstGeom>
+        </p:spPr>
+        <p:style>
+          <a:lnRef idx="2">
+            <a:schemeClr val="accent3"/>
+          </a:lnRef>
+          <a:fillRef idx="1">
+            <a:schemeClr val="lt1"/>
+          </a:fillRef>
+          <a:effectRef idx="0">
+            <a:schemeClr val="accent3"/>
+          </a:effectRef>
+          <a:fontRef idx="minor">
+            <a:schemeClr val="dk1"/>
+          </a:fontRef>
+        </p:style>
+        <p:txBody>
+          <a:bodyPr rtlCol="0" anchor="ctr"/>
+          <a:lstStyle/>
+          <a:p>
+            <a:pPr algn="ctr"/>
+            <a:r>
+              <a:rPr lang="en-US" dirty="0"/>
+              <a:t>TO DO </a:t>
+            </a:r>
+            <a:r>
+              <a:rPr lang="en-US" dirty="0" err="1"/>
+              <a:t>verwijderen</a:t>
+            </a:r>
+            <a:endParaRPr lang="en-US" dirty="0"/>
+          </a:p>
+        </p:txBody>
+      </p:sp>
+      <p:sp>
+        <p:nvSpPr>
+          <p:cNvPr id="10" name="Rectangle 9">
+            <a:extLst>
+              <a:ext uri="{FF2B5EF4-FFF2-40B4-BE49-F238E27FC236}">
+                <a16:creationId xmlns:a16="http://schemas.microsoft.com/office/drawing/2014/main" id="{9F040103-F9C7-6ADA-89F6-5EA032426977}"/>
+              </a:ext>
+            </a:extLst>
+          </p:cNvPr>
+          <p:cNvSpPr/>
+          <p:nvPr/>
+        </p:nvSpPr>
+        <p:spPr>
+          <a:xfrm>
+            <a:off x="7429502" y="1701800"/>
+            <a:ext cx="3009900" cy="718608"/>
+          </a:xfrm>
+          <a:prstGeom prst="rect">
+            <a:avLst/>
+          </a:prstGeom>
+        </p:spPr>
+        <p:style>
+          <a:lnRef idx="2">
+            <a:schemeClr val="accent3"/>
+          </a:lnRef>
+          <a:fillRef idx="1">
+            <a:schemeClr val="lt1"/>
+          </a:fillRef>
+          <a:effectRef idx="0">
+            <a:schemeClr val="accent3"/>
+          </a:effectRef>
+          <a:fontRef idx="minor">
+            <a:schemeClr val="dk1"/>
+          </a:fontRef>
+        </p:style>
+        <p:txBody>
+          <a:bodyPr rtlCol="0" anchor="ctr"/>
+          <a:lstStyle/>
+          <a:p>
+            <a:pPr algn="ctr"/>
+            <a:r>
+              <a:rPr lang="en-US" dirty="0"/>
+              <a:t>/</a:t>
+            </a:r>
+          </a:p>
+        </p:txBody>
+      </p:sp>
+      <p:sp>
+        <p:nvSpPr>
+          <p:cNvPr id="11" name="Rectangle 10">
+            <a:extLst>
+              <a:ext uri="{FF2B5EF4-FFF2-40B4-BE49-F238E27FC236}">
+                <a16:creationId xmlns:a16="http://schemas.microsoft.com/office/drawing/2014/main" id="{B59C84B5-66D9-7D8B-EA18-F41B7471D56A}"/>
+              </a:ext>
+            </a:extLst>
+          </p:cNvPr>
+          <p:cNvSpPr/>
+          <p:nvPr/>
+        </p:nvSpPr>
+        <p:spPr>
+          <a:xfrm>
+            <a:off x="7429502" y="2851150"/>
+            <a:ext cx="3009900" cy="718608"/>
+          </a:xfrm>
+          <a:prstGeom prst="rect">
+            <a:avLst/>
+          </a:prstGeom>
+        </p:spPr>
+        <p:style>
+          <a:lnRef idx="2">
+            <a:schemeClr val="accent3"/>
+          </a:lnRef>
+          <a:fillRef idx="1">
+            <a:schemeClr val="lt1"/>
+          </a:fillRef>
+          <a:effectRef idx="0">
+            <a:schemeClr val="accent3"/>
+          </a:effectRef>
+          <a:fontRef idx="minor">
+            <a:schemeClr val="dk1"/>
+          </a:fontRef>
+        </p:style>
+        <p:txBody>
+          <a:bodyPr rtlCol="0" anchor="ctr"/>
+          <a:lstStyle/>
+          <a:p>
+            <a:pPr algn="ctr"/>
+            <a:r>
+              <a:rPr lang="en-US" dirty="0"/>
+              <a:t>/add</a:t>
+            </a:r>
+          </a:p>
+        </p:txBody>
+      </p:sp>
+      <p:sp>
+        <p:nvSpPr>
+          <p:cNvPr id="12" name="Rectangle 11">
+            <a:extLst>
+              <a:ext uri="{FF2B5EF4-FFF2-40B4-BE49-F238E27FC236}">
+                <a16:creationId xmlns:a16="http://schemas.microsoft.com/office/drawing/2014/main" id="{1292D062-30AF-3D35-8F8D-4DC9233A6BD5}"/>
+              </a:ext>
+            </a:extLst>
+          </p:cNvPr>
+          <p:cNvSpPr/>
+          <p:nvPr/>
+        </p:nvSpPr>
+        <p:spPr>
+          <a:xfrm>
+            <a:off x="7429502" y="4000500"/>
+            <a:ext cx="3009900" cy="718608"/>
+          </a:xfrm>
+          <a:prstGeom prst="rect">
+            <a:avLst/>
+          </a:prstGeom>
+        </p:spPr>
+        <p:style>
+          <a:lnRef idx="2">
+            <a:schemeClr val="accent3"/>
+          </a:lnRef>
+          <a:fillRef idx="1">
+            <a:schemeClr val="lt1"/>
+          </a:fillRef>
+          <a:effectRef idx="0">
+            <a:schemeClr val="accent3"/>
+          </a:effectRef>
+          <a:fontRef idx="minor">
+            <a:schemeClr val="dk1"/>
+          </a:fontRef>
+        </p:style>
+        <p:txBody>
+          <a:bodyPr rtlCol="0" anchor="ctr"/>
+          <a:lstStyle/>
+          <a:p>
+            <a:pPr algn="ctr"/>
+            <a:r>
+              <a:rPr lang="en-US" dirty="0"/>
+              <a:t>/update</a:t>
+            </a:r>
+          </a:p>
+        </p:txBody>
+      </p:sp>
+      <p:sp>
+        <p:nvSpPr>
+          <p:cNvPr id="13" name="Rectangle 12">
+            <a:extLst>
+              <a:ext uri="{FF2B5EF4-FFF2-40B4-BE49-F238E27FC236}">
+                <a16:creationId xmlns:a16="http://schemas.microsoft.com/office/drawing/2014/main" id="{2B17FBF2-2B45-2FA2-82CC-035FFC5BEF77}"/>
+              </a:ext>
+            </a:extLst>
+          </p:cNvPr>
+          <p:cNvSpPr/>
+          <p:nvPr/>
+        </p:nvSpPr>
+        <p:spPr>
+          <a:xfrm>
+            <a:off x="7429502" y="5149850"/>
+            <a:ext cx="3009900" cy="718608"/>
+          </a:xfrm>
+          <a:prstGeom prst="rect">
+            <a:avLst/>
+          </a:prstGeom>
+        </p:spPr>
+        <p:style>
+          <a:lnRef idx="2">
+            <a:schemeClr val="accent3"/>
+          </a:lnRef>
+          <a:fillRef idx="1">
+            <a:schemeClr val="lt1"/>
+          </a:fillRef>
+          <a:effectRef idx="0">
+            <a:schemeClr val="accent3"/>
+          </a:effectRef>
+          <a:fontRef idx="minor">
+            <a:schemeClr val="dk1"/>
+          </a:fontRef>
+        </p:style>
+        <p:txBody>
+          <a:bodyPr rtlCol="0" anchor="ctr"/>
+          <a:lstStyle/>
+          <a:p>
+            <a:pPr algn="ctr"/>
+            <a:r>
+              <a:rPr lang="en-US" dirty="0"/>
+              <a:t>/delete</a:t>
+            </a:r>
+          </a:p>
+        </p:txBody>
+      </p:sp>
+      <p:sp>
+        <p:nvSpPr>
+          <p:cNvPr id="14" name="TextBox 13">
+            <a:extLst>
+              <a:ext uri="{FF2B5EF4-FFF2-40B4-BE49-F238E27FC236}">
+                <a16:creationId xmlns:a16="http://schemas.microsoft.com/office/drawing/2014/main" id="{C90A74BD-1EEF-A4C8-0882-115FA70AEA1C}"/>
+              </a:ext>
+            </a:extLst>
+          </p:cNvPr>
+          <p:cNvSpPr txBox="1"/>
+          <p:nvPr/>
+        </p:nvSpPr>
+        <p:spPr>
+          <a:xfrm>
+            <a:off x="1428750" y="1208101"/>
+            <a:ext cx="3009900" cy="369332"/>
+          </a:xfrm>
+          <a:prstGeom prst="rect">
+            <a:avLst/>
+          </a:prstGeom>
+          <a:noFill/>
+        </p:spPr>
+        <p:txBody>
+          <a:bodyPr wrap="square" rtlCol="0">
+            <a:spAutoFit/>
+          </a:bodyPr>
+          <a:lstStyle/>
+          <a:p>
+            <a:pPr algn="ctr"/>
+            <a:r>
+              <a:rPr lang="en-US" dirty="0"/>
+              <a:t>Actie:</a:t>
+            </a:r>
+          </a:p>
+        </p:txBody>
+      </p:sp>
+      <p:sp>
+        <p:nvSpPr>
+          <p:cNvPr id="15" name="TextBox 14">
+            <a:extLst>
+              <a:ext uri="{FF2B5EF4-FFF2-40B4-BE49-F238E27FC236}">
+                <a16:creationId xmlns:a16="http://schemas.microsoft.com/office/drawing/2014/main" id="{D2618935-B9DF-E3DA-B22A-1B9BE60A22CC}"/>
+              </a:ext>
+            </a:extLst>
+          </p:cNvPr>
+          <p:cNvSpPr txBox="1"/>
+          <p:nvPr/>
+        </p:nvSpPr>
+        <p:spPr>
+          <a:xfrm>
+            <a:off x="7429502" y="1208101"/>
+            <a:ext cx="3009900" cy="369332"/>
+          </a:xfrm>
+          <a:prstGeom prst="rect">
+            <a:avLst/>
+          </a:prstGeom>
+          <a:noFill/>
+        </p:spPr>
+        <p:txBody>
+          <a:bodyPr wrap="square" rtlCol="0">
+            <a:spAutoFit/>
+          </a:bodyPr>
+          <a:lstStyle/>
+          <a:p>
+            <a:pPr algn="ctr"/>
+            <a:r>
+              <a:rPr lang="en-US" dirty="0"/>
+              <a:t>End point:</a:t>
+            </a:r>
+          </a:p>
+        </p:txBody>
+      </p:sp>
+      <p:grpSp>
+        <p:nvGrpSpPr>
+          <p:cNvPr id="21" name="Group 20">
+            <a:extLst>
+              <a:ext uri="{FF2B5EF4-FFF2-40B4-BE49-F238E27FC236}">
+                <a16:creationId xmlns:a16="http://schemas.microsoft.com/office/drawing/2014/main" id="{7BA5AF33-4993-5B7F-D0E5-97C8192DD1EB}"/>
+              </a:ext>
+            </a:extLst>
+          </p:cNvPr>
+          <p:cNvGrpSpPr/>
+          <p:nvPr/>
+        </p:nvGrpSpPr>
+        <p:grpSpPr>
+          <a:xfrm>
+            <a:off x="4429126" y="1700398"/>
+            <a:ext cx="2990852" cy="307777"/>
+            <a:chOff x="4438650" y="1629860"/>
+            <a:chExt cx="2990852" cy="307777"/>
+          </a:xfrm>
+        </p:grpSpPr>
+        <p:cxnSp>
+          <p:nvCxnSpPr>
+            <p:cNvPr id="17" name="Straight Arrow Connector 16">
+              <a:extLst>
+                <a:ext uri="{FF2B5EF4-FFF2-40B4-BE49-F238E27FC236}">
+                  <a16:creationId xmlns:a16="http://schemas.microsoft.com/office/drawing/2014/main" id="{0BD699BA-F2B9-16AC-5911-A1D70FFA2F2B}"/>
+                </a:ext>
+              </a:extLst>
+            </p:cNvPr>
+            <p:cNvCxnSpPr>
+              <a:cxnSpLocks/>
+            </p:cNvCxnSpPr>
+            <p:nvPr/>
+          </p:nvCxnSpPr>
+          <p:spPr>
+            <a:xfrm>
+              <a:off x="4438650" y="1934104"/>
+              <a:ext cx="2990852" cy="0"/>
+            </a:xfrm>
+            <a:prstGeom prst="straightConnector1">
+              <a:avLst/>
+            </a:prstGeom>
+            <a:ln>
+              <a:tailEnd type="triangle"/>
+            </a:ln>
+          </p:spPr>
+          <p:style>
+            <a:lnRef idx="2">
+              <a:schemeClr val="dk1"/>
+            </a:lnRef>
+            <a:fillRef idx="0">
+              <a:schemeClr val="dk1"/>
+            </a:fillRef>
+            <a:effectRef idx="1">
+              <a:schemeClr val="dk1"/>
+            </a:effectRef>
+            <a:fontRef idx="minor">
+              <a:schemeClr val="tx1"/>
+            </a:fontRef>
+          </p:style>
+        </p:cxnSp>
+        <p:sp>
+          <p:nvSpPr>
+            <p:cNvPr id="20" name="TextBox 19">
+              <a:extLst>
+                <a:ext uri="{FF2B5EF4-FFF2-40B4-BE49-F238E27FC236}">
+                  <a16:creationId xmlns:a16="http://schemas.microsoft.com/office/drawing/2014/main" id="{3080CD9D-5951-D760-737C-F8D8262F5F97}"/>
+                </a:ext>
+              </a:extLst>
+            </p:cNvPr>
+            <p:cNvSpPr txBox="1"/>
+            <p:nvPr/>
+          </p:nvSpPr>
+          <p:spPr>
+            <a:xfrm>
+              <a:off x="4438650" y="1629860"/>
+              <a:ext cx="2990852" cy="307777"/>
+            </a:xfrm>
+            <a:prstGeom prst="rect">
+              <a:avLst/>
+            </a:prstGeom>
+            <a:noFill/>
+          </p:spPr>
+          <p:txBody>
+            <a:bodyPr wrap="square" rtlCol="0">
+              <a:spAutoFit/>
+            </a:bodyPr>
+            <a:lstStyle/>
+            <a:p>
+              <a:pPr algn="ctr"/>
+              <a:r>
+                <a:rPr lang="en-US" sz="1400" dirty="0">
+                  <a:latin typeface="Courier New" panose="02070309020205020404" pitchFamily="49" charset="0"/>
+                  <a:cs typeface="Courier New" panose="02070309020205020404" pitchFamily="49" charset="0"/>
+                </a:rPr>
+                <a:t>GET /</a:t>
+              </a:r>
+            </a:p>
+          </p:txBody>
+        </p:sp>
+      </p:grpSp>
+      <p:grpSp>
+        <p:nvGrpSpPr>
+          <p:cNvPr id="22" name="Group 21">
+            <a:extLst>
+              <a:ext uri="{FF2B5EF4-FFF2-40B4-BE49-F238E27FC236}">
+                <a16:creationId xmlns:a16="http://schemas.microsoft.com/office/drawing/2014/main" id="{7288604B-1083-E100-021F-38E0F9EB41C1}"/>
+              </a:ext>
+            </a:extLst>
+          </p:cNvPr>
+          <p:cNvGrpSpPr/>
+          <p:nvPr/>
+        </p:nvGrpSpPr>
+        <p:grpSpPr>
+          <a:xfrm>
+            <a:off x="4429126" y="2851150"/>
+            <a:ext cx="2990852" cy="307777"/>
+            <a:chOff x="4438650" y="1629860"/>
+            <a:chExt cx="2990852" cy="307777"/>
+          </a:xfrm>
+        </p:grpSpPr>
+        <p:cxnSp>
+          <p:nvCxnSpPr>
+            <p:cNvPr id="23" name="Straight Arrow Connector 22">
+              <a:extLst>
+                <a:ext uri="{FF2B5EF4-FFF2-40B4-BE49-F238E27FC236}">
+                  <a16:creationId xmlns:a16="http://schemas.microsoft.com/office/drawing/2014/main" id="{F22EFD58-915D-6E7D-D869-46765B03C7B1}"/>
+                </a:ext>
+              </a:extLst>
+            </p:cNvPr>
+            <p:cNvCxnSpPr>
+              <a:cxnSpLocks/>
+            </p:cNvCxnSpPr>
+            <p:nvPr/>
+          </p:nvCxnSpPr>
+          <p:spPr>
+            <a:xfrm>
+              <a:off x="4438650" y="1934104"/>
+              <a:ext cx="2990852" cy="0"/>
+            </a:xfrm>
+            <a:prstGeom prst="straightConnector1">
+              <a:avLst/>
+            </a:prstGeom>
+            <a:ln>
+              <a:tailEnd type="triangle"/>
+            </a:ln>
+          </p:spPr>
+          <p:style>
+            <a:lnRef idx="2">
+              <a:schemeClr val="dk1"/>
+            </a:lnRef>
+            <a:fillRef idx="0">
+              <a:schemeClr val="dk1"/>
+            </a:fillRef>
+            <a:effectRef idx="1">
+              <a:schemeClr val="dk1"/>
+            </a:effectRef>
+            <a:fontRef idx="minor">
+              <a:schemeClr val="tx1"/>
+            </a:fontRef>
+          </p:style>
+        </p:cxnSp>
+        <p:sp>
+          <p:nvSpPr>
+            <p:cNvPr id="24" name="TextBox 23">
+              <a:extLst>
+                <a:ext uri="{FF2B5EF4-FFF2-40B4-BE49-F238E27FC236}">
+                  <a16:creationId xmlns:a16="http://schemas.microsoft.com/office/drawing/2014/main" id="{F0EBF75A-20A5-D264-3641-852DE8082F03}"/>
+                </a:ext>
+              </a:extLst>
+            </p:cNvPr>
+            <p:cNvSpPr txBox="1"/>
+            <p:nvPr/>
+          </p:nvSpPr>
+          <p:spPr>
+            <a:xfrm>
+              <a:off x="4438650" y="1629860"/>
+              <a:ext cx="2990852" cy="307777"/>
+            </a:xfrm>
+            <a:prstGeom prst="rect">
+              <a:avLst/>
+            </a:prstGeom>
+            <a:noFill/>
+          </p:spPr>
+          <p:txBody>
+            <a:bodyPr wrap="square" rtlCol="0">
+              <a:spAutoFit/>
+            </a:bodyPr>
+            <a:lstStyle/>
+            <a:p>
+              <a:pPr algn="ctr"/>
+              <a:r>
+                <a:rPr lang="en-US" sz="1400" dirty="0">
+                  <a:latin typeface="Courier New" panose="02070309020205020404" pitchFamily="49" charset="0"/>
+                  <a:cs typeface="Courier New" panose="02070309020205020404" pitchFamily="49" charset="0"/>
+                </a:rPr>
+                <a:t>POST /add + description</a:t>
+              </a:r>
+            </a:p>
+          </p:txBody>
+        </p:sp>
+      </p:grpSp>
+      <p:grpSp>
+        <p:nvGrpSpPr>
+          <p:cNvPr id="25" name="Group 24">
+            <a:extLst>
+              <a:ext uri="{FF2B5EF4-FFF2-40B4-BE49-F238E27FC236}">
+                <a16:creationId xmlns:a16="http://schemas.microsoft.com/office/drawing/2014/main" id="{0133213A-53A1-B5A5-1E3E-139C6AE5A5D8}"/>
+              </a:ext>
+            </a:extLst>
+          </p:cNvPr>
+          <p:cNvGrpSpPr/>
+          <p:nvPr/>
+        </p:nvGrpSpPr>
+        <p:grpSpPr>
+          <a:xfrm>
+            <a:off x="4429126" y="4000500"/>
+            <a:ext cx="2990852" cy="307777"/>
+            <a:chOff x="4438650" y="1629860"/>
+            <a:chExt cx="2990852" cy="307777"/>
+          </a:xfrm>
+        </p:grpSpPr>
+        <p:cxnSp>
+          <p:nvCxnSpPr>
+            <p:cNvPr id="26" name="Straight Arrow Connector 25">
+              <a:extLst>
+                <a:ext uri="{FF2B5EF4-FFF2-40B4-BE49-F238E27FC236}">
+                  <a16:creationId xmlns:a16="http://schemas.microsoft.com/office/drawing/2014/main" id="{88023126-5A92-1282-255F-5276F77E0DB7}"/>
+                </a:ext>
+              </a:extLst>
+            </p:cNvPr>
+            <p:cNvCxnSpPr>
+              <a:cxnSpLocks/>
+            </p:cNvCxnSpPr>
+            <p:nvPr/>
+          </p:nvCxnSpPr>
+          <p:spPr>
+            <a:xfrm>
+              <a:off x="4438650" y="1934104"/>
+              <a:ext cx="2990852" cy="0"/>
+            </a:xfrm>
+            <a:prstGeom prst="straightConnector1">
+              <a:avLst/>
+            </a:prstGeom>
+            <a:ln>
+              <a:tailEnd type="triangle"/>
+            </a:ln>
+          </p:spPr>
+          <p:style>
+            <a:lnRef idx="2">
+              <a:schemeClr val="dk1"/>
+            </a:lnRef>
+            <a:fillRef idx="0">
+              <a:schemeClr val="dk1"/>
+            </a:fillRef>
+            <a:effectRef idx="1">
+              <a:schemeClr val="dk1"/>
+            </a:effectRef>
+            <a:fontRef idx="minor">
+              <a:schemeClr val="tx1"/>
+            </a:fontRef>
+          </p:style>
+        </p:cxnSp>
+        <p:sp>
+          <p:nvSpPr>
+            <p:cNvPr id="27" name="TextBox 26">
+              <a:extLst>
+                <a:ext uri="{FF2B5EF4-FFF2-40B4-BE49-F238E27FC236}">
+                  <a16:creationId xmlns:a16="http://schemas.microsoft.com/office/drawing/2014/main" id="{32A5A7E2-DE8A-987A-57B5-881DCCBC2035}"/>
+                </a:ext>
+              </a:extLst>
+            </p:cNvPr>
+            <p:cNvSpPr txBox="1"/>
+            <p:nvPr/>
+          </p:nvSpPr>
+          <p:spPr>
+            <a:xfrm>
+              <a:off x="4438650" y="1629860"/>
+              <a:ext cx="2990852" cy="307777"/>
+            </a:xfrm>
+            <a:prstGeom prst="rect">
+              <a:avLst/>
+            </a:prstGeom>
+            <a:noFill/>
+          </p:spPr>
+          <p:txBody>
+            <a:bodyPr wrap="square" rtlCol="0">
+              <a:spAutoFit/>
+            </a:bodyPr>
+            <a:lstStyle/>
+            <a:p>
+              <a:pPr algn="ctr"/>
+              <a:r>
+                <a:rPr lang="en-US" sz="1400" dirty="0">
+                  <a:latin typeface="Courier New" panose="02070309020205020404" pitchFamily="49" charset="0"/>
+                  <a:cs typeface="Courier New" panose="02070309020205020404" pitchFamily="49" charset="0"/>
+                </a:rPr>
+                <a:t>POST /update + id + status</a:t>
+              </a:r>
+            </a:p>
+          </p:txBody>
+        </p:sp>
+      </p:grpSp>
+      <p:grpSp>
+        <p:nvGrpSpPr>
+          <p:cNvPr id="28" name="Group 27">
+            <a:extLst>
+              <a:ext uri="{FF2B5EF4-FFF2-40B4-BE49-F238E27FC236}">
+                <a16:creationId xmlns:a16="http://schemas.microsoft.com/office/drawing/2014/main" id="{C1D309B5-A8F5-12DA-F85B-BAB389BF1346}"/>
+              </a:ext>
+            </a:extLst>
+          </p:cNvPr>
+          <p:cNvGrpSpPr/>
+          <p:nvPr/>
+        </p:nvGrpSpPr>
+        <p:grpSpPr>
+          <a:xfrm>
+            <a:off x="4429126" y="5149850"/>
+            <a:ext cx="2990852" cy="307777"/>
+            <a:chOff x="4438650" y="1629860"/>
+            <a:chExt cx="2990852" cy="307777"/>
+          </a:xfrm>
+        </p:grpSpPr>
+        <p:cxnSp>
+          <p:nvCxnSpPr>
+            <p:cNvPr id="29" name="Straight Arrow Connector 28">
+              <a:extLst>
+                <a:ext uri="{FF2B5EF4-FFF2-40B4-BE49-F238E27FC236}">
+                  <a16:creationId xmlns:a16="http://schemas.microsoft.com/office/drawing/2014/main" id="{9F8128EF-C165-1AF8-1A4F-F8D7F564F417}"/>
+                </a:ext>
+              </a:extLst>
+            </p:cNvPr>
+            <p:cNvCxnSpPr>
+              <a:cxnSpLocks/>
+            </p:cNvCxnSpPr>
+            <p:nvPr/>
+          </p:nvCxnSpPr>
+          <p:spPr>
+            <a:xfrm>
+              <a:off x="4438650" y="1934104"/>
+              <a:ext cx="2990852" cy="0"/>
+            </a:xfrm>
+            <a:prstGeom prst="straightConnector1">
+              <a:avLst/>
+            </a:prstGeom>
+            <a:ln>
+              <a:tailEnd type="triangle"/>
+            </a:ln>
+          </p:spPr>
+          <p:style>
+            <a:lnRef idx="2">
+              <a:schemeClr val="dk1"/>
+            </a:lnRef>
+            <a:fillRef idx="0">
+              <a:schemeClr val="dk1"/>
+            </a:fillRef>
+            <a:effectRef idx="1">
+              <a:schemeClr val="dk1"/>
+            </a:effectRef>
+            <a:fontRef idx="minor">
+              <a:schemeClr val="tx1"/>
+            </a:fontRef>
+          </p:style>
+        </p:cxnSp>
+        <p:sp>
+          <p:nvSpPr>
+            <p:cNvPr id="30" name="TextBox 29">
+              <a:extLst>
+                <a:ext uri="{FF2B5EF4-FFF2-40B4-BE49-F238E27FC236}">
+                  <a16:creationId xmlns:a16="http://schemas.microsoft.com/office/drawing/2014/main" id="{066D6B9E-2232-ACB6-4863-5842804D0FA9}"/>
+                </a:ext>
+              </a:extLst>
+            </p:cNvPr>
+            <p:cNvSpPr txBox="1"/>
+            <p:nvPr/>
+          </p:nvSpPr>
+          <p:spPr>
+            <a:xfrm>
+              <a:off x="4438650" y="1629860"/>
+              <a:ext cx="2990852" cy="307777"/>
+            </a:xfrm>
+            <a:prstGeom prst="rect">
+              <a:avLst/>
+            </a:prstGeom>
+            <a:noFill/>
+          </p:spPr>
+          <p:txBody>
+            <a:bodyPr wrap="square" rtlCol="0">
+              <a:spAutoFit/>
+            </a:bodyPr>
+            <a:lstStyle/>
+            <a:p>
+              <a:pPr algn="ctr"/>
+              <a:r>
+                <a:rPr lang="en-US" sz="1400" dirty="0">
+                  <a:latin typeface="Courier New" panose="02070309020205020404" pitchFamily="49" charset="0"/>
+                  <a:cs typeface="Courier New" panose="02070309020205020404" pitchFamily="49" charset="0"/>
+                </a:rPr>
+                <a:t>POST /delete + id</a:t>
+              </a:r>
+            </a:p>
+          </p:txBody>
+        </p:sp>
+      </p:grpSp>
+      <p:grpSp>
+        <p:nvGrpSpPr>
+          <p:cNvPr id="34" name="Group 33">
+            <a:extLst>
+              <a:ext uri="{FF2B5EF4-FFF2-40B4-BE49-F238E27FC236}">
+                <a16:creationId xmlns:a16="http://schemas.microsoft.com/office/drawing/2014/main" id="{8517558D-1705-F847-0561-A6F528C2A8A8}"/>
+              </a:ext>
+            </a:extLst>
+          </p:cNvPr>
+          <p:cNvGrpSpPr/>
+          <p:nvPr/>
+        </p:nvGrpSpPr>
+        <p:grpSpPr>
+          <a:xfrm>
+            <a:off x="4419602" y="2121184"/>
+            <a:ext cx="3009900" cy="307777"/>
+            <a:chOff x="4419602" y="2121184"/>
+            <a:chExt cx="3009900" cy="307777"/>
+          </a:xfrm>
+        </p:grpSpPr>
+        <p:sp>
+          <p:nvSpPr>
+            <p:cNvPr id="33" name="TextBox 32">
+              <a:extLst>
+                <a:ext uri="{FF2B5EF4-FFF2-40B4-BE49-F238E27FC236}">
+                  <a16:creationId xmlns:a16="http://schemas.microsoft.com/office/drawing/2014/main" id="{DFD14BDA-714A-084C-EB75-94726FA5FFF1}"/>
+                </a:ext>
+              </a:extLst>
+            </p:cNvPr>
+            <p:cNvSpPr txBox="1"/>
+            <p:nvPr/>
+          </p:nvSpPr>
+          <p:spPr>
+            <a:xfrm>
+              <a:off x="4419602" y="2121184"/>
+              <a:ext cx="2990852" cy="307777"/>
+            </a:xfrm>
+            <a:prstGeom prst="rect">
+              <a:avLst/>
+            </a:prstGeom>
+            <a:noFill/>
+          </p:spPr>
+          <p:txBody>
+            <a:bodyPr wrap="square" rtlCol="0">
+              <a:spAutoFit/>
+            </a:bodyPr>
+            <a:lstStyle/>
+            <a:p>
+              <a:pPr algn="ctr"/>
+              <a:r>
+                <a:rPr lang="en-US" sz="1400" dirty="0" err="1">
+                  <a:latin typeface="Courier New" panose="02070309020205020404" pitchFamily="49" charset="0"/>
+                  <a:cs typeface="Courier New" panose="02070309020205020404" pitchFamily="49" charset="0"/>
+                </a:rPr>
+                <a:t>ToDoList</a:t>
+              </a:r>
+              <a:endParaRPr lang="en-US" sz="1400" dirty="0">
+                <a:latin typeface="Courier New" panose="02070309020205020404" pitchFamily="49" charset="0"/>
+                <a:cs typeface="Courier New" panose="02070309020205020404" pitchFamily="49" charset="0"/>
+              </a:endParaRPr>
+            </a:p>
+          </p:txBody>
+        </p:sp>
+        <p:cxnSp>
+          <p:nvCxnSpPr>
+            <p:cNvPr id="32" name="Straight Arrow Connector 31">
+              <a:extLst>
+                <a:ext uri="{FF2B5EF4-FFF2-40B4-BE49-F238E27FC236}">
+                  <a16:creationId xmlns:a16="http://schemas.microsoft.com/office/drawing/2014/main" id="{45B08C84-40DF-4C22-F941-0F5254789728}"/>
+                </a:ext>
+              </a:extLst>
+            </p:cNvPr>
+            <p:cNvCxnSpPr>
+              <a:cxnSpLocks/>
+            </p:cNvCxnSpPr>
+            <p:nvPr/>
+          </p:nvCxnSpPr>
+          <p:spPr>
+            <a:xfrm flipH="1">
+              <a:off x="4438650" y="2121184"/>
+              <a:ext cx="2990852" cy="0"/>
+            </a:xfrm>
+            <a:prstGeom prst="straightConnector1">
+              <a:avLst/>
+            </a:prstGeom>
+            <a:ln>
+              <a:tailEnd type="triangle"/>
+            </a:ln>
+          </p:spPr>
+          <p:style>
+            <a:lnRef idx="2">
+              <a:schemeClr val="dk1"/>
+            </a:lnRef>
+            <a:fillRef idx="0">
+              <a:schemeClr val="dk1"/>
+            </a:fillRef>
+            <a:effectRef idx="1">
+              <a:schemeClr val="dk1"/>
+            </a:effectRef>
+            <a:fontRef idx="minor">
+              <a:schemeClr val="tx1"/>
+            </a:fontRef>
+          </p:style>
+        </p:cxnSp>
+      </p:grpSp>
+      <p:grpSp>
+        <p:nvGrpSpPr>
+          <p:cNvPr id="35" name="Group 34">
+            <a:extLst>
+              <a:ext uri="{FF2B5EF4-FFF2-40B4-BE49-F238E27FC236}">
+                <a16:creationId xmlns:a16="http://schemas.microsoft.com/office/drawing/2014/main" id="{B1666B32-E49E-3316-9D11-9AD0D9D1FDFD}"/>
+              </a:ext>
+            </a:extLst>
+          </p:cNvPr>
+          <p:cNvGrpSpPr/>
+          <p:nvPr/>
+        </p:nvGrpSpPr>
+        <p:grpSpPr>
+          <a:xfrm>
+            <a:off x="4419602" y="3257403"/>
+            <a:ext cx="3009900" cy="307777"/>
+            <a:chOff x="4419602" y="2121184"/>
+            <a:chExt cx="3009900" cy="307777"/>
+          </a:xfrm>
+        </p:grpSpPr>
+        <p:sp>
+          <p:nvSpPr>
+            <p:cNvPr id="36" name="TextBox 35">
+              <a:extLst>
+                <a:ext uri="{FF2B5EF4-FFF2-40B4-BE49-F238E27FC236}">
+                  <a16:creationId xmlns:a16="http://schemas.microsoft.com/office/drawing/2014/main" id="{8B96E35E-3BE6-BDC9-4662-954C0C88E40A}"/>
+                </a:ext>
+              </a:extLst>
+            </p:cNvPr>
+            <p:cNvSpPr txBox="1"/>
+            <p:nvPr/>
+          </p:nvSpPr>
+          <p:spPr>
+            <a:xfrm>
+              <a:off x="4419602" y="2121184"/>
+              <a:ext cx="2990852" cy="307777"/>
+            </a:xfrm>
+            <a:prstGeom prst="rect">
+              <a:avLst/>
+            </a:prstGeom>
+            <a:noFill/>
+          </p:spPr>
+          <p:txBody>
+            <a:bodyPr wrap="square" rtlCol="0">
+              <a:spAutoFit/>
+            </a:bodyPr>
+            <a:lstStyle/>
+            <a:p>
+              <a:pPr algn="ctr"/>
+              <a:r>
+                <a:rPr lang="en-US" sz="1400" dirty="0">
+                  <a:latin typeface="Courier New" panose="02070309020205020404" pitchFamily="49" charset="0"/>
+                  <a:cs typeface="Courier New" panose="02070309020205020404" pitchFamily="49" charset="0"/>
+                </a:rPr>
+                <a:t>HTTP Response</a:t>
+              </a:r>
+            </a:p>
+          </p:txBody>
+        </p:sp>
+        <p:cxnSp>
+          <p:nvCxnSpPr>
+            <p:cNvPr id="37" name="Straight Arrow Connector 36">
+              <a:extLst>
+                <a:ext uri="{FF2B5EF4-FFF2-40B4-BE49-F238E27FC236}">
+                  <a16:creationId xmlns:a16="http://schemas.microsoft.com/office/drawing/2014/main" id="{9C09D679-37C5-EDD3-8F71-100F5DC9B1C1}"/>
+                </a:ext>
+              </a:extLst>
+            </p:cNvPr>
+            <p:cNvCxnSpPr>
+              <a:cxnSpLocks/>
+            </p:cNvCxnSpPr>
+            <p:nvPr/>
+          </p:nvCxnSpPr>
+          <p:spPr>
+            <a:xfrm flipH="1">
+              <a:off x="4438650" y="2121184"/>
+              <a:ext cx="2990852" cy="0"/>
+            </a:xfrm>
+            <a:prstGeom prst="straightConnector1">
+              <a:avLst/>
+            </a:prstGeom>
+            <a:ln>
+              <a:tailEnd type="triangle"/>
+            </a:ln>
+          </p:spPr>
+          <p:style>
+            <a:lnRef idx="2">
+              <a:schemeClr val="dk1"/>
+            </a:lnRef>
+            <a:fillRef idx="0">
+              <a:schemeClr val="dk1"/>
+            </a:fillRef>
+            <a:effectRef idx="1">
+              <a:schemeClr val="dk1"/>
+            </a:effectRef>
+            <a:fontRef idx="minor">
+              <a:schemeClr val="tx1"/>
+            </a:fontRef>
+          </p:style>
+        </p:cxnSp>
+      </p:grpSp>
+      <p:grpSp>
+        <p:nvGrpSpPr>
+          <p:cNvPr id="38" name="Group 37">
+            <a:extLst>
+              <a:ext uri="{FF2B5EF4-FFF2-40B4-BE49-F238E27FC236}">
+                <a16:creationId xmlns:a16="http://schemas.microsoft.com/office/drawing/2014/main" id="{BA7EA796-333F-3C91-E9B5-713C0E91F317}"/>
+              </a:ext>
+            </a:extLst>
+          </p:cNvPr>
+          <p:cNvGrpSpPr/>
+          <p:nvPr/>
+        </p:nvGrpSpPr>
+        <p:grpSpPr>
+          <a:xfrm>
+            <a:off x="4419602" y="4406753"/>
+            <a:ext cx="3009900" cy="307777"/>
+            <a:chOff x="4419602" y="2121184"/>
+            <a:chExt cx="3009900" cy="307777"/>
+          </a:xfrm>
+        </p:grpSpPr>
+        <p:sp>
+          <p:nvSpPr>
+            <p:cNvPr id="39" name="TextBox 38">
+              <a:extLst>
+                <a:ext uri="{FF2B5EF4-FFF2-40B4-BE49-F238E27FC236}">
+                  <a16:creationId xmlns:a16="http://schemas.microsoft.com/office/drawing/2014/main" id="{8F2AF043-712C-B84F-4DA6-D56273C5E868}"/>
+                </a:ext>
+              </a:extLst>
+            </p:cNvPr>
+            <p:cNvSpPr txBox="1"/>
+            <p:nvPr/>
+          </p:nvSpPr>
+          <p:spPr>
+            <a:xfrm>
+              <a:off x="4419602" y="2121184"/>
+              <a:ext cx="2990852" cy="307777"/>
+            </a:xfrm>
+            <a:prstGeom prst="rect">
+              <a:avLst/>
+            </a:prstGeom>
+            <a:noFill/>
+          </p:spPr>
+          <p:txBody>
+            <a:bodyPr wrap="square" rtlCol="0">
+              <a:spAutoFit/>
+            </a:bodyPr>
+            <a:lstStyle/>
+            <a:p>
+              <a:pPr algn="ctr"/>
+              <a:r>
+                <a:rPr lang="en-US" sz="1400" dirty="0">
+                  <a:latin typeface="Courier New" panose="02070309020205020404" pitchFamily="49" charset="0"/>
+                  <a:cs typeface="Courier New" panose="02070309020205020404" pitchFamily="49" charset="0"/>
+                </a:rPr>
+                <a:t>HTTP Response</a:t>
+              </a:r>
+            </a:p>
+          </p:txBody>
+        </p:sp>
+        <p:cxnSp>
+          <p:nvCxnSpPr>
+            <p:cNvPr id="40" name="Straight Arrow Connector 39">
+              <a:extLst>
+                <a:ext uri="{FF2B5EF4-FFF2-40B4-BE49-F238E27FC236}">
+                  <a16:creationId xmlns:a16="http://schemas.microsoft.com/office/drawing/2014/main" id="{880EBC79-E5A3-02A3-2873-A35DAC811839}"/>
+                </a:ext>
+              </a:extLst>
+            </p:cNvPr>
+            <p:cNvCxnSpPr>
+              <a:cxnSpLocks/>
+            </p:cNvCxnSpPr>
+            <p:nvPr/>
+          </p:nvCxnSpPr>
+          <p:spPr>
+            <a:xfrm flipH="1">
+              <a:off x="4438650" y="2121184"/>
+              <a:ext cx="2990852" cy="0"/>
+            </a:xfrm>
+            <a:prstGeom prst="straightConnector1">
+              <a:avLst/>
+            </a:prstGeom>
+            <a:ln>
+              <a:tailEnd type="triangle"/>
+            </a:ln>
+          </p:spPr>
+          <p:style>
+            <a:lnRef idx="2">
+              <a:schemeClr val="dk1"/>
+            </a:lnRef>
+            <a:fillRef idx="0">
+              <a:schemeClr val="dk1"/>
+            </a:fillRef>
+            <a:effectRef idx="1">
+              <a:schemeClr val="dk1"/>
+            </a:effectRef>
+            <a:fontRef idx="minor">
+              <a:schemeClr val="tx1"/>
+            </a:fontRef>
+          </p:style>
+        </p:cxnSp>
+      </p:grpSp>
+      <p:grpSp>
+        <p:nvGrpSpPr>
+          <p:cNvPr id="41" name="Group 40">
+            <a:extLst>
+              <a:ext uri="{FF2B5EF4-FFF2-40B4-BE49-F238E27FC236}">
+                <a16:creationId xmlns:a16="http://schemas.microsoft.com/office/drawing/2014/main" id="{BC0BDFD9-FBBD-D6E8-8231-3BECF754BA86}"/>
+              </a:ext>
+            </a:extLst>
+          </p:cNvPr>
+          <p:cNvGrpSpPr/>
+          <p:nvPr/>
+        </p:nvGrpSpPr>
+        <p:grpSpPr>
+          <a:xfrm>
+            <a:off x="4419602" y="5560681"/>
+            <a:ext cx="3009900" cy="307777"/>
+            <a:chOff x="4419602" y="2121184"/>
+            <a:chExt cx="3009900" cy="307777"/>
+          </a:xfrm>
+        </p:grpSpPr>
+        <p:sp>
+          <p:nvSpPr>
+            <p:cNvPr id="42" name="TextBox 41">
+              <a:extLst>
+                <a:ext uri="{FF2B5EF4-FFF2-40B4-BE49-F238E27FC236}">
+                  <a16:creationId xmlns:a16="http://schemas.microsoft.com/office/drawing/2014/main" id="{4D194478-51AD-D61A-0787-AF673CF8D5F6}"/>
+                </a:ext>
+              </a:extLst>
+            </p:cNvPr>
+            <p:cNvSpPr txBox="1"/>
+            <p:nvPr/>
+          </p:nvSpPr>
+          <p:spPr>
+            <a:xfrm>
+              <a:off x="4419602" y="2121184"/>
+              <a:ext cx="2990852" cy="307777"/>
+            </a:xfrm>
+            <a:prstGeom prst="rect">
+              <a:avLst/>
+            </a:prstGeom>
+            <a:noFill/>
+          </p:spPr>
+          <p:txBody>
+            <a:bodyPr wrap="square" rtlCol="0">
+              <a:spAutoFit/>
+            </a:bodyPr>
+            <a:lstStyle/>
+            <a:p>
+              <a:pPr algn="ctr"/>
+              <a:r>
+                <a:rPr lang="en-US" sz="1400" dirty="0">
+                  <a:latin typeface="Courier New" panose="02070309020205020404" pitchFamily="49" charset="0"/>
+                  <a:cs typeface="Courier New" panose="02070309020205020404" pitchFamily="49" charset="0"/>
+                </a:rPr>
+                <a:t>HTTP Response</a:t>
+              </a:r>
+            </a:p>
+          </p:txBody>
+        </p:sp>
+        <p:cxnSp>
+          <p:nvCxnSpPr>
+            <p:cNvPr id="43" name="Straight Arrow Connector 42">
+              <a:extLst>
+                <a:ext uri="{FF2B5EF4-FFF2-40B4-BE49-F238E27FC236}">
+                  <a16:creationId xmlns:a16="http://schemas.microsoft.com/office/drawing/2014/main" id="{D3BFCA54-F82B-9A5A-7A30-E3FA59DDF024}"/>
+                </a:ext>
+              </a:extLst>
+            </p:cNvPr>
+            <p:cNvCxnSpPr>
+              <a:cxnSpLocks/>
+            </p:cNvCxnSpPr>
+            <p:nvPr/>
+          </p:nvCxnSpPr>
+          <p:spPr>
+            <a:xfrm flipH="1">
+              <a:off x="4438650" y="2121184"/>
+              <a:ext cx="2990852" cy="0"/>
+            </a:xfrm>
+            <a:prstGeom prst="straightConnector1">
+              <a:avLst/>
+            </a:prstGeom>
+            <a:ln>
+              <a:tailEnd type="triangle"/>
+            </a:ln>
+          </p:spPr>
+          <p:style>
+            <a:lnRef idx="2">
+              <a:schemeClr val="dk1"/>
+            </a:lnRef>
+            <a:fillRef idx="0">
+              <a:schemeClr val="dk1"/>
+            </a:fillRef>
+            <a:effectRef idx="1">
+              <a:schemeClr val="dk1"/>
+            </a:effectRef>
+            <a:fontRef idx="minor">
+              <a:schemeClr val="tx1"/>
+            </a:fontRef>
+          </p:style>
+        </p:cxnSp>
+      </p:grpSp>
+    </p:spTree>
+    <p:extLst>
+      <p:ext uri="{BB962C8B-B14F-4D97-AF65-F5344CB8AC3E}">
+        <p14:creationId xmlns:p14="http://schemas.microsoft.com/office/powerpoint/2010/main" val="1387253623"/>
+      </p:ext>
+    </p:extLst>
+  </p:cSld>
+  <p:clrMapOvr>
+    <a:masterClrMapping/>
+  </p:clrMapOvr>
+</p:sld>
+</file>
+
+<file path=ppt/slides/slide19.xml><?xml version="1.0" encoding="utf-8"?>
+<p:sld xmlns:a="http://schemas.openxmlformats.org/drawingml/2006/main" xmlns:r="http://schemas.openxmlformats.org/officeDocument/2006/relationships" xmlns:p="http://schemas.openxmlformats.org/presentationml/2006/main">
+  <p:cSld>
+    <p:spTree>
+      <p:nvGrpSpPr>
+        <p:cNvPr id="1" name="">
+          <a:extLst>
+            <a:ext uri="{FF2B5EF4-FFF2-40B4-BE49-F238E27FC236}">
+              <a16:creationId xmlns:a16="http://schemas.microsoft.com/office/drawing/2014/main" id="{E9EDDB8A-AA96-3C62-9F96-FC4A3FE74B24}"/>
+            </a:ext>
+          </a:extLst>
+        </p:cNvPr>
+        <p:cNvGrpSpPr/>
+        <p:nvPr/>
+      </p:nvGrpSpPr>
+      <p:grpSpPr>
+        <a:xfrm>
+          <a:off x="0" y="0"/>
+          <a:ext cx="0" cy="0"/>
+          <a:chOff x="0" y="0"/>
+          <a:chExt cx="0" cy="0"/>
+        </a:xfrm>
+      </p:grpSpPr>
+      <p:sp>
+        <p:nvSpPr>
+          <p:cNvPr id="2" name="Title 1">
+            <a:extLst>
+              <a:ext uri="{FF2B5EF4-FFF2-40B4-BE49-F238E27FC236}">
+                <a16:creationId xmlns:a16="http://schemas.microsoft.com/office/drawing/2014/main" id="{C1DA66A6-3F98-8C1A-DDC0-51AB3BE8C298}"/>
+              </a:ext>
+            </a:extLst>
+          </p:cNvPr>
+          <p:cNvSpPr>
+            <a:spLocks noGrp="1"/>
+          </p:cNvSpPr>
+          <p:nvPr>
+            <p:ph type="title"/>
+          </p:nvPr>
+        </p:nvSpPr>
+        <p:spPr>
+          <a:xfrm>
+            <a:off x="838200" y="365126"/>
+            <a:ext cx="10515600" cy="718608"/>
+          </a:xfrm>
+        </p:spPr>
+        <p:txBody>
+          <a:bodyPr>
+            <a:normAutofit/>
+          </a:bodyPr>
+          <a:lstStyle/>
+          <a:p>
+            <a:r>
+              <a:rPr lang="nl-NL" sz="3600" dirty="0"/>
+              <a:t>HTTP responses</a:t>
+            </a:r>
+            <a:endParaRPr lang="nl-NL" sz="3600" noProof="0" dirty="0"/>
+          </a:p>
+        </p:txBody>
+      </p:sp>
+      <p:sp>
+        <p:nvSpPr>
+          <p:cNvPr id="3" name="Content Placeholder 2">
+            <a:extLst>
+              <a:ext uri="{FF2B5EF4-FFF2-40B4-BE49-F238E27FC236}">
+                <a16:creationId xmlns:a16="http://schemas.microsoft.com/office/drawing/2014/main" id="{61A7548D-3D73-819B-4457-F098FBBDBCAA}"/>
+              </a:ext>
+            </a:extLst>
+          </p:cNvPr>
+          <p:cNvSpPr>
+            <a:spLocks noGrp="1"/>
+          </p:cNvSpPr>
+          <p:nvPr>
+            <p:ph idx="1"/>
+          </p:nvPr>
+        </p:nvSpPr>
+        <p:spPr>
+          <a:xfrm>
+            <a:off x="838200" y="1456267"/>
+            <a:ext cx="5257800" cy="4720696"/>
+          </a:xfrm>
+        </p:spPr>
+        <p:txBody>
+          <a:bodyPr>
+            <a:normAutofit/>
+          </a:bodyPr>
+          <a:lstStyle/>
+          <a:p>
+            <a:pPr marL="0" indent="0">
+              <a:spcAft>
+                <a:spcPts val="600"/>
+              </a:spcAft>
+              <a:buNone/>
+            </a:pPr>
+            <a:r>
+              <a:rPr lang="nl-NL" sz="1800" dirty="0"/>
+              <a:t>Status van HTTP server na doen van verzoek:</a:t>
+            </a:r>
+          </a:p>
+          <a:p>
+            <a:pPr marL="0" indent="0">
+              <a:spcAft>
+                <a:spcPts val="600"/>
+              </a:spcAft>
+              <a:buNone/>
+            </a:pPr>
+            <a:endParaRPr lang="nl-NL" sz="1800" dirty="0">
+              <a:latin typeface="Courier New" panose="02070309020205020404" pitchFamily="49" charset="0"/>
+              <a:cs typeface="Courier New" panose="02070309020205020404" pitchFamily="49" charset="0"/>
+            </a:endParaRPr>
+          </a:p>
+          <a:p>
+            <a:pPr marL="0" indent="0">
+              <a:spcAft>
+                <a:spcPts val="600"/>
+              </a:spcAft>
+              <a:buNone/>
+            </a:pPr>
+            <a:r>
+              <a:rPr lang="nl-NL" sz="1800" dirty="0">
+                <a:latin typeface="Courier New" panose="02070309020205020404" pitchFamily="49" charset="0"/>
+                <a:cs typeface="Courier New" panose="02070309020205020404" pitchFamily="49" charset="0"/>
+              </a:rPr>
+              <a:t>100-200	Informatief</a:t>
+            </a:r>
+          </a:p>
+          <a:p>
+            <a:pPr marL="0" indent="0">
+              <a:spcAft>
+                <a:spcPts val="600"/>
+              </a:spcAft>
+              <a:buNone/>
+            </a:pPr>
+            <a:r>
+              <a:rPr lang="nl-NL" sz="1800" dirty="0">
+                <a:latin typeface="Courier New" panose="02070309020205020404" pitchFamily="49" charset="0"/>
+                <a:cs typeface="Courier New" panose="02070309020205020404" pitchFamily="49" charset="0"/>
+              </a:rPr>
+              <a:t>200-300	Succesvol</a:t>
+            </a:r>
+          </a:p>
+          <a:p>
+            <a:pPr marL="0" indent="0">
+              <a:spcAft>
+                <a:spcPts val="600"/>
+              </a:spcAft>
+              <a:buNone/>
+            </a:pPr>
+            <a:r>
+              <a:rPr lang="nl-NL" sz="1800" dirty="0">
+                <a:latin typeface="Courier New" panose="02070309020205020404" pitchFamily="49" charset="0"/>
+                <a:cs typeface="Courier New" panose="02070309020205020404" pitchFamily="49" charset="0"/>
+              </a:rPr>
+              <a:t>300-400	</a:t>
+            </a:r>
+            <a:r>
+              <a:rPr lang="nl-NL" sz="1800" dirty="0" err="1">
+                <a:latin typeface="Courier New" panose="02070309020205020404" pitchFamily="49" charset="0"/>
+                <a:cs typeface="Courier New" panose="02070309020205020404" pitchFamily="49" charset="0"/>
+              </a:rPr>
+              <a:t>Redirect</a:t>
+            </a:r>
+            <a:endParaRPr lang="nl-NL" sz="1800" dirty="0">
+              <a:latin typeface="Courier New" panose="02070309020205020404" pitchFamily="49" charset="0"/>
+              <a:cs typeface="Courier New" panose="02070309020205020404" pitchFamily="49" charset="0"/>
+            </a:endParaRPr>
+          </a:p>
+          <a:p>
+            <a:pPr marL="0" indent="0">
+              <a:spcAft>
+                <a:spcPts val="600"/>
+              </a:spcAft>
+              <a:buNone/>
+            </a:pPr>
+            <a:r>
+              <a:rPr lang="nl-NL" sz="1800" dirty="0">
+                <a:latin typeface="Courier New" panose="02070309020205020404" pitchFamily="49" charset="0"/>
+                <a:cs typeface="Courier New" panose="02070309020205020404" pitchFamily="49" charset="0"/>
+              </a:rPr>
+              <a:t>400-500	Foutcodes</a:t>
+            </a:r>
+          </a:p>
+          <a:p>
+            <a:pPr marL="0" indent="0">
+              <a:spcAft>
+                <a:spcPts val="600"/>
+              </a:spcAft>
+              <a:buNone/>
+            </a:pPr>
+            <a:r>
+              <a:rPr lang="nl-NL" sz="1800" dirty="0">
+                <a:latin typeface="Courier New" panose="02070309020205020404" pitchFamily="49" charset="0"/>
+                <a:cs typeface="Courier New" panose="02070309020205020404" pitchFamily="49" charset="0"/>
+              </a:rPr>
+              <a:t>500		Server foutcodes</a:t>
+            </a:r>
+          </a:p>
+        </p:txBody>
+      </p:sp>
+      <p:sp>
+        <p:nvSpPr>
+          <p:cNvPr id="4" name="Content Placeholder 2">
+            <a:extLst>
+              <a:ext uri="{FF2B5EF4-FFF2-40B4-BE49-F238E27FC236}">
+                <a16:creationId xmlns:a16="http://schemas.microsoft.com/office/drawing/2014/main" id="{816256F1-999E-0375-0B02-B42FABF162A4}"/>
+              </a:ext>
+            </a:extLst>
+          </p:cNvPr>
+          <p:cNvSpPr txBox="1">
+            <a:spLocks/>
+          </p:cNvSpPr>
+          <p:nvPr/>
+        </p:nvSpPr>
+        <p:spPr>
+          <a:xfrm>
+            <a:off x="6750050" y="1456267"/>
+            <a:ext cx="4603750" cy="4720696"/>
+          </a:xfrm>
+          <a:prstGeom prst="rect">
+            <a:avLst/>
+          </a:prstGeom>
+        </p:spPr>
+        <p:txBody>
+          <a:bodyPr vert="horz" lIns="91440" tIns="45720" rIns="91440" bIns="45720" rtlCol="0">
+            <a:normAutofit/>
+          </a:bodyPr>
+          <a:lstStyle>
+            <a:lvl1pPr marL="228600" indent="-228600" algn="l" defTabSz="914400" rtl="0" eaLnBrk="1" latinLnBrk="0" hangingPunct="1">
+              <a:lnSpc>
+                <a:spcPct val="90000"/>
+              </a:lnSpc>
+              <a:spcBef>
+                <a:spcPts val="1000"/>
+              </a:spcBef>
+              <a:buFont typeface="Arial" panose="020B0604020202020204" pitchFamily="34" charset="0"/>
+              <a:buChar char="•"/>
+              <a:defRPr sz="2800" kern="1200">
+                <a:solidFill>
+                  <a:schemeClr val="tx1"/>
+                </a:solidFill>
+                <a:latin typeface="+mn-lt"/>
+                <a:ea typeface="+mn-ea"/>
+                <a:cs typeface="+mn-cs"/>
+              </a:defRPr>
+            </a:lvl1pPr>
+            <a:lvl2pPr marL="685800" indent="-228600" algn="l" defTabSz="914400" rtl="0" eaLnBrk="1" latinLnBrk="0" hangingPunct="1">
+              <a:lnSpc>
+                <a:spcPct val="90000"/>
+              </a:lnSpc>
+              <a:spcBef>
+                <a:spcPts val="500"/>
+              </a:spcBef>
+              <a:buFont typeface="Arial" panose="020B0604020202020204" pitchFamily="34" charset="0"/>
+              <a:buChar char="•"/>
+              <a:defRPr sz="2400" kern="1200">
+                <a:solidFill>
+                  <a:schemeClr val="tx1"/>
+                </a:solidFill>
+                <a:latin typeface="+mn-lt"/>
+                <a:ea typeface="+mn-ea"/>
+                <a:cs typeface="+mn-cs"/>
+              </a:defRPr>
+            </a:lvl2pPr>
+            <a:lvl3pPr marL="1143000" indent="-228600" algn="l" defTabSz="914400" rtl="0" eaLnBrk="1" latinLnBrk="0" hangingPunct="1">
+              <a:lnSpc>
+                <a:spcPct val="90000"/>
+              </a:lnSpc>
+              <a:spcBef>
+                <a:spcPts val="500"/>
+              </a:spcBef>
+              <a:buFont typeface="Arial" panose="020B0604020202020204" pitchFamily="34" charset="0"/>
+              <a:buChar char="•"/>
+              <a:defRPr sz="2000" kern="1200">
+                <a:solidFill>
+                  <a:schemeClr val="tx1"/>
+                </a:solidFill>
+                <a:latin typeface="+mn-lt"/>
+                <a:ea typeface="+mn-ea"/>
+                <a:cs typeface="+mn-cs"/>
+              </a:defRPr>
+            </a:lvl3pPr>
+            <a:lvl4pPr marL="1600200" indent="-228600" algn="l" defTabSz="914400" rtl="0" eaLnBrk="1" latinLnBrk="0" hangingPunct="1">
+              <a:lnSpc>
+                <a:spcPct val="90000"/>
+              </a:lnSpc>
+              <a:spcBef>
+                <a:spcPts val="500"/>
+              </a:spcBef>
+              <a:buFont typeface="Arial" panose="020B0604020202020204" pitchFamily="34" charset="0"/>
+              <a:buChar char="•"/>
+              <a:defRPr sz="1800" kern="1200">
+                <a:solidFill>
+                  <a:schemeClr val="tx1"/>
+                </a:solidFill>
+                <a:latin typeface="+mn-lt"/>
+                <a:ea typeface="+mn-ea"/>
+                <a:cs typeface="+mn-cs"/>
+              </a:defRPr>
+            </a:lvl4pPr>
+            <a:lvl5pPr marL="2057400" indent="-228600" algn="l" defTabSz="914400" rtl="0" eaLnBrk="1" latinLnBrk="0" hangingPunct="1">
+              <a:lnSpc>
+                <a:spcPct val="90000"/>
+              </a:lnSpc>
+              <a:spcBef>
+                <a:spcPts val="500"/>
+              </a:spcBef>
+              <a:buFont typeface="Arial" panose="020B0604020202020204" pitchFamily="34" charset="0"/>
+              <a:buChar char="•"/>
+              <a:defRPr sz="1800" kern="1200">
+                <a:solidFill>
+                  <a:schemeClr val="tx1"/>
+                </a:solidFill>
+                <a:latin typeface="+mn-lt"/>
+                <a:ea typeface="+mn-ea"/>
+                <a:cs typeface="+mn-cs"/>
+              </a:defRPr>
+            </a:lvl5pPr>
+            <a:lvl6pPr marL="2514600" indent="-228600" algn="l" defTabSz="914400" rtl="0" eaLnBrk="1" latinLnBrk="0" hangingPunct="1">
+              <a:lnSpc>
+                <a:spcPct val="90000"/>
+              </a:lnSpc>
+              <a:spcBef>
+                <a:spcPts val="500"/>
+              </a:spcBef>
+              <a:buFont typeface="Arial" panose="020B0604020202020204" pitchFamily="34" charset="0"/>
+              <a:buChar char="•"/>
+              <a:defRPr sz="1800" kern="1200">
+                <a:solidFill>
+                  <a:schemeClr val="tx1"/>
+                </a:solidFill>
+                <a:latin typeface="+mn-lt"/>
+                <a:ea typeface="+mn-ea"/>
+                <a:cs typeface="+mn-cs"/>
+              </a:defRPr>
+            </a:lvl6pPr>
+            <a:lvl7pPr marL="2971800" indent="-228600" algn="l" defTabSz="914400" rtl="0" eaLnBrk="1" latinLnBrk="0" hangingPunct="1">
+              <a:lnSpc>
+                <a:spcPct val="90000"/>
+              </a:lnSpc>
+              <a:spcBef>
+                <a:spcPts val="500"/>
+              </a:spcBef>
+              <a:buFont typeface="Arial" panose="020B0604020202020204" pitchFamily="34" charset="0"/>
+              <a:buChar char="•"/>
+              <a:defRPr sz="1800" kern="1200">
+                <a:solidFill>
+                  <a:schemeClr val="tx1"/>
+                </a:solidFill>
+                <a:latin typeface="+mn-lt"/>
+                <a:ea typeface="+mn-ea"/>
+                <a:cs typeface="+mn-cs"/>
+              </a:defRPr>
+            </a:lvl7pPr>
+            <a:lvl8pPr marL="3429000" indent="-228600" algn="l" defTabSz="914400" rtl="0" eaLnBrk="1" latinLnBrk="0" hangingPunct="1">
+              <a:lnSpc>
+                <a:spcPct val="90000"/>
+              </a:lnSpc>
+              <a:spcBef>
+                <a:spcPts val="500"/>
+              </a:spcBef>
+              <a:buFont typeface="Arial" panose="020B0604020202020204" pitchFamily="34" charset="0"/>
+              <a:buChar char="•"/>
+              <a:defRPr sz="1800" kern="1200">
+                <a:solidFill>
+                  <a:schemeClr val="tx1"/>
+                </a:solidFill>
+                <a:latin typeface="+mn-lt"/>
+                <a:ea typeface="+mn-ea"/>
+                <a:cs typeface="+mn-cs"/>
+              </a:defRPr>
+            </a:lvl8pPr>
+            <a:lvl9pPr marL="3886200" indent="-228600" algn="l" defTabSz="914400" rtl="0" eaLnBrk="1" latinLnBrk="0" hangingPunct="1">
+              <a:lnSpc>
+                <a:spcPct val="90000"/>
+              </a:lnSpc>
+              <a:spcBef>
+                <a:spcPts val="500"/>
+              </a:spcBef>
+              <a:buFont typeface="Arial" panose="020B0604020202020204" pitchFamily="34" charset="0"/>
+              <a:buChar char="•"/>
+              <a:defRPr sz="1800" kern="1200">
+                <a:solidFill>
+                  <a:schemeClr val="tx1"/>
+                </a:solidFill>
+                <a:latin typeface="+mn-lt"/>
+                <a:ea typeface="+mn-ea"/>
+                <a:cs typeface="+mn-cs"/>
+              </a:defRPr>
+            </a:lvl9pPr>
+          </a:lstStyle>
+          <a:p>
+            <a:pPr marL="0" indent="0">
+              <a:lnSpc>
+                <a:spcPct val="100000"/>
+              </a:lnSpc>
+              <a:spcBef>
+                <a:spcPts val="0"/>
+              </a:spcBef>
+              <a:spcAft>
+                <a:spcPts val="600"/>
+              </a:spcAft>
+              <a:buNone/>
+            </a:pPr>
+            <a:endParaRPr lang="nl-NL" sz="1400" dirty="0">
+              <a:latin typeface="Courier New" panose="02070309020205020404" pitchFamily="49" charset="0"/>
+              <a:cs typeface="Courier New" panose="02070309020205020404" pitchFamily="49" charset="0"/>
+            </a:endParaRPr>
+          </a:p>
+          <a:p>
+            <a:pPr marL="0" indent="0">
+              <a:lnSpc>
+                <a:spcPct val="100000"/>
+              </a:lnSpc>
+              <a:spcBef>
+                <a:spcPts val="0"/>
+              </a:spcBef>
+              <a:spcAft>
+                <a:spcPts val="600"/>
+              </a:spcAft>
+              <a:buNone/>
+            </a:pPr>
+            <a:endParaRPr lang="nl-NL" sz="1400" dirty="0">
+              <a:latin typeface="Courier New" panose="02070309020205020404" pitchFamily="49" charset="0"/>
+              <a:cs typeface="Courier New" panose="02070309020205020404" pitchFamily="49" charset="0"/>
+            </a:endParaRPr>
+          </a:p>
+          <a:p>
+            <a:pPr marL="0" indent="0">
+              <a:lnSpc>
+                <a:spcPct val="100000"/>
+              </a:lnSpc>
+              <a:spcBef>
+                <a:spcPts val="0"/>
+              </a:spcBef>
+              <a:spcAft>
+                <a:spcPts val="600"/>
+              </a:spcAft>
+              <a:buNone/>
+            </a:pPr>
+            <a:endParaRPr lang="nl-NL" sz="1400" dirty="0">
+              <a:latin typeface="Courier New" panose="02070309020205020404" pitchFamily="49" charset="0"/>
+              <a:cs typeface="Courier New" panose="02070309020205020404" pitchFamily="49" charset="0"/>
+            </a:endParaRPr>
+          </a:p>
+          <a:p>
+            <a:pPr marL="0" indent="0">
+              <a:lnSpc>
+                <a:spcPct val="100000"/>
+              </a:lnSpc>
+              <a:spcBef>
+                <a:spcPts val="0"/>
+              </a:spcBef>
+              <a:spcAft>
+                <a:spcPts val="600"/>
+              </a:spcAft>
+              <a:buNone/>
+            </a:pPr>
+            <a:r>
+              <a:rPr lang="nl-NL" sz="1400" dirty="0">
+                <a:latin typeface="Courier New" panose="02070309020205020404" pitchFamily="49" charset="0"/>
+                <a:cs typeface="Courier New" panose="02070309020205020404" pitchFamily="49" charset="0"/>
+              </a:rPr>
+              <a:t>200 - OK</a:t>
+            </a:r>
+          </a:p>
+          <a:p>
+            <a:pPr marL="0" indent="0">
+              <a:lnSpc>
+                <a:spcPct val="100000"/>
+              </a:lnSpc>
+              <a:spcBef>
+                <a:spcPts val="0"/>
+              </a:spcBef>
+              <a:spcAft>
+                <a:spcPts val="600"/>
+              </a:spcAft>
+              <a:buNone/>
+            </a:pPr>
+            <a:r>
+              <a:rPr lang="nl-NL" sz="1400" dirty="0">
+                <a:latin typeface="Courier New" panose="02070309020205020404" pitchFamily="49" charset="0"/>
+                <a:cs typeface="Courier New" panose="02070309020205020404" pitchFamily="49" charset="0"/>
+              </a:rPr>
+              <a:t>201 - </a:t>
+            </a:r>
+            <a:r>
+              <a:rPr lang="nl-NL" sz="1400" dirty="0" err="1">
+                <a:latin typeface="Courier New" panose="02070309020205020404" pitchFamily="49" charset="0"/>
+                <a:cs typeface="Courier New" panose="02070309020205020404" pitchFamily="49" charset="0"/>
+              </a:rPr>
+              <a:t>Created</a:t>
+            </a:r>
+            <a:endParaRPr lang="nl-NL" sz="1400" dirty="0">
+              <a:latin typeface="Courier New" panose="02070309020205020404" pitchFamily="49" charset="0"/>
+              <a:cs typeface="Courier New" panose="02070309020205020404" pitchFamily="49" charset="0"/>
+            </a:endParaRPr>
+          </a:p>
+          <a:p>
+            <a:pPr marL="0" indent="0">
+              <a:lnSpc>
+                <a:spcPct val="100000"/>
+              </a:lnSpc>
+              <a:spcBef>
+                <a:spcPts val="0"/>
+              </a:spcBef>
+              <a:spcAft>
+                <a:spcPts val="600"/>
+              </a:spcAft>
+              <a:buNone/>
+            </a:pPr>
+            <a:endParaRPr lang="nl-NL" sz="1400" dirty="0">
+              <a:latin typeface="Courier New" panose="02070309020205020404" pitchFamily="49" charset="0"/>
+              <a:cs typeface="Courier New" panose="02070309020205020404" pitchFamily="49" charset="0"/>
+            </a:endParaRPr>
+          </a:p>
+          <a:p>
+            <a:pPr marL="0" indent="0">
+              <a:lnSpc>
+                <a:spcPct val="100000"/>
+              </a:lnSpc>
+              <a:spcBef>
+                <a:spcPts val="0"/>
+              </a:spcBef>
+              <a:spcAft>
+                <a:spcPts val="600"/>
+              </a:spcAft>
+              <a:buNone/>
+            </a:pPr>
+            <a:r>
+              <a:rPr lang="nl-NL" sz="1400" dirty="0">
+                <a:latin typeface="Courier New" panose="02070309020205020404" pitchFamily="49" charset="0"/>
+                <a:cs typeface="Courier New" panose="02070309020205020404" pitchFamily="49" charset="0"/>
+              </a:rPr>
+              <a:t>400 - Bad </a:t>
+            </a:r>
+            <a:r>
+              <a:rPr lang="nl-NL" sz="1400" dirty="0" err="1">
+                <a:latin typeface="Courier New" panose="02070309020205020404" pitchFamily="49" charset="0"/>
+                <a:cs typeface="Courier New" panose="02070309020205020404" pitchFamily="49" charset="0"/>
+              </a:rPr>
+              <a:t>request</a:t>
+            </a:r>
+            <a:r>
+              <a:rPr lang="nl-NL" sz="1400" dirty="0">
+                <a:latin typeface="Courier New" panose="02070309020205020404" pitchFamily="49" charset="0"/>
+                <a:cs typeface="Courier New" panose="02070309020205020404" pitchFamily="49" charset="0"/>
+              </a:rPr>
+              <a:t>	</a:t>
+            </a:r>
+          </a:p>
+          <a:p>
+            <a:pPr marL="0" indent="0">
+              <a:lnSpc>
+                <a:spcPct val="100000"/>
+              </a:lnSpc>
+              <a:spcBef>
+                <a:spcPts val="0"/>
+              </a:spcBef>
+              <a:spcAft>
+                <a:spcPts val="600"/>
+              </a:spcAft>
+              <a:buNone/>
+            </a:pPr>
+            <a:r>
+              <a:rPr lang="nl-NL" sz="1400" dirty="0">
+                <a:latin typeface="Courier New" panose="02070309020205020404" pitchFamily="49" charset="0"/>
+                <a:cs typeface="Courier New" panose="02070309020205020404" pitchFamily="49" charset="0"/>
+              </a:rPr>
+              <a:t>404 - Page </a:t>
+            </a:r>
+            <a:r>
+              <a:rPr lang="nl-NL" sz="1400" dirty="0" err="1">
+                <a:latin typeface="Courier New" panose="02070309020205020404" pitchFamily="49" charset="0"/>
+                <a:cs typeface="Courier New" panose="02070309020205020404" pitchFamily="49" charset="0"/>
+              </a:rPr>
+              <a:t>not</a:t>
+            </a:r>
+            <a:r>
+              <a:rPr lang="nl-NL" sz="1400" dirty="0">
+                <a:latin typeface="Courier New" panose="02070309020205020404" pitchFamily="49" charset="0"/>
+                <a:cs typeface="Courier New" panose="02070309020205020404" pitchFamily="49" charset="0"/>
+              </a:rPr>
+              <a:t> found</a:t>
+            </a:r>
+          </a:p>
+          <a:p>
+            <a:pPr marL="0" indent="0">
+              <a:lnSpc>
+                <a:spcPct val="100000"/>
+              </a:lnSpc>
+              <a:spcBef>
+                <a:spcPts val="0"/>
+              </a:spcBef>
+              <a:spcAft>
+                <a:spcPts val="600"/>
+              </a:spcAft>
+              <a:buNone/>
+            </a:pPr>
+            <a:r>
+              <a:rPr lang="nl-NL" sz="1400" dirty="0">
+                <a:latin typeface="Courier New" panose="02070309020205020404" pitchFamily="49" charset="0"/>
+                <a:cs typeface="Courier New" panose="02070309020205020404" pitchFamily="49" charset="0"/>
+              </a:rPr>
+              <a:t>422 - </a:t>
+            </a:r>
+            <a:r>
+              <a:rPr lang="nl-NL" sz="1400" dirty="0" err="1">
+                <a:latin typeface="Courier New" panose="02070309020205020404" pitchFamily="49" charset="0"/>
+                <a:cs typeface="Courier New" panose="02070309020205020404" pitchFamily="49" charset="0"/>
+              </a:rPr>
+              <a:t>Unprocessable</a:t>
+            </a:r>
+            <a:r>
+              <a:rPr lang="nl-NL" sz="1400" dirty="0">
+                <a:latin typeface="Courier New" panose="02070309020205020404" pitchFamily="49" charset="0"/>
+                <a:cs typeface="Courier New" panose="02070309020205020404" pitchFamily="49" charset="0"/>
+              </a:rPr>
+              <a:t> content</a:t>
+            </a:r>
+          </a:p>
+          <a:p>
+            <a:pPr marL="0" indent="0">
+              <a:lnSpc>
+                <a:spcPct val="100000"/>
+              </a:lnSpc>
+              <a:spcBef>
+                <a:spcPts val="0"/>
+              </a:spcBef>
+              <a:spcAft>
+                <a:spcPts val="600"/>
+              </a:spcAft>
+              <a:buNone/>
+            </a:pPr>
+            <a:endParaRPr lang="nl-NL" sz="1400" dirty="0">
+              <a:latin typeface="Courier New" panose="02070309020205020404" pitchFamily="49" charset="0"/>
+              <a:cs typeface="Courier New" panose="02070309020205020404" pitchFamily="49" charset="0"/>
+            </a:endParaRPr>
+          </a:p>
+          <a:p>
+            <a:pPr marL="0" indent="0">
+              <a:lnSpc>
+                <a:spcPct val="100000"/>
+              </a:lnSpc>
+              <a:spcBef>
+                <a:spcPts val="0"/>
+              </a:spcBef>
+              <a:spcAft>
+                <a:spcPts val="600"/>
+              </a:spcAft>
+              <a:buNone/>
+            </a:pPr>
+            <a:r>
+              <a:rPr lang="nl-NL" sz="1400" dirty="0">
+                <a:latin typeface="Courier New" panose="02070309020205020404" pitchFamily="49" charset="0"/>
+                <a:cs typeface="Courier New" panose="02070309020205020404" pitchFamily="49" charset="0"/>
+              </a:rPr>
+              <a:t>500 - </a:t>
+            </a:r>
+            <a:r>
+              <a:rPr lang="nl-NL" sz="1400" dirty="0" err="1">
+                <a:latin typeface="Courier New" panose="02070309020205020404" pitchFamily="49" charset="0"/>
+                <a:cs typeface="Courier New" panose="02070309020205020404" pitchFamily="49" charset="0"/>
+              </a:rPr>
+              <a:t>Internal</a:t>
+            </a:r>
+            <a:r>
+              <a:rPr lang="nl-NL" sz="1400" dirty="0">
+                <a:latin typeface="Courier New" panose="02070309020205020404" pitchFamily="49" charset="0"/>
+                <a:cs typeface="Courier New" panose="02070309020205020404" pitchFamily="49" charset="0"/>
+              </a:rPr>
+              <a:t> server error</a:t>
+            </a:r>
+          </a:p>
+        </p:txBody>
+      </p:sp>
+      <p:cxnSp>
+        <p:nvCxnSpPr>
+          <p:cNvPr id="6" name="Straight Connector 5">
+            <a:extLst>
+              <a:ext uri="{FF2B5EF4-FFF2-40B4-BE49-F238E27FC236}">
+                <a16:creationId xmlns:a16="http://schemas.microsoft.com/office/drawing/2014/main" id="{9508807A-F64C-1041-25C2-54F9B0D6CF41}"/>
+              </a:ext>
+            </a:extLst>
+          </p:cNvPr>
+          <p:cNvCxnSpPr/>
+          <p:nvPr/>
+        </p:nvCxnSpPr>
+        <p:spPr>
+          <a:xfrm>
+            <a:off x="6337300" y="1397000"/>
+            <a:ext cx="0" cy="4838700"/>
+          </a:xfrm>
+          <a:prstGeom prst="line">
+            <a:avLst/>
+          </a:prstGeom>
+        </p:spPr>
+        <p:style>
+          <a:lnRef idx="3">
+            <a:schemeClr val="dk1"/>
+          </a:lnRef>
+          <a:fillRef idx="0">
+            <a:schemeClr val="dk1"/>
+          </a:fillRef>
+          <a:effectRef idx="2">
+            <a:schemeClr val="dk1"/>
+          </a:effectRef>
+          <a:fontRef idx="minor">
+            <a:schemeClr val="tx1"/>
+          </a:fontRef>
+        </p:style>
+      </p:cxnSp>
+    </p:spTree>
+    <p:extLst>
+      <p:ext uri="{BB962C8B-B14F-4D97-AF65-F5344CB8AC3E}">
+        <p14:creationId xmlns:p14="http://schemas.microsoft.com/office/powerpoint/2010/main" val="3027850590"/>
       </p:ext>
     </p:extLst>
   </p:cSld>
@@ -9400,7 +11565,7 @@
               </a:spcAft>
             </a:pPr>
             <a:r>
-              <a:rPr lang="nl-NL" sz="2000" noProof="0" dirty="0"/>
+              <a:rPr lang="nl-NL" sz="1800" noProof="0" dirty="0"/>
               <a:t>Applicatie voor TO DO list .</a:t>
             </a:r>
           </a:p>
@@ -9410,7 +11575,7 @@
                 <a:spcPts val="600"/>
               </a:spcAft>
             </a:pPr>
-            <a:endParaRPr lang="nl-NL" sz="2000" noProof="0" dirty="0"/>
+            <a:endParaRPr lang="nl-NL" sz="1800" noProof="0" dirty="0"/>
           </a:p>
           <a:p>
             <a:pPr>
@@ -9419,7 +11584,7 @@
               </a:spcAft>
             </a:pPr>
             <a:r>
-              <a:rPr lang="nl-NL" sz="2000" noProof="0" dirty="0"/>
+              <a:rPr lang="nl-NL" sz="1800" noProof="0" dirty="0"/>
               <a:t>Bouw een API:</a:t>
             </a:r>
           </a:p>
@@ -9430,14 +11595,14 @@
               </a:spcAft>
             </a:pPr>
             <a:r>
-              <a:rPr lang="nl-NL" sz="2000" noProof="0" dirty="0"/>
+              <a:rPr lang="nl-NL" sz="1800" noProof="0" dirty="0"/>
               <a:t>Validatie met </a:t>
             </a:r>
             <a:r>
-              <a:rPr lang="nl-NL" sz="2000" noProof="0" dirty="0" err="1"/>
+              <a:rPr lang="nl-NL" sz="1800" noProof="0" dirty="0" err="1"/>
               <a:t>Pydantic</a:t>
             </a:r>
-            <a:endParaRPr lang="nl-NL" sz="2000" noProof="0" dirty="0"/>
+            <a:endParaRPr lang="nl-NL" sz="1800" noProof="0" dirty="0"/>
           </a:p>
           <a:p>
             <a:pPr lvl="1">
@@ -9446,10 +11611,10 @@
               </a:spcAft>
             </a:pPr>
             <a:r>
-              <a:rPr lang="nl-NL" sz="2000" noProof="0" dirty="0" err="1"/>
+              <a:rPr lang="nl-NL" sz="1800" noProof="0" dirty="0" err="1"/>
               <a:t>FastAPI</a:t>
             </a:r>
-            <a:endParaRPr lang="nl-NL" sz="2000" noProof="0" dirty="0"/>
+            <a:endParaRPr lang="nl-NL" sz="1800" noProof="0" dirty="0"/>
           </a:p>
           <a:p>
             <a:pPr>
@@ -9457,7 +11622,7 @@
                 <a:spcPts val="600"/>
               </a:spcAft>
             </a:pPr>
-            <a:endParaRPr lang="nl-NL" sz="2000" dirty="0"/>
+            <a:endParaRPr lang="nl-NL" sz="1800" dirty="0"/>
           </a:p>
           <a:p>
             <a:pPr>
@@ -9466,7 +11631,7 @@
               </a:spcAft>
             </a:pPr>
             <a:r>
-              <a:rPr lang="nl-NL" sz="2000" dirty="0"/>
+              <a:rPr lang="nl-NL" sz="1800" dirty="0"/>
               <a:t>Bouw een App:</a:t>
             </a:r>
           </a:p>
@@ -9477,10 +11642,10 @@
               </a:spcAft>
             </a:pPr>
             <a:r>
-              <a:rPr lang="nl-NL" sz="2000" dirty="0" err="1"/>
+              <a:rPr lang="nl-NL" sz="1800" dirty="0" err="1"/>
               <a:t>StreamLit</a:t>
             </a:r>
-            <a:endParaRPr lang="nl-NL" sz="2000" dirty="0"/>
+            <a:endParaRPr lang="nl-NL" sz="1800" dirty="0"/>
           </a:p>
         </p:txBody>
       </p:sp>
@@ -9518,6 +11683,2149 @@
     <p:extLst>
       <p:ext uri="{BB962C8B-B14F-4D97-AF65-F5344CB8AC3E}">
         <p14:creationId xmlns:p14="http://schemas.microsoft.com/office/powerpoint/2010/main" val="1265611121"/>
+      </p:ext>
+    </p:extLst>
+  </p:cSld>
+  <p:clrMapOvr>
+    <a:masterClrMapping/>
+  </p:clrMapOvr>
+</p:sld>
+</file>
+
+<file path=ppt/slides/slide20.xml><?xml version="1.0" encoding="utf-8"?>
+<p:sld xmlns:a="http://schemas.openxmlformats.org/drawingml/2006/main" xmlns:r="http://schemas.openxmlformats.org/officeDocument/2006/relationships" xmlns:p="http://schemas.openxmlformats.org/presentationml/2006/main">
+  <p:cSld>
+    <p:spTree>
+      <p:nvGrpSpPr>
+        <p:cNvPr id="1" name="">
+          <a:extLst>
+            <a:ext uri="{FF2B5EF4-FFF2-40B4-BE49-F238E27FC236}">
+              <a16:creationId xmlns:a16="http://schemas.microsoft.com/office/drawing/2014/main" id="{CB587B1B-D402-58C5-97A4-8ECC4AE73125}"/>
+            </a:ext>
+          </a:extLst>
+        </p:cNvPr>
+        <p:cNvGrpSpPr/>
+        <p:nvPr/>
+      </p:nvGrpSpPr>
+      <p:grpSpPr>
+        <a:xfrm>
+          <a:off x="0" y="0"/>
+          <a:ext cx="0" cy="0"/>
+          <a:chOff x="0" y="0"/>
+          <a:chExt cx="0" cy="0"/>
+        </a:xfrm>
+      </p:grpSpPr>
+      <p:sp>
+        <p:nvSpPr>
+          <p:cNvPr id="2" name="Title 1">
+            <a:extLst>
+              <a:ext uri="{FF2B5EF4-FFF2-40B4-BE49-F238E27FC236}">
+                <a16:creationId xmlns:a16="http://schemas.microsoft.com/office/drawing/2014/main" id="{AB5E9CF2-6A12-FE64-E518-B46D51075195}"/>
+              </a:ext>
+            </a:extLst>
+          </p:cNvPr>
+          <p:cNvSpPr>
+            <a:spLocks noGrp="1"/>
+          </p:cNvSpPr>
+          <p:nvPr>
+            <p:ph type="title"/>
+          </p:nvPr>
+        </p:nvSpPr>
+        <p:spPr>
+          <a:xfrm>
+            <a:off x="838200" y="365126"/>
+            <a:ext cx="10515600" cy="718608"/>
+          </a:xfrm>
+        </p:spPr>
+        <p:txBody>
+          <a:bodyPr>
+            <a:normAutofit/>
+          </a:bodyPr>
+          <a:lstStyle/>
+          <a:p>
+            <a:r>
+              <a:rPr lang="nl-NL" sz="3600" dirty="0" err="1"/>
+              <a:t>FastAPI</a:t>
+            </a:r>
+            <a:r>
+              <a:rPr lang="nl-NL" sz="3600" dirty="0"/>
+              <a:t> end points</a:t>
+            </a:r>
+            <a:endParaRPr lang="nl-NL" sz="3600" noProof="0" dirty="0"/>
+          </a:p>
+        </p:txBody>
+      </p:sp>
+      <p:sp>
+        <p:nvSpPr>
+          <p:cNvPr id="3" name="Content Placeholder 2">
+            <a:extLst>
+              <a:ext uri="{FF2B5EF4-FFF2-40B4-BE49-F238E27FC236}">
+                <a16:creationId xmlns:a16="http://schemas.microsoft.com/office/drawing/2014/main" id="{6A028A95-BDC5-8768-AC44-EC7D4863CE78}"/>
+              </a:ext>
+            </a:extLst>
+          </p:cNvPr>
+          <p:cNvSpPr>
+            <a:spLocks noGrp="1"/>
+          </p:cNvSpPr>
+          <p:nvPr>
+            <p:ph idx="1"/>
+          </p:nvPr>
+        </p:nvSpPr>
+        <p:spPr>
+          <a:xfrm>
+            <a:off x="838200" y="1456267"/>
+            <a:ext cx="5257800" cy="4720696"/>
+          </a:xfrm>
+        </p:spPr>
+        <p:txBody>
+          <a:bodyPr>
+            <a:noAutofit/>
+          </a:bodyPr>
+          <a:lstStyle/>
+          <a:p>
+            <a:pPr marL="0" indent="0">
+              <a:spcAft>
+                <a:spcPts val="600"/>
+              </a:spcAft>
+              <a:buNone/>
+            </a:pPr>
+            <a:r>
+              <a:rPr lang="nl-NL" sz="1800" dirty="0"/>
+              <a:t>End points in </a:t>
+            </a:r>
+            <a:r>
+              <a:rPr lang="nl-NL" sz="1800" dirty="0" err="1"/>
+              <a:t>FastAPI</a:t>
+            </a:r>
+            <a:r>
+              <a:rPr lang="nl-NL" sz="1800" dirty="0"/>
+              <a:t> zijn gekoppeld aan functies.</a:t>
+            </a:r>
+          </a:p>
+          <a:p>
+            <a:pPr marL="0" indent="0">
+              <a:spcAft>
+                <a:spcPts val="600"/>
+              </a:spcAft>
+              <a:buNone/>
+            </a:pPr>
+            <a:endParaRPr lang="nl-NL" sz="1800" dirty="0"/>
+          </a:p>
+          <a:p>
+            <a:pPr marL="0" indent="0">
+              <a:spcAft>
+                <a:spcPts val="600"/>
+              </a:spcAft>
+              <a:buNone/>
+            </a:pPr>
+            <a:r>
+              <a:rPr lang="nl-NL" sz="1800" dirty="0"/>
+              <a:t>Met </a:t>
+            </a:r>
+            <a:r>
+              <a:rPr lang="nl-NL" sz="1800" dirty="0" err="1"/>
+              <a:t>decorators</a:t>
+            </a:r>
+            <a:r>
+              <a:rPr lang="nl-NL" sz="1800" dirty="0"/>
+              <a:t> (</a:t>
+            </a:r>
+            <a:r>
+              <a:rPr lang="nl-NL" sz="1800" dirty="0">
+                <a:latin typeface="Courier New" panose="02070309020205020404" pitchFamily="49" charset="0"/>
+                <a:cs typeface="Courier New" panose="02070309020205020404" pitchFamily="49" charset="0"/>
+              </a:rPr>
+              <a:t>@</a:t>
+            </a:r>
+            <a:r>
+              <a:rPr lang="nl-NL" sz="1800" dirty="0"/>
+              <a:t>) maak je van functies end points:</a:t>
+            </a:r>
+          </a:p>
+          <a:p>
+            <a:pPr marL="0" indent="0">
+              <a:spcAft>
+                <a:spcPts val="600"/>
+              </a:spcAft>
+              <a:buNone/>
+            </a:pPr>
+            <a:endParaRPr lang="nl-NL" sz="1800" dirty="0"/>
+          </a:p>
+          <a:p>
+            <a:pPr marL="0" indent="0">
+              <a:spcAft>
+                <a:spcPts val="600"/>
+              </a:spcAft>
+              <a:buNone/>
+            </a:pPr>
+            <a:r>
+              <a:rPr lang="nl-NL" sz="1800" dirty="0">
+                <a:latin typeface="Courier New" panose="02070309020205020404" pitchFamily="49" charset="0"/>
+                <a:cs typeface="Courier New" panose="02070309020205020404" pitchFamily="49" charset="0"/>
+              </a:rPr>
+              <a:t>@app.get    </a:t>
+            </a:r>
+            <a:r>
+              <a:rPr lang="nl-NL" sz="1800" dirty="0"/>
+              <a:t>=&gt;    Voor </a:t>
+            </a:r>
+            <a:r>
+              <a:rPr lang="nl-NL" sz="1800" dirty="0">
+                <a:latin typeface="Courier New" panose="02070309020205020404" pitchFamily="49" charset="0"/>
+                <a:cs typeface="Courier New" panose="02070309020205020404" pitchFamily="49" charset="0"/>
+              </a:rPr>
+              <a:t>GET</a:t>
+            </a:r>
+            <a:r>
+              <a:rPr lang="nl-NL" sz="1800" dirty="0"/>
+              <a:t> </a:t>
+            </a:r>
+            <a:r>
+              <a:rPr lang="nl-NL" sz="1800" dirty="0" err="1"/>
+              <a:t>requests</a:t>
+            </a:r>
+            <a:r>
+              <a:rPr lang="nl-NL" sz="1800" dirty="0"/>
+              <a:t>.</a:t>
+            </a:r>
+          </a:p>
+          <a:p>
+            <a:pPr marL="0" indent="0">
+              <a:spcAft>
+                <a:spcPts val="600"/>
+              </a:spcAft>
+              <a:buNone/>
+            </a:pPr>
+            <a:r>
+              <a:rPr lang="nl-NL" sz="1800" dirty="0">
+                <a:latin typeface="Courier New" panose="02070309020205020404" pitchFamily="49" charset="0"/>
+                <a:cs typeface="Courier New" panose="02070309020205020404" pitchFamily="49" charset="0"/>
+              </a:rPr>
+              <a:t>@app.post   </a:t>
+            </a:r>
+            <a:r>
+              <a:rPr lang="nl-NL" sz="1800" dirty="0"/>
+              <a:t>=&gt;    Voor </a:t>
+            </a:r>
+            <a:r>
+              <a:rPr lang="nl-NL" sz="1800" dirty="0">
+                <a:latin typeface="Courier New" panose="02070309020205020404" pitchFamily="49" charset="0"/>
+                <a:cs typeface="Courier New" panose="02070309020205020404" pitchFamily="49" charset="0"/>
+              </a:rPr>
+              <a:t>POST</a:t>
+            </a:r>
+            <a:r>
+              <a:rPr lang="nl-NL" sz="1800" dirty="0"/>
+              <a:t> </a:t>
+            </a:r>
+            <a:r>
+              <a:rPr lang="nl-NL" sz="1800" dirty="0" err="1"/>
+              <a:t>requests</a:t>
+            </a:r>
+            <a:r>
+              <a:rPr lang="nl-NL" sz="1800" dirty="0"/>
+              <a:t> met data.</a:t>
+            </a:r>
+          </a:p>
+          <a:p>
+            <a:pPr marL="0" indent="0">
+              <a:spcAft>
+                <a:spcPts val="600"/>
+              </a:spcAft>
+              <a:buNone/>
+            </a:pPr>
+            <a:endParaRPr lang="nl-NL" sz="1800" dirty="0"/>
+          </a:p>
+          <a:p>
+            <a:pPr marL="0" indent="0">
+              <a:spcAft>
+                <a:spcPts val="600"/>
+              </a:spcAft>
+              <a:buNone/>
+            </a:pPr>
+            <a:r>
+              <a:rPr lang="nl-NL" sz="1800" dirty="0"/>
+              <a:t>Een functie kan meerdere end points hebben.</a:t>
+            </a:r>
+          </a:p>
+        </p:txBody>
+      </p:sp>
+      <p:sp>
+        <p:nvSpPr>
+          <p:cNvPr id="4" name="Content Placeholder 2">
+            <a:extLst>
+              <a:ext uri="{FF2B5EF4-FFF2-40B4-BE49-F238E27FC236}">
+                <a16:creationId xmlns:a16="http://schemas.microsoft.com/office/drawing/2014/main" id="{FCBCCE54-75EA-67B6-E2A2-A55958866E43}"/>
+              </a:ext>
+            </a:extLst>
+          </p:cNvPr>
+          <p:cNvSpPr txBox="1">
+            <a:spLocks/>
+          </p:cNvSpPr>
+          <p:nvPr/>
+        </p:nvSpPr>
+        <p:spPr>
+          <a:xfrm>
+            <a:off x="6750050" y="1456267"/>
+            <a:ext cx="4603750" cy="4720696"/>
+          </a:xfrm>
+          <a:prstGeom prst="rect">
+            <a:avLst/>
+          </a:prstGeom>
+        </p:spPr>
+        <p:txBody>
+          <a:bodyPr vert="horz" lIns="91440" tIns="45720" rIns="91440" bIns="45720" rtlCol="0">
+            <a:normAutofit/>
+          </a:bodyPr>
+          <a:lstStyle>
+            <a:lvl1pPr marL="228600" indent="-228600" algn="l" defTabSz="914400" rtl="0" eaLnBrk="1" latinLnBrk="0" hangingPunct="1">
+              <a:lnSpc>
+                <a:spcPct val="90000"/>
+              </a:lnSpc>
+              <a:spcBef>
+                <a:spcPts val="1000"/>
+              </a:spcBef>
+              <a:buFont typeface="Arial" panose="020B0604020202020204" pitchFamily="34" charset="0"/>
+              <a:buChar char="•"/>
+              <a:defRPr sz="2800" kern="1200">
+                <a:solidFill>
+                  <a:schemeClr val="tx1"/>
+                </a:solidFill>
+                <a:latin typeface="+mn-lt"/>
+                <a:ea typeface="+mn-ea"/>
+                <a:cs typeface="+mn-cs"/>
+              </a:defRPr>
+            </a:lvl1pPr>
+            <a:lvl2pPr marL="685800" indent="-228600" algn="l" defTabSz="914400" rtl="0" eaLnBrk="1" latinLnBrk="0" hangingPunct="1">
+              <a:lnSpc>
+                <a:spcPct val="90000"/>
+              </a:lnSpc>
+              <a:spcBef>
+                <a:spcPts val="500"/>
+              </a:spcBef>
+              <a:buFont typeface="Arial" panose="020B0604020202020204" pitchFamily="34" charset="0"/>
+              <a:buChar char="•"/>
+              <a:defRPr sz="2400" kern="1200">
+                <a:solidFill>
+                  <a:schemeClr val="tx1"/>
+                </a:solidFill>
+                <a:latin typeface="+mn-lt"/>
+                <a:ea typeface="+mn-ea"/>
+                <a:cs typeface="+mn-cs"/>
+              </a:defRPr>
+            </a:lvl2pPr>
+            <a:lvl3pPr marL="1143000" indent="-228600" algn="l" defTabSz="914400" rtl="0" eaLnBrk="1" latinLnBrk="0" hangingPunct="1">
+              <a:lnSpc>
+                <a:spcPct val="90000"/>
+              </a:lnSpc>
+              <a:spcBef>
+                <a:spcPts val="500"/>
+              </a:spcBef>
+              <a:buFont typeface="Arial" panose="020B0604020202020204" pitchFamily="34" charset="0"/>
+              <a:buChar char="•"/>
+              <a:defRPr sz="2000" kern="1200">
+                <a:solidFill>
+                  <a:schemeClr val="tx1"/>
+                </a:solidFill>
+                <a:latin typeface="+mn-lt"/>
+                <a:ea typeface="+mn-ea"/>
+                <a:cs typeface="+mn-cs"/>
+              </a:defRPr>
+            </a:lvl3pPr>
+            <a:lvl4pPr marL="1600200" indent="-228600" algn="l" defTabSz="914400" rtl="0" eaLnBrk="1" latinLnBrk="0" hangingPunct="1">
+              <a:lnSpc>
+                <a:spcPct val="90000"/>
+              </a:lnSpc>
+              <a:spcBef>
+                <a:spcPts val="500"/>
+              </a:spcBef>
+              <a:buFont typeface="Arial" panose="020B0604020202020204" pitchFamily="34" charset="0"/>
+              <a:buChar char="•"/>
+              <a:defRPr sz="1800" kern="1200">
+                <a:solidFill>
+                  <a:schemeClr val="tx1"/>
+                </a:solidFill>
+                <a:latin typeface="+mn-lt"/>
+                <a:ea typeface="+mn-ea"/>
+                <a:cs typeface="+mn-cs"/>
+              </a:defRPr>
+            </a:lvl4pPr>
+            <a:lvl5pPr marL="2057400" indent="-228600" algn="l" defTabSz="914400" rtl="0" eaLnBrk="1" latinLnBrk="0" hangingPunct="1">
+              <a:lnSpc>
+                <a:spcPct val="90000"/>
+              </a:lnSpc>
+              <a:spcBef>
+                <a:spcPts val="500"/>
+              </a:spcBef>
+              <a:buFont typeface="Arial" panose="020B0604020202020204" pitchFamily="34" charset="0"/>
+              <a:buChar char="•"/>
+              <a:defRPr sz="1800" kern="1200">
+                <a:solidFill>
+                  <a:schemeClr val="tx1"/>
+                </a:solidFill>
+                <a:latin typeface="+mn-lt"/>
+                <a:ea typeface="+mn-ea"/>
+                <a:cs typeface="+mn-cs"/>
+              </a:defRPr>
+            </a:lvl5pPr>
+            <a:lvl6pPr marL="2514600" indent="-228600" algn="l" defTabSz="914400" rtl="0" eaLnBrk="1" latinLnBrk="0" hangingPunct="1">
+              <a:lnSpc>
+                <a:spcPct val="90000"/>
+              </a:lnSpc>
+              <a:spcBef>
+                <a:spcPts val="500"/>
+              </a:spcBef>
+              <a:buFont typeface="Arial" panose="020B0604020202020204" pitchFamily="34" charset="0"/>
+              <a:buChar char="•"/>
+              <a:defRPr sz="1800" kern="1200">
+                <a:solidFill>
+                  <a:schemeClr val="tx1"/>
+                </a:solidFill>
+                <a:latin typeface="+mn-lt"/>
+                <a:ea typeface="+mn-ea"/>
+                <a:cs typeface="+mn-cs"/>
+              </a:defRPr>
+            </a:lvl6pPr>
+            <a:lvl7pPr marL="2971800" indent="-228600" algn="l" defTabSz="914400" rtl="0" eaLnBrk="1" latinLnBrk="0" hangingPunct="1">
+              <a:lnSpc>
+                <a:spcPct val="90000"/>
+              </a:lnSpc>
+              <a:spcBef>
+                <a:spcPts val="500"/>
+              </a:spcBef>
+              <a:buFont typeface="Arial" panose="020B0604020202020204" pitchFamily="34" charset="0"/>
+              <a:buChar char="•"/>
+              <a:defRPr sz="1800" kern="1200">
+                <a:solidFill>
+                  <a:schemeClr val="tx1"/>
+                </a:solidFill>
+                <a:latin typeface="+mn-lt"/>
+                <a:ea typeface="+mn-ea"/>
+                <a:cs typeface="+mn-cs"/>
+              </a:defRPr>
+            </a:lvl7pPr>
+            <a:lvl8pPr marL="3429000" indent="-228600" algn="l" defTabSz="914400" rtl="0" eaLnBrk="1" latinLnBrk="0" hangingPunct="1">
+              <a:lnSpc>
+                <a:spcPct val="90000"/>
+              </a:lnSpc>
+              <a:spcBef>
+                <a:spcPts val="500"/>
+              </a:spcBef>
+              <a:buFont typeface="Arial" panose="020B0604020202020204" pitchFamily="34" charset="0"/>
+              <a:buChar char="•"/>
+              <a:defRPr sz="1800" kern="1200">
+                <a:solidFill>
+                  <a:schemeClr val="tx1"/>
+                </a:solidFill>
+                <a:latin typeface="+mn-lt"/>
+                <a:ea typeface="+mn-ea"/>
+                <a:cs typeface="+mn-cs"/>
+              </a:defRPr>
+            </a:lvl8pPr>
+            <a:lvl9pPr marL="3886200" indent="-228600" algn="l" defTabSz="914400" rtl="0" eaLnBrk="1" latinLnBrk="0" hangingPunct="1">
+              <a:lnSpc>
+                <a:spcPct val="90000"/>
+              </a:lnSpc>
+              <a:spcBef>
+                <a:spcPts val="500"/>
+              </a:spcBef>
+              <a:buFont typeface="Arial" panose="020B0604020202020204" pitchFamily="34" charset="0"/>
+              <a:buChar char="•"/>
+              <a:defRPr sz="1800" kern="1200">
+                <a:solidFill>
+                  <a:schemeClr val="tx1"/>
+                </a:solidFill>
+                <a:latin typeface="+mn-lt"/>
+                <a:ea typeface="+mn-ea"/>
+                <a:cs typeface="+mn-cs"/>
+              </a:defRPr>
+            </a:lvl9pPr>
+          </a:lstStyle>
+          <a:p>
+            <a:pPr marL="0" indent="0">
+              <a:lnSpc>
+                <a:spcPct val="100000"/>
+              </a:lnSpc>
+              <a:spcBef>
+                <a:spcPts val="0"/>
+              </a:spcBef>
+              <a:spcAft>
+                <a:spcPts val="600"/>
+              </a:spcAft>
+              <a:buNone/>
+            </a:pPr>
+            <a:r>
+              <a:rPr lang="nl-NL" sz="1400" dirty="0" err="1">
+                <a:solidFill>
+                  <a:srgbClr val="7030A0"/>
+                </a:solidFill>
+                <a:latin typeface="Courier New" panose="02070309020205020404" pitchFamily="49" charset="0"/>
+                <a:cs typeface="Courier New" panose="02070309020205020404" pitchFamily="49" charset="0"/>
+              </a:rPr>
+              <a:t>from</a:t>
+            </a:r>
+            <a:r>
+              <a:rPr lang="nl-NL" sz="1400" dirty="0">
+                <a:latin typeface="Courier New" panose="02070309020205020404" pitchFamily="49" charset="0"/>
+                <a:cs typeface="Courier New" panose="02070309020205020404" pitchFamily="49" charset="0"/>
+              </a:rPr>
+              <a:t> </a:t>
+            </a:r>
+            <a:r>
+              <a:rPr lang="nl-NL" sz="1400" dirty="0" err="1">
+                <a:latin typeface="Courier New" panose="02070309020205020404" pitchFamily="49" charset="0"/>
+                <a:cs typeface="Courier New" panose="02070309020205020404" pitchFamily="49" charset="0"/>
+              </a:rPr>
+              <a:t>fastapi</a:t>
+            </a:r>
+            <a:r>
+              <a:rPr lang="nl-NL" sz="1400" dirty="0">
+                <a:latin typeface="Courier New" panose="02070309020205020404" pitchFamily="49" charset="0"/>
+                <a:cs typeface="Courier New" panose="02070309020205020404" pitchFamily="49" charset="0"/>
+              </a:rPr>
+              <a:t> </a:t>
+            </a:r>
+            <a:r>
+              <a:rPr lang="nl-NL" sz="1400" dirty="0">
+                <a:solidFill>
+                  <a:srgbClr val="7030A0"/>
+                </a:solidFill>
+                <a:latin typeface="Courier New" panose="02070309020205020404" pitchFamily="49" charset="0"/>
+                <a:cs typeface="Courier New" panose="02070309020205020404" pitchFamily="49" charset="0"/>
+              </a:rPr>
+              <a:t>import</a:t>
+            </a:r>
+            <a:r>
+              <a:rPr lang="nl-NL" sz="1400" dirty="0">
+                <a:latin typeface="Courier New" panose="02070309020205020404" pitchFamily="49" charset="0"/>
+                <a:cs typeface="Courier New" panose="02070309020205020404" pitchFamily="49" charset="0"/>
+              </a:rPr>
+              <a:t> </a:t>
+            </a:r>
+            <a:r>
+              <a:rPr lang="nl-NL" sz="1400" dirty="0" err="1">
+                <a:latin typeface="Courier New" panose="02070309020205020404" pitchFamily="49" charset="0"/>
+                <a:cs typeface="Courier New" panose="02070309020205020404" pitchFamily="49" charset="0"/>
+              </a:rPr>
+              <a:t>FastAPI</a:t>
+            </a:r>
+            <a:endParaRPr lang="nl-NL" sz="1400" dirty="0">
+              <a:latin typeface="Courier New" panose="02070309020205020404" pitchFamily="49" charset="0"/>
+              <a:cs typeface="Courier New" panose="02070309020205020404" pitchFamily="49" charset="0"/>
+            </a:endParaRPr>
+          </a:p>
+          <a:p>
+            <a:pPr marL="0" indent="0">
+              <a:lnSpc>
+                <a:spcPct val="100000"/>
+              </a:lnSpc>
+              <a:spcBef>
+                <a:spcPts val="0"/>
+              </a:spcBef>
+              <a:spcAft>
+                <a:spcPts val="600"/>
+              </a:spcAft>
+              <a:buNone/>
+            </a:pPr>
+            <a:endParaRPr lang="nl-NL" sz="1400" dirty="0">
+              <a:latin typeface="Courier New" panose="02070309020205020404" pitchFamily="49" charset="0"/>
+              <a:cs typeface="Courier New" panose="02070309020205020404" pitchFamily="49" charset="0"/>
+            </a:endParaRPr>
+          </a:p>
+          <a:p>
+            <a:pPr marL="0" indent="0">
+              <a:lnSpc>
+                <a:spcPct val="100000"/>
+              </a:lnSpc>
+              <a:spcBef>
+                <a:spcPts val="0"/>
+              </a:spcBef>
+              <a:spcAft>
+                <a:spcPts val="600"/>
+              </a:spcAft>
+              <a:buNone/>
+            </a:pPr>
+            <a:endParaRPr lang="nl-NL" sz="1400" dirty="0">
+              <a:solidFill>
+                <a:schemeClr val="accent6">
+                  <a:lumMod val="75000"/>
+                </a:schemeClr>
+              </a:solidFill>
+              <a:latin typeface="Courier New" panose="02070309020205020404" pitchFamily="49" charset="0"/>
+              <a:cs typeface="Courier New" panose="02070309020205020404" pitchFamily="49" charset="0"/>
+            </a:endParaRPr>
+          </a:p>
+          <a:p>
+            <a:pPr marL="0" indent="0">
+              <a:lnSpc>
+                <a:spcPct val="100000"/>
+              </a:lnSpc>
+              <a:spcBef>
+                <a:spcPts val="0"/>
+              </a:spcBef>
+              <a:spcAft>
+                <a:spcPts val="600"/>
+              </a:spcAft>
+              <a:buNone/>
+            </a:pPr>
+            <a:r>
+              <a:rPr lang="nl-NL" sz="1400" dirty="0">
+                <a:solidFill>
+                  <a:schemeClr val="accent6">
+                    <a:lumMod val="75000"/>
+                  </a:schemeClr>
+                </a:solidFill>
+                <a:latin typeface="Courier New" panose="02070309020205020404" pitchFamily="49" charset="0"/>
+                <a:cs typeface="Courier New" panose="02070309020205020404" pitchFamily="49" charset="0"/>
+              </a:rPr>
+              <a:t># Maak API aan.</a:t>
+            </a:r>
+          </a:p>
+          <a:p>
+            <a:pPr marL="0" indent="0">
+              <a:lnSpc>
+                <a:spcPct val="100000"/>
+              </a:lnSpc>
+              <a:spcBef>
+                <a:spcPts val="0"/>
+              </a:spcBef>
+              <a:spcAft>
+                <a:spcPts val="600"/>
+              </a:spcAft>
+              <a:buNone/>
+            </a:pPr>
+            <a:r>
+              <a:rPr lang="nl-NL" sz="1400" dirty="0" err="1">
+                <a:latin typeface="Courier New" panose="02070309020205020404" pitchFamily="49" charset="0"/>
+                <a:cs typeface="Courier New" panose="02070309020205020404" pitchFamily="49" charset="0"/>
+              </a:rPr>
+              <a:t>api</a:t>
+            </a:r>
+            <a:r>
+              <a:rPr lang="nl-NL" sz="1400" dirty="0">
+                <a:latin typeface="Courier New" panose="02070309020205020404" pitchFamily="49" charset="0"/>
+                <a:cs typeface="Courier New" panose="02070309020205020404" pitchFamily="49" charset="0"/>
+              </a:rPr>
+              <a:t> = </a:t>
+            </a:r>
+            <a:r>
+              <a:rPr lang="nl-NL" sz="1400" dirty="0" err="1">
+                <a:latin typeface="Courier New" panose="02070309020205020404" pitchFamily="49" charset="0"/>
+                <a:cs typeface="Courier New" panose="02070309020205020404" pitchFamily="49" charset="0"/>
+              </a:rPr>
+              <a:t>FastAPI</a:t>
+            </a:r>
+            <a:r>
+              <a:rPr lang="nl-NL" sz="1400" dirty="0">
+                <a:latin typeface="Courier New" panose="02070309020205020404" pitchFamily="49" charset="0"/>
+                <a:cs typeface="Courier New" panose="02070309020205020404" pitchFamily="49" charset="0"/>
+              </a:rPr>
+              <a:t>()</a:t>
+            </a:r>
+          </a:p>
+          <a:p>
+            <a:pPr marL="0" indent="0">
+              <a:lnSpc>
+                <a:spcPct val="100000"/>
+              </a:lnSpc>
+              <a:spcBef>
+                <a:spcPts val="0"/>
+              </a:spcBef>
+              <a:spcAft>
+                <a:spcPts val="600"/>
+              </a:spcAft>
+              <a:buNone/>
+            </a:pPr>
+            <a:endParaRPr lang="en-US" sz="1400" dirty="0">
+              <a:latin typeface="Courier New" panose="02070309020205020404" pitchFamily="49" charset="0"/>
+              <a:cs typeface="Courier New" panose="02070309020205020404" pitchFamily="49" charset="0"/>
+            </a:endParaRPr>
+          </a:p>
+          <a:p>
+            <a:pPr marL="0" indent="0">
+              <a:lnSpc>
+                <a:spcPct val="100000"/>
+              </a:lnSpc>
+              <a:spcBef>
+                <a:spcPts val="0"/>
+              </a:spcBef>
+              <a:spcAft>
+                <a:spcPts val="600"/>
+              </a:spcAft>
+              <a:buNone/>
+            </a:pPr>
+            <a:endParaRPr lang="en-US" sz="1400" dirty="0">
+              <a:latin typeface="Courier New" panose="02070309020205020404" pitchFamily="49" charset="0"/>
+              <a:cs typeface="Courier New" panose="02070309020205020404" pitchFamily="49" charset="0"/>
+            </a:endParaRPr>
+          </a:p>
+          <a:p>
+            <a:pPr marL="0" indent="0">
+              <a:lnSpc>
+                <a:spcPct val="100000"/>
+              </a:lnSpc>
+              <a:spcBef>
+                <a:spcPts val="0"/>
+              </a:spcBef>
+              <a:spcAft>
+                <a:spcPts val="600"/>
+              </a:spcAft>
+              <a:buNone/>
+            </a:pPr>
+            <a:r>
+              <a:rPr lang="en-US" sz="1400" dirty="0">
+                <a:solidFill>
+                  <a:schemeClr val="accent6">
+                    <a:lumMod val="75000"/>
+                  </a:schemeClr>
+                </a:solidFill>
+                <a:latin typeface="Courier New" panose="02070309020205020404" pitchFamily="49" charset="0"/>
+                <a:cs typeface="Courier New" panose="02070309020205020404" pitchFamily="49" charset="0"/>
+              </a:rPr>
+              <a:t># </a:t>
+            </a:r>
+            <a:r>
+              <a:rPr lang="en-US" sz="1400" dirty="0" err="1">
+                <a:solidFill>
+                  <a:schemeClr val="accent6">
+                    <a:lumMod val="75000"/>
+                  </a:schemeClr>
+                </a:solidFill>
+                <a:latin typeface="Courier New" panose="02070309020205020404" pitchFamily="49" charset="0"/>
+                <a:cs typeface="Courier New" panose="02070309020205020404" pitchFamily="49" charset="0"/>
+              </a:rPr>
+              <a:t>Definieer</a:t>
+            </a:r>
+            <a:r>
+              <a:rPr lang="en-US" sz="1400" dirty="0">
+                <a:solidFill>
+                  <a:schemeClr val="accent6">
+                    <a:lumMod val="75000"/>
+                  </a:schemeClr>
+                </a:solidFill>
+                <a:latin typeface="Courier New" panose="02070309020205020404" pitchFamily="49" charset="0"/>
+                <a:cs typeface="Courier New" panose="02070309020205020404" pitchFamily="49" charset="0"/>
+              </a:rPr>
+              <a:t> </a:t>
+            </a:r>
+            <a:r>
+              <a:rPr lang="en-US" sz="1400" dirty="0" err="1">
+                <a:solidFill>
+                  <a:schemeClr val="accent6">
+                    <a:lumMod val="75000"/>
+                  </a:schemeClr>
+                </a:solidFill>
+                <a:latin typeface="Courier New" panose="02070309020205020404" pitchFamily="49" charset="0"/>
+                <a:cs typeface="Courier New" panose="02070309020205020404" pitchFamily="49" charset="0"/>
+              </a:rPr>
+              <a:t>een</a:t>
+            </a:r>
+            <a:r>
+              <a:rPr lang="en-US" sz="1400" dirty="0">
+                <a:solidFill>
+                  <a:schemeClr val="accent6">
+                    <a:lumMod val="75000"/>
+                  </a:schemeClr>
+                </a:solidFill>
+                <a:latin typeface="Courier New" panose="02070309020205020404" pitchFamily="49" charset="0"/>
+                <a:cs typeface="Courier New" panose="02070309020205020404" pitchFamily="49" charset="0"/>
+              </a:rPr>
+              <a:t> end point.</a:t>
+            </a:r>
+          </a:p>
+          <a:p>
+            <a:pPr marL="0" indent="0">
+              <a:lnSpc>
+                <a:spcPct val="100000"/>
+              </a:lnSpc>
+              <a:spcBef>
+                <a:spcPts val="0"/>
+              </a:spcBef>
+              <a:spcAft>
+                <a:spcPts val="600"/>
+              </a:spcAft>
+              <a:buNone/>
+            </a:pPr>
+            <a:r>
+              <a:rPr lang="en-US" sz="1400" dirty="0">
+                <a:latin typeface="Courier New" panose="02070309020205020404" pitchFamily="49" charset="0"/>
+                <a:cs typeface="Courier New" panose="02070309020205020404" pitchFamily="49" charset="0"/>
+              </a:rPr>
+              <a:t>@app.get(</a:t>
+            </a:r>
+            <a:r>
+              <a:rPr lang="en-US" sz="1400" dirty="0">
+                <a:solidFill>
+                  <a:schemeClr val="accent2">
+                    <a:lumMod val="75000"/>
+                  </a:schemeClr>
+                </a:solidFill>
+                <a:latin typeface="Courier New" panose="02070309020205020404" pitchFamily="49" charset="0"/>
+                <a:cs typeface="Courier New" panose="02070309020205020404" pitchFamily="49" charset="0"/>
+              </a:rPr>
+              <a:t>"/"</a:t>
+            </a:r>
+            <a:r>
+              <a:rPr lang="en-US" sz="1400" dirty="0">
+                <a:latin typeface="Courier New" panose="02070309020205020404" pitchFamily="49" charset="0"/>
+                <a:cs typeface="Courier New" panose="02070309020205020404" pitchFamily="49" charset="0"/>
+              </a:rPr>
+              <a:t>)</a:t>
+            </a:r>
+          </a:p>
+          <a:p>
+            <a:pPr marL="0" indent="0">
+              <a:lnSpc>
+                <a:spcPct val="100000"/>
+              </a:lnSpc>
+              <a:spcBef>
+                <a:spcPts val="0"/>
+              </a:spcBef>
+              <a:spcAft>
+                <a:spcPts val="600"/>
+              </a:spcAft>
+              <a:buNone/>
+            </a:pPr>
+            <a:r>
+              <a:rPr lang="en-US" sz="1400" dirty="0">
+                <a:latin typeface="Courier New" panose="02070309020205020404" pitchFamily="49" charset="0"/>
+                <a:cs typeface="Courier New" panose="02070309020205020404" pitchFamily="49" charset="0"/>
+              </a:rPr>
+              <a:t>@app.get(</a:t>
+            </a:r>
+            <a:r>
+              <a:rPr lang="en-US" sz="1400" dirty="0">
+                <a:solidFill>
+                  <a:schemeClr val="accent2">
+                    <a:lumMod val="75000"/>
+                  </a:schemeClr>
+                </a:solidFill>
+                <a:latin typeface="Courier New" panose="02070309020205020404" pitchFamily="49" charset="0"/>
+                <a:cs typeface="Courier New" panose="02070309020205020404" pitchFamily="49" charset="0"/>
+              </a:rPr>
+              <a:t>"/list"</a:t>
+            </a:r>
+            <a:r>
+              <a:rPr lang="en-US" sz="1400" dirty="0">
+                <a:latin typeface="Courier New" panose="02070309020205020404" pitchFamily="49" charset="0"/>
+                <a:cs typeface="Courier New" panose="02070309020205020404" pitchFamily="49" charset="0"/>
+              </a:rPr>
+              <a:t>)</a:t>
+            </a:r>
+          </a:p>
+          <a:p>
+            <a:pPr marL="0" indent="0">
+              <a:lnSpc>
+                <a:spcPct val="100000"/>
+              </a:lnSpc>
+              <a:spcBef>
+                <a:spcPts val="0"/>
+              </a:spcBef>
+              <a:spcAft>
+                <a:spcPts val="600"/>
+              </a:spcAft>
+              <a:buNone/>
+            </a:pPr>
+            <a:r>
+              <a:rPr lang="en-US" sz="1400" dirty="0">
+                <a:solidFill>
+                  <a:srgbClr val="7030A0"/>
+                </a:solidFill>
+                <a:latin typeface="Courier New" panose="02070309020205020404" pitchFamily="49" charset="0"/>
+                <a:cs typeface="Courier New" panose="02070309020205020404" pitchFamily="49" charset="0"/>
+              </a:rPr>
+              <a:t>def </a:t>
+            </a:r>
+            <a:r>
+              <a:rPr lang="en-US" sz="1400" dirty="0" err="1">
+                <a:latin typeface="Courier New" panose="02070309020205020404" pitchFamily="49" charset="0"/>
+                <a:cs typeface="Courier New" panose="02070309020205020404" pitchFamily="49" charset="0"/>
+              </a:rPr>
+              <a:t>read_items</a:t>
+            </a:r>
+            <a:r>
+              <a:rPr lang="en-US" sz="1400" dirty="0">
+                <a:latin typeface="Courier New" panose="02070309020205020404" pitchFamily="49" charset="0"/>
+                <a:cs typeface="Courier New" panose="02070309020205020404" pitchFamily="49" charset="0"/>
+              </a:rPr>
+              <a:t>() -&gt; List[</a:t>
+            </a:r>
+            <a:r>
+              <a:rPr lang="en-US" sz="1400" dirty="0" err="1">
+                <a:latin typeface="Courier New" panose="02070309020205020404" pitchFamily="49" charset="0"/>
+                <a:cs typeface="Courier New" panose="02070309020205020404" pitchFamily="49" charset="0"/>
+              </a:rPr>
+              <a:t>ToDoItem</a:t>
+            </a:r>
+            <a:r>
+              <a:rPr lang="en-US" sz="1400" dirty="0">
+                <a:latin typeface="Courier New" panose="02070309020205020404" pitchFamily="49" charset="0"/>
+                <a:cs typeface="Courier New" panose="02070309020205020404" pitchFamily="49" charset="0"/>
+              </a:rPr>
+              <a:t>]:</a:t>
+            </a:r>
+          </a:p>
+          <a:p>
+            <a:pPr marL="0" indent="0">
+              <a:lnSpc>
+                <a:spcPct val="100000"/>
+              </a:lnSpc>
+              <a:spcBef>
+                <a:spcPts val="0"/>
+              </a:spcBef>
+              <a:spcAft>
+                <a:spcPts val="600"/>
+              </a:spcAft>
+              <a:buNone/>
+            </a:pPr>
+            <a:r>
+              <a:rPr lang="en-US" sz="1400" dirty="0">
+                <a:latin typeface="Courier New" panose="02070309020205020404" pitchFamily="49" charset="0"/>
+                <a:cs typeface="Courier New" panose="02070309020205020404" pitchFamily="49" charset="0"/>
+              </a:rPr>
+              <a:t>  </a:t>
+            </a:r>
+            <a:r>
+              <a:rPr lang="en-US" sz="1400" dirty="0">
+                <a:solidFill>
+                  <a:schemeClr val="accent2">
+                    <a:lumMod val="75000"/>
+                  </a:schemeClr>
+                </a:solidFill>
+                <a:latin typeface="Courier New" panose="02070309020205020404" pitchFamily="49" charset="0"/>
+                <a:cs typeface="Courier New" panose="02070309020205020404" pitchFamily="49" charset="0"/>
+              </a:rPr>
+              <a:t>"""Return list of to do items."""</a:t>
+            </a:r>
+            <a:endParaRPr lang="nl-NL" sz="1400" dirty="0">
+              <a:solidFill>
+                <a:schemeClr val="accent2">
+                  <a:lumMod val="75000"/>
+                </a:schemeClr>
+              </a:solidFill>
+              <a:latin typeface="Courier New" panose="02070309020205020404" pitchFamily="49" charset="0"/>
+              <a:cs typeface="Courier New" panose="02070309020205020404" pitchFamily="49" charset="0"/>
+            </a:endParaRPr>
+          </a:p>
+          <a:p>
+            <a:pPr marL="0" indent="0">
+              <a:lnSpc>
+                <a:spcPct val="100000"/>
+              </a:lnSpc>
+              <a:spcBef>
+                <a:spcPts val="0"/>
+              </a:spcBef>
+              <a:spcAft>
+                <a:spcPts val="600"/>
+              </a:spcAft>
+              <a:buNone/>
+            </a:pPr>
+            <a:endParaRPr lang="nl-NL" sz="1400" dirty="0">
+              <a:latin typeface="Courier New" panose="02070309020205020404" pitchFamily="49" charset="0"/>
+              <a:cs typeface="Courier New" panose="02070309020205020404" pitchFamily="49" charset="0"/>
+            </a:endParaRPr>
+          </a:p>
+        </p:txBody>
+      </p:sp>
+      <p:cxnSp>
+        <p:nvCxnSpPr>
+          <p:cNvPr id="6" name="Straight Connector 5">
+            <a:extLst>
+              <a:ext uri="{FF2B5EF4-FFF2-40B4-BE49-F238E27FC236}">
+                <a16:creationId xmlns:a16="http://schemas.microsoft.com/office/drawing/2014/main" id="{467D2127-3FB9-0A98-C359-95669693E885}"/>
+              </a:ext>
+            </a:extLst>
+          </p:cNvPr>
+          <p:cNvCxnSpPr/>
+          <p:nvPr/>
+        </p:nvCxnSpPr>
+        <p:spPr>
+          <a:xfrm>
+            <a:off x="6337300" y="1397000"/>
+            <a:ext cx="0" cy="4838700"/>
+          </a:xfrm>
+          <a:prstGeom prst="line">
+            <a:avLst/>
+          </a:prstGeom>
+        </p:spPr>
+        <p:style>
+          <a:lnRef idx="3">
+            <a:schemeClr val="dk1"/>
+          </a:lnRef>
+          <a:fillRef idx="0">
+            <a:schemeClr val="dk1"/>
+          </a:fillRef>
+          <a:effectRef idx="2">
+            <a:schemeClr val="dk1"/>
+          </a:effectRef>
+          <a:fontRef idx="minor">
+            <a:schemeClr val="tx1"/>
+          </a:fontRef>
+        </p:style>
+      </p:cxnSp>
+    </p:spTree>
+    <p:extLst>
+      <p:ext uri="{BB962C8B-B14F-4D97-AF65-F5344CB8AC3E}">
+        <p14:creationId xmlns:p14="http://schemas.microsoft.com/office/powerpoint/2010/main" val="1186840627"/>
+      </p:ext>
+    </p:extLst>
+  </p:cSld>
+  <p:clrMapOvr>
+    <a:masterClrMapping/>
+  </p:clrMapOvr>
+</p:sld>
+</file>
+
+<file path=ppt/slides/slide21.xml><?xml version="1.0" encoding="utf-8"?>
+<p:sld xmlns:a="http://schemas.openxmlformats.org/drawingml/2006/main" xmlns:r="http://schemas.openxmlformats.org/officeDocument/2006/relationships" xmlns:p="http://schemas.openxmlformats.org/presentationml/2006/main">
+  <p:cSld>
+    <p:spTree>
+      <p:nvGrpSpPr>
+        <p:cNvPr id="1" name="">
+          <a:extLst>
+            <a:ext uri="{FF2B5EF4-FFF2-40B4-BE49-F238E27FC236}">
+              <a16:creationId xmlns:a16="http://schemas.microsoft.com/office/drawing/2014/main" id="{7E4704DF-14A2-1CBA-6A2E-BFCA156B5874}"/>
+            </a:ext>
+          </a:extLst>
+        </p:cNvPr>
+        <p:cNvGrpSpPr/>
+        <p:nvPr/>
+      </p:nvGrpSpPr>
+      <p:grpSpPr>
+        <a:xfrm>
+          <a:off x="0" y="0"/>
+          <a:ext cx="0" cy="0"/>
+          <a:chOff x="0" y="0"/>
+          <a:chExt cx="0" cy="0"/>
+        </a:xfrm>
+      </p:grpSpPr>
+      <p:sp>
+        <p:nvSpPr>
+          <p:cNvPr id="2" name="Title 1">
+            <a:extLst>
+              <a:ext uri="{FF2B5EF4-FFF2-40B4-BE49-F238E27FC236}">
+                <a16:creationId xmlns:a16="http://schemas.microsoft.com/office/drawing/2014/main" id="{9E83FBA9-3DBE-3B27-DC48-23DC6774821F}"/>
+              </a:ext>
+            </a:extLst>
+          </p:cNvPr>
+          <p:cNvSpPr>
+            <a:spLocks noGrp="1"/>
+          </p:cNvSpPr>
+          <p:nvPr>
+            <p:ph type="title"/>
+          </p:nvPr>
+        </p:nvSpPr>
+        <p:spPr>
+          <a:xfrm>
+            <a:off x="838200" y="365126"/>
+            <a:ext cx="10515600" cy="718608"/>
+          </a:xfrm>
+        </p:spPr>
+        <p:txBody>
+          <a:bodyPr>
+            <a:normAutofit/>
+          </a:bodyPr>
+          <a:lstStyle/>
+          <a:p>
+            <a:r>
+              <a:rPr lang="nl-NL" sz="3600" dirty="0"/>
+              <a:t>Data versturen</a:t>
+            </a:r>
+            <a:endParaRPr lang="nl-NL" sz="3600" noProof="0" dirty="0"/>
+          </a:p>
+        </p:txBody>
+      </p:sp>
+      <p:sp>
+        <p:nvSpPr>
+          <p:cNvPr id="3" name="Content Placeholder 2">
+            <a:extLst>
+              <a:ext uri="{FF2B5EF4-FFF2-40B4-BE49-F238E27FC236}">
+                <a16:creationId xmlns:a16="http://schemas.microsoft.com/office/drawing/2014/main" id="{8EC05730-0ED3-A062-CA67-28ED1FF145D5}"/>
+              </a:ext>
+            </a:extLst>
+          </p:cNvPr>
+          <p:cNvSpPr>
+            <a:spLocks noGrp="1"/>
+          </p:cNvSpPr>
+          <p:nvPr>
+            <p:ph idx="1"/>
+          </p:nvPr>
+        </p:nvSpPr>
+        <p:spPr>
+          <a:xfrm>
+            <a:off x="838200" y="1456267"/>
+            <a:ext cx="5257800" cy="4720696"/>
+          </a:xfrm>
+        </p:spPr>
+        <p:txBody>
+          <a:bodyPr>
+            <a:noAutofit/>
+          </a:bodyPr>
+          <a:lstStyle/>
+          <a:p>
+            <a:pPr marL="0" indent="0">
+              <a:spcAft>
+                <a:spcPts val="600"/>
+              </a:spcAft>
+              <a:buNone/>
+            </a:pPr>
+            <a:r>
+              <a:rPr lang="nl-NL" sz="1800" dirty="0"/>
+              <a:t>Drie manieren om data mee te geven:</a:t>
+            </a:r>
+          </a:p>
+          <a:p>
+            <a:pPr marL="0" indent="0">
+              <a:spcAft>
+                <a:spcPts val="600"/>
+              </a:spcAft>
+              <a:buNone/>
+            </a:pPr>
+            <a:endParaRPr lang="nl-NL" sz="1800" dirty="0"/>
+          </a:p>
+          <a:p>
+            <a:pPr marL="0" indent="0">
+              <a:spcAft>
+                <a:spcPts val="600"/>
+              </a:spcAft>
+              <a:buNone/>
+            </a:pPr>
+            <a:r>
+              <a:rPr lang="nl-NL" sz="1800" b="1" dirty="0"/>
+              <a:t>In het pad</a:t>
+            </a:r>
+          </a:p>
+          <a:p>
+            <a:pPr marL="0" indent="0">
+              <a:spcAft>
+                <a:spcPts val="600"/>
+              </a:spcAft>
+              <a:buNone/>
+            </a:pPr>
+            <a:r>
+              <a:rPr lang="nl-NL" sz="1800" dirty="0"/>
+              <a:t>http://localhost:8080/greet/</a:t>
+            </a:r>
+            <a:r>
+              <a:rPr lang="nl-NL" sz="1800" b="1" dirty="0">
+                <a:solidFill>
+                  <a:schemeClr val="accent5">
+                    <a:lumMod val="75000"/>
+                  </a:schemeClr>
+                </a:solidFill>
+              </a:rPr>
+              <a:t>John</a:t>
+            </a:r>
+          </a:p>
+          <a:p>
+            <a:pPr marL="0" indent="0">
+              <a:spcAft>
+                <a:spcPts val="600"/>
+              </a:spcAft>
+              <a:buNone/>
+            </a:pPr>
+            <a:endParaRPr lang="nl-NL" sz="1800" dirty="0"/>
+          </a:p>
+          <a:p>
+            <a:pPr marL="0" indent="0">
+              <a:spcAft>
+                <a:spcPts val="600"/>
+              </a:spcAft>
+              <a:buNone/>
+            </a:pPr>
+            <a:r>
+              <a:rPr lang="nl-NL" sz="1800" b="1" dirty="0"/>
+              <a:t>Als query</a:t>
+            </a:r>
+          </a:p>
+          <a:p>
+            <a:pPr marL="0" indent="0">
+              <a:spcAft>
+                <a:spcPts val="600"/>
+              </a:spcAft>
+              <a:buNone/>
+            </a:pPr>
+            <a:r>
+              <a:rPr lang="nl-NL" sz="1800" dirty="0"/>
+              <a:t>http://localhost:8080/add</a:t>
+            </a:r>
+            <a:r>
+              <a:rPr lang="nl-NL" sz="1800" b="1" dirty="0">
+                <a:solidFill>
+                  <a:schemeClr val="accent5">
+                    <a:lumMod val="75000"/>
+                  </a:schemeClr>
+                </a:solidFill>
+              </a:rPr>
+              <a:t>?name=John</a:t>
+            </a:r>
+          </a:p>
+          <a:p>
+            <a:pPr marL="0" indent="0">
+              <a:spcAft>
+                <a:spcPts val="600"/>
+              </a:spcAft>
+              <a:buNone/>
+            </a:pPr>
+            <a:endParaRPr lang="nl-NL" sz="1800" b="1" dirty="0"/>
+          </a:p>
+          <a:p>
+            <a:pPr marL="0" indent="0">
+              <a:spcAft>
+                <a:spcPts val="600"/>
+              </a:spcAft>
+              <a:buNone/>
+            </a:pPr>
+            <a:r>
+              <a:rPr lang="nl-NL" sz="1800" b="1" dirty="0"/>
+              <a:t>Als body</a:t>
+            </a:r>
+          </a:p>
+          <a:p>
+            <a:pPr marL="0" indent="0">
+              <a:spcAft>
+                <a:spcPts val="600"/>
+              </a:spcAft>
+              <a:buNone/>
+            </a:pPr>
+            <a:r>
+              <a:rPr lang="nl-NL" sz="1800" dirty="0">
+                <a:solidFill>
+                  <a:schemeClr val="accent5">
+                    <a:lumMod val="75000"/>
+                  </a:schemeClr>
+                </a:solidFill>
+              </a:rPr>
+              <a:t>{"name": "John", "</a:t>
+            </a:r>
+            <a:r>
+              <a:rPr lang="nl-NL" sz="1800" dirty="0" err="1">
+                <a:solidFill>
+                  <a:schemeClr val="accent5">
+                    <a:lumMod val="75000"/>
+                  </a:schemeClr>
+                </a:solidFill>
+              </a:rPr>
+              <a:t>last_name</a:t>
+            </a:r>
+            <a:r>
+              <a:rPr lang="nl-NL" sz="1800" dirty="0">
+                <a:solidFill>
+                  <a:schemeClr val="accent5">
+                    <a:lumMod val="75000"/>
+                  </a:schemeClr>
+                </a:solidFill>
+              </a:rPr>
+              <a:t>": "Doe"}</a:t>
+            </a:r>
+          </a:p>
+        </p:txBody>
+      </p:sp>
+      <p:sp>
+        <p:nvSpPr>
+          <p:cNvPr id="4" name="Content Placeholder 2">
+            <a:extLst>
+              <a:ext uri="{FF2B5EF4-FFF2-40B4-BE49-F238E27FC236}">
+                <a16:creationId xmlns:a16="http://schemas.microsoft.com/office/drawing/2014/main" id="{D6700521-F1A6-525E-440F-914DE872C7C0}"/>
+              </a:ext>
+            </a:extLst>
+          </p:cNvPr>
+          <p:cNvSpPr txBox="1">
+            <a:spLocks/>
+          </p:cNvSpPr>
+          <p:nvPr/>
+        </p:nvSpPr>
+        <p:spPr>
+          <a:xfrm>
+            <a:off x="6750050" y="1456267"/>
+            <a:ext cx="4603750" cy="4720696"/>
+          </a:xfrm>
+          <a:prstGeom prst="rect">
+            <a:avLst/>
+          </a:prstGeom>
+        </p:spPr>
+        <p:txBody>
+          <a:bodyPr vert="horz" lIns="91440" tIns="45720" rIns="91440" bIns="45720" rtlCol="0">
+            <a:normAutofit lnSpcReduction="10000"/>
+          </a:bodyPr>
+          <a:lstStyle>
+            <a:lvl1pPr marL="228600" indent="-228600" algn="l" defTabSz="914400" rtl="0" eaLnBrk="1" latinLnBrk="0" hangingPunct="1">
+              <a:lnSpc>
+                <a:spcPct val="90000"/>
+              </a:lnSpc>
+              <a:spcBef>
+                <a:spcPts val="1000"/>
+              </a:spcBef>
+              <a:buFont typeface="Arial" panose="020B0604020202020204" pitchFamily="34" charset="0"/>
+              <a:buChar char="•"/>
+              <a:defRPr sz="2800" kern="1200">
+                <a:solidFill>
+                  <a:schemeClr val="tx1"/>
+                </a:solidFill>
+                <a:latin typeface="+mn-lt"/>
+                <a:ea typeface="+mn-ea"/>
+                <a:cs typeface="+mn-cs"/>
+              </a:defRPr>
+            </a:lvl1pPr>
+            <a:lvl2pPr marL="685800" indent="-228600" algn="l" defTabSz="914400" rtl="0" eaLnBrk="1" latinLnBrk="0" hangingPunct="1">
+              <a:lnSpc>
+                <a:spcPct val="90000"/>
+              </a:lnSpc>
+              <a:spcBef>
+                <a:spcPts val="500"/>
+              </a:spcBef>
+              <a:buFont typeface="Arial" panose="020B0604020202020204" pitchFamily="34" charset="0"/>
+              <a:buChar char="•"/>
+              <a:defRPr sz="2400" kern="1200">
+                <a:solidFill>
+                  <a:schemeClr val="tx1"/>
+                </a:solidFill>
+                <a:latin typeface="+mn-lt"/>
+                <a:ea typeface="+mn-ea"/>
+                <a:cs typeface="+mn-cs"/>
+              </a:defRPr>
+            </a:lvl2pPr>
+            <a:lvl3pPr marL="1143000" indent="-228600" algn="l" defTabSz="914400" rtl="0" eaLnBrk="1" latinLnBrk="0" hangingPunct="1">
+              <a:lnSpc>
+                <a:spcPct val="90000"/>
+              </a:lnSpc>
+              <a:spcBef>
+                <a:spcPts val="500"/>
+              </a:spcBef>
+              <a:buFont typeface="Arial" panose="020B0604020202020204" pitchFamily="34" charset="0"/>
+              <a:buChar char="•"/>
+              <a:defRPr sz="2000" kern="1200">
+                <a:solidFill>
+                  <a:schemeClr val="tx1"/>
+                </a:solidFill>
+                <a:latin typeface="+mn-lt"/>
+                <a:ea typeface="+mn-ea"/>
+                <a:cs typeface="+mn-cs"/>
+              </a:defRPr>
+            </a:lvl3pPr>
+            <a:lvl4pPr marL="1600200" indent="-228600" algn="l" defTabSz="914400" rtl="0" eaLnBrk="1" latinLnBrk="0" hangingPunct="1">
+              <a:lnSpc>
+                <a:spcPct val="90000"/>
+              </a:lnSpc>
+              <a:spcBef>
+                <a:spcPts val="500"/>
+              </a:spcBef>
+              <a:buFont typeface="Arial" panose="020B0604020202020204" pitchFamily="34" charset="0"/>
+              <a:buChar char="•"/>
+              <a:defRPr sz="1800" kern="1200">
+                <a:solidFill>
+                  <a:schemeClr val="tx1"/>
+                </a:solidFill>
+                <a:latin typeface="+mn-lt"/>
+                <a:ea typeface="+mn-ea"/>
+                <a:cs typeface="+mn-cs"/>
+              </a:defRPr>
+            </a:lvl4pPr>
+            <a:lvl5pPr marL="2057400" indent="-228600" algn="l" defTabSz="914400" rtl="0" eaLnBrk="1" latinLnBrk="0" hangingPunct="1">
+              <a:lnSpc>
+                <a:spcPct val="90000"/>
+              </a:lnSpc>
+              <a:spcBef>
+                <a:spcPts val="500"/>
+              </a:spcBef>
+              <a:buFont typeface="Arial" panose="020B0604020202020204" pitchFamily="34" charset="0"/>
+              <a:buChar char="•"/>
+              <a:defRPr sz="1800" kern="1200">
+                <a:solidFill>
+                  <a:schemeClr val="tx1"/>
+                </a:solidFill>
+                <a:latin typeface="+mn-lt"/>
+                <a:ea typeface="+mn-ea"/>
+                <a:cs typeface="+mn-cs"/>
+              </a:defRPr>
+            </a:lvl5pPr>
+            <a:lvl6pPr marL="2514600" indent="-228600" algn="l" defTabSz="914400" rtl="0" eaLnBrk="1" latinLnBrk="0" hangingPunct="1">
+              <a:lnSpc>
+                <a:spcPct val="90000"/>
+              </a:lnSpc>
+              <a:spcBef>
+                <a:spcPts val="500"/>
+              </a:spcBef>
+              <a:buFont typeface="Arial" panose="020B0604020202020204" pitchFamily="34" charset="0"/>
+              <a:buChar char="•"/>
+              <a:defRPr sz="1800" kern="1200">
+                <a:solidFill>
+                  <a:schemeClr val="tx1"/>
+                </a:solidFill>
+                <a:latin typeface="+mn-lt"/>
+                <a:ea typeface="+mn-ea"/>
+                <a:cs typeface="+mn-cs"/>
+              </a:defRPr>
+            </a:lvl6pPr>
+            <a:lvl7pPr marL="2971800" indent="-228600" algn="l" defTabSz="914400" rtl="0" eaLnBrk="1" latinLnBrk="0" hangingPunct="1">
+              <a:lnSpc>
+                <a:spcPct val="90000"/>
+              </a:lnSpc>
+              <a:spcBef>
+                <a:spcPts val="500"/>
+              </a:spcBef>
+              <a:buFont typeface="Arial" panose="020B0604020202020204" pitchFamily="34" charset="0"/>
+              <a:buChar char="•"/>
+              <a:defRPr sz="1800" kern="1200">
+                <a:solidFill>
+                  <a:schemeClr val="tx1"/>
+                </a:solidFill>
+                <a:latin typeface="+mn-lt"/>
+                <a:ea typeface="+mn-ea"/>
+                <a:cs typeface="+mn-cs"/>
+              </a:defRPr>
+            </a:lvl7pPr>
+            <a:lvl8pPr marL="3429000" indent="-228600" algn="l" defTabSz="914400" rtl="0" eaLnBrk="1" latinLnBrk="0" hangingPunct="1">
+              <a:lnSpc>
+                <a:spcPct val="90000"/>
+              </a:lnSpc>
+              <a:spcBef>
+                <a:spcPts val="500"/>
+              </a:spcBef>
+              <a:buFont typeface="Arial" panose="020B0604020202020204" pitchFamily="34" charset="0"/>
+              <a:buChar char="•"/>
+              <a:defRPr sz="1800" kern="1200">
+                <a:solidFill>
+                  <a:schemeClr val="tx1"/>
+                </a:solidFill>
+                <a:latin typeface="+mn-lt"/>
+                <a:ea typeface="+mn-ea"/>
+                <a:cs typeface="+mn-cs"/>
+              </a:defRPr>
+            </a:lvl8pPr>
+            <a:lvl9pPr marL="3886200" indent="-228600" algn="l" defTabSz="914400" rtl="0" eaLnBrk="1" latinLnBrk="0" hangingPunct="1">
+              <a:lnSpc>
+                <a:spcPct val="90000"/>
+              </a:lnSpc>
+              <a:spcBef>
+                <a:spcPts val="500"/>
+              </a:spcBef>
+              <a:buFont typeface="Arial" panose="020B0604020202020204" pitchFamily="34" charset="0"/>
+              <a:buChar char="•"/>
+              <a:defRPr sz="1800" kern="1200">
+                <a:solidFill>
+                  <a:schemeClr val="tx1"/>
+                </a:solidFill>
+                <a:latin typeface="+mn-lt"/>
+                <a:ea typeface="+mn-ea"/>
+                <a:cs typeface="+mn-cs"/>
+              </a:defRPr>
+            </a:lvl9pPr>
+          </a:lstStyle>
+          <a:p>
+            <a:pPr marL="0" indent="0">
+              <a:lnSpc>
+                <a:spcPct val="100000"/>
+              </a:lnSpc>
+              <a:spcBef>
+                <a:spcPts val="0"/>
+              </a:spcBef>
+              <a:spcAft>
+                <a:spcPts val="600"/>
+              </a:spcAft>
+              <a:buNone/>
+            </a:pPr>
+            <a:r>
+              <a:rPr lang="en-US" sz="1400" dirty="0">
+                <a:solidFill>
+                  <a:schemeClr val="accent6">
+                    <a:lumMod val="75000"/>
+                  </a:schemeClr>
+                </a:solidFill>
+                <a:latin typeface="Courier New" panose="02070309020205020404" pitchFamily="49" charset="0"/>
+                <a:cs typeface="Courier New" panose="02070309020205020404" pitchFamily="49" charset="0"/>
+              </a:rPr>
+              <a:t># Parameter in path.</a:t>
+            </a:r>
+          </a:p>
+          <a:p>
+            <a:pPr marL="0" indent="0">
+              <a:lnSpc>
+                <a:spcPct val="100000"/>
+              </a:lnSpc>
+              <a:spcBef>
+                <a:spcPts val="0"/>
+              </a:spcBef>
+              <a:spcAft>
+                <a:spcPts val="600"/>
+              </a:spcAft>
+              <a:buNone/>
+            </a:pPr>
+            <a:r>
+              <a:rPr lang="en-US" sz="1400" dirty="0">
+                <a:latin typeface="Courier New" panose="02070309020205020404" pitchFamily="49" charset="0"/>
+                <a:cs typeface="Courier New" panose="02070309020205020404" pitchFamily="49" charset="0"/>
+              </a:rPr>
+              <a:t>@app.</a:t>
+            </a:r>
+            <a:r>
+              <a:rPr lang="en-US" sz="1400" b="1" dirty="0">
+                <a:latin typeface="Courier New" panose="02070309020205020404" pitchFamily="49" charset="0"/>
+                <a:cs typeface="Courier New" panose="02070309020205020404" pitchFamily="49" charset="0"/>
+              </a:rPr>
+              <a:t>get</a:t>
+            </a:r>
+            <a:r>
+              <a:rPr lang="en-US" sz="1400" dirty="0">
+                <a:latin typeface="Courier New" panose="02070309020205020404" pitchFamily="49" charset="0"/>
+                <a:cs typeface="Courier New" panose="02070309020205020404" pitchFamily="49" charset="0"/>
+              </a:rPr>
+              <a:t>(</a:t>
+            </a:r>
+            <a:r>
+              <a:rPr lang="en-US" sz="1400" dirty="0">
+                <a:solidFill>
+                  <a:schemeClr val="accent2">
+                    <a:lumMod val="75000"/>
+                  </a:schemeClr>
+                </a:solidFill>
+                <a:latin typeface="Courier New" panose="02070309020205020404" pitchFamily="49" charset="0"/>
+                <a:cs typeface="Courier New" panose="02070309020205020404" pitchFamily="49" charset="0"/>
+              </a:rPr>
+              <a:t>"/greet/</a:t>
+            </a:r>
+            <a:r>
+              <a:rPr lang="en-US" sz="1400" dirty="0">
+                <a:solidFill>
+                  <a:schemeClr val="accent5">
+                    <a:lumMod val="75000"/>
+                  </a:schemeClr>
+                </a:solidFill>
+                <a:latin typeface="Courier New" panose="02070309020205020404" pitchFamily="49" charset="0"/>
+                <a:cs typeface="Courier New" panose="02070309020205020404" pitchFamily="49" charset="0"/>
+              </a:rPr>
+              <a:t>{name}</a:t>
+            </a:r>
+            <a:r>
+              <a:rPr lang="en-US" sz="1400" dirty="0">
+                <a:solidFill>
+                  <a:schemeClr val="accent2">
+                    <a:lumMod val="75000"/>
+                  </a:schemeClr>
+                </a:solidFill>
+                <a:latin typeface="Courier New" panose="02070309020205020404" pitchFamily="49" charset="0"/>
+                <a:cs typeface="Courier New" panose="02070309020205020404" pitchFamily="49" charset="0"/>
+              </a:rPr>
+              <a:t>"</a:t>
+            </a:r>
+            <a:r>
+              <a:rPr lang="en-US" sz="1400" dirty="0">
+                <a:latin typeface="Courier New" panose="02070309020205020404" pitchFamily="49" charset="0"/>
+                <a:cs typeface="Courier New" panose="02070309020205020404" pitchFamily="49" charset="0"/>
+              </a:rPr>
+              <a:t>)</a:t>
+            </a:r>
+          </a:p>
+          <a:p>
+            <a:pPr marL="0" indent="0">
+              <a:lnSpc>
+                <a:spcPct val="100000"/>
+              </a:lnSpc>
+              <a:spcBef>
+                <a:spcPts val="0"/>
+              </a:spcBef>
+              <a:spcAft>
+                <a:spcPts val="600"/>
+              </a:spcAft>
+              <a:buNone/>
+            </a:pPr>
+            <a:r>
+              <a:rPr lang="en-US" sz="1400" dirty="0">
+                <a:solidFill>
+                  <a:srgbClr val="7030A0"/>
+                </a:solidFill>
+                <a:latin typeface="Courier New" panose="02070309020205020404" pitchFamily="49" charset="0"/>
+                <a:cs typeface="Courier New" panose="02070309020205020404" pitchFamily="49" charset="0"/>
+              </a:rPr>
+              <a:t>def </a:t>
+            </a:r>
+            <a:r>
+              <a:rPr lang="en-US" sz="1400" dirty="0">
+                <a:latin typeface="Courier New" panose="02070309020205020404" pitchFamily="49" charset="0"/>
+                <a:cs typeface="Courier New" panose="02070309020205020404" pitchFamily="49" charset="0"/>
+              </a:rPr>
+              <a:t>greet(name: str):</a:t>
+            </a:r>
+          </a:p>
+          <a:p>
+            <a:pPr marL="0" indent="0">
+              <a:lnSpc>
+                <a:spcPct val="100000"/>
+              </a:lnSpc>
+              <a:spcBef>
+                <a:spcPts val="0"/>
+              </a:spcBef>
+              <a:spcAft>
+                <a:spcPts val="600"/>
+              </a:spcAft>
+              <a:buNone/>
+            </a:pPr>
+            <a:r>
+              <a:rPr lang="nl-NL" sz="1400" dirty="0">
+                <a:latin typeface="Courier New" panose="02070309020205020404" pitchFamily="49" charset="0"/>
+                <a:cs typeface="Courier New" panose="02070309020205020404" pitchFamily="49" charset="0"/>
+              </a:rPr>
+              <a:t>  ...</a:t>
+            </a:r>
+          </a:p>
+          <a:p>
+            <a:pPr marL="0" indent="0">
+              <a:lnSpc>
+                <a:spcPct val="100000"/>
+              </a:lnSpc>
+              <a:spcBef>
+                <a:spcPts val="0"/>
+              </a:spcBef>
+              <a:spcAft>
+                <a:spcPts val="600"/>
+              </a:spcAft>
+              <a:buNone/>
+            </a:pPr>
+            <a:endParaRPr lang="nl-NL" sz="1400" dirty="0">
+              <a:latin typeface="Courier New" panose="02070309020205020404" pitchFamily="49" charset="0"/>
+              <a:cs typeface="Courier New" panose="02070309020205020404" pitchFamily="49" charset="0"/>
+            </a:endParaRPr>
+          </a:p>
+          <a:p>
+            <a:pPr marL="0" indent="0">
+              <a:lnSpc>
+                <a:spcPct val="100000"/>
+              </a:lnSpc>
+              <a:spcBef>
+                <a:spcPts val="0"/>
+              </a:spcBef>
+              <a:spcAft>
+                <a:spcPts val="600"/>
+              </a:spcAft>
+              <a:buNone/>
+            </a:pPr>
+            <a:endParaRPr lang="nl-NL" sz="1400" dirty="0">
+              <a:latin typeface="Courier New" panose="02070309020205020404" pitchFamily="49" charset="0"/>
+              <a:cs typeface="Courier New" panose="02070309020205020404" pitchFamily="49" charset="0"/>
+            </a:endParaRPr>
+          </a:p>
+          <a:p>
+            <a:pPr marL="0" indent="0">
+              <a:lnSpc>
+                <a:spcPct val="100000"/>
+              </a:lnSpc>
+              <a:spcBef>
+                <a:spcPts val="0"/>
+              </a:spcBef>
+              <a:spcAft>
+                <a:spcPts val="600"/>
+              </a:spcAft>
+              <a:buNone/>
+            </a:pPr>
+            <a:r>
+              <a:rPr lang="en-US" sz="1400" dirty="0">
+                <a:solidFill>
+                  <a:schemeClr val="accent6">
+                    <a:lumMod val="75000"/>
+                  </a:schemeClr>
+                </a:solidFill>
+                <a:latin typeface="Courier New" panose="02070309020205020404" pitchFamily="49" charset="0"/>
+                <a:cs typeface="Courier New" panose="02070309020205020404" pitchFamily="49" charset="0"/>
+              </a:rPr>
+              <a:t># Parameter as query.</a:t>
+            </a:r>
+          </a:p>
+          <a:p>
+            <a:pPr marL="0" indent="0">
+              <a:lnSpc>
+                <a:spcPct val="100000"/>
+              </a:lnSpc>
+              <a:spcBef>
+                <a:spcPts val="0"/>
+              </a:spcBef>
+              <a:spcAft>
+                <a:spcPts val="600"/>
+              </a:spcAft>
+              <a:buNone/>
+            </a:pPr>
+            <a:r>
+              <a:rPr lang="en-US" sz="1400" dirty="0">
+                <a:latin typeface="Courier New" panose="02070309020205020404" pitchFamily="49" charset="0"/>
+                <a:cs typeface="Courier New" panose="02070309020205020404" pitchFamily="49" charset="0"/>
+              </a:rPr>
+              <a:t>@app.</a:t>
+            </a:r>
+            <a:r>
+              <a:rPr lang="en-US" sz="1400" b="1" dirty="0">
+                <a:latin typeface="Courier New" panose="02070309020205020404" pitchFamily="49" charset="0"/>
+                <a:cs typeface="Courier New" panose="02070309020205020404" pitchFamily="49" charset="0"/>
+              </a:rPr>
+              <a:t>get</a:t>
+            </a:r>
+            <a:r>
+              <a:rPr lang="en-US" sz="1400" dirty="0">
+                <a:latin typeface="Courier New" panose="02070309020205020404" pitchFamily="49" charset="0"/>
+                <a:cs typeface="Courier New" panose="02070309020205020404" pitchFamily="49" charset="0"/>
+              </a:rPr>
+              <a:t>(</a:t>
+            </a:r>
+            <a:r>
+              <a:rPr lang="en-US" sz="1400" dirty="0">
+                <a:solidFill>
+                  <a:schemeClr val="accent2">
+                    <a:lumMod val="75000"/>
+                  </a:schemeClr>
+                </a:solidFill>
+                <a:latin typeface="Courier New" panose="02070309020205020404" pitchFamily="49" charset="0"/>
+                <a:cs typeface="Courier New" panose="02070309020205020404" pitchFamily="49" charset="0"/>
+              </a:rPr>
+              <a:t>"/greet"</a:t>
+            </a:r>
+            <a:r>
+              <a:rPr lang="en-US" sz="1400" dirty="0">
+                <a:latin typeface="Courier New" panose="02070309020205020404" pitchFamily="49" charset="0"/>
+                <a:cs typeface="Courier New" panose="02070309020205020404" pitchFamily="49" charset="0"/>
+              </a:rPr>
+              <a:t>)</a:t>
+            </a:r>
+          </a:p>
+          <a:p>
+            <a:pPr marL="0" indent="0">
+              <a:lnSpc>
+                <a:spcPct val="100000"/>
+              </a:lnSpc>
+              <a:spcBef>
+                <a:spcPts val="0"/>
+              </a:spcBef>
+              <a:spcAft>
+                <a:spcPts val="600"/>
+              </a:spcAft>
+              <a:buNone/>
+            </a:pPr>
+            <a:r>
+              <a:rPr lang="en-US" sz="1400" dirty="0">
+                <a:solidFill>
+                  <a:srgbClr val="7030A0"/>
+                </a:solidFill>
+                <a:latin typeface="Courier New" panose="02070309020205020404" pitchFamily="49" charset="0"/>
+                <a:cs typeface="Courier New" panose="02070309020205020404" pitchFamily="49" charset="0"/>
+              </a:rPr>
+              <a:t>def </a:t>
+            </a:r>
+            <a:r>
+              <a:rPr lang="en-US" sz="1400" dirty="0">
+                <a:latin typeface="Courier New" panose="02070309020205020404" pitchFamily="49" charset="0"/>
+                <a:cs typeface="Courier New" panose="02070309020205020404" pitchFamily="49" charset="0"/>
+              </a:rPr>
+              <a:t>greet(name: str):</a:t>
+            </a:r>
+          </a:p>
+          <a:p>
+            <a:pPr marL="0" indent="0">
+              <a:lnSpc>
+                <a:spcPct val="100000"/>
+              </a:lnSpc>
+              <a:spcBef>
+                <a:spcPts val="0"/>
+              </a:spcBef>
+              <a:spcAft>
+                <a:spcPts val="600"/>
+              </a:spcAft>
+              <a:buNone/>
+            </a:pPr>
+            <a:r>
+              <a:rPr lang="nl-NL" sz="1400" dirty="0">
+                <a:latin typeface="Courier New" panose="02070309020205020404" pitchFamily="49" charset="0"/>
+                <a:cs typeface="Courier New" panose="02070309020205020404" pitchFamily="49" charset="0"/>
+              </a:rPr>
+              <a:t>  ...</a:t>
+            </a:r>
+          </a:p>
+          <a:p>
+            <a:pPr marL="0" indent="0">
+              <a:lnSpc>
+                <a:spcPct val="100000"/>
+              </a:lnSpc>
+              <a:spcBef>
+                <a:spcPts val="0"/>
+              </a:spcBef>
+              <a:spcAft>
+                <a:spcPts val="600"/>
+              </a:spcAft>
+              <a:buNone/>
+            </a:pPr>
+            <a:endParaRPr lang="nl-NL" sz="1400" dirty="0">
+              <a:latin typeface="Courier New" panose="02070309020205020404" pitchFamily="49" charset="0"/>
+              <a:cs typeface="Courier New" panose="02070309020205020404" pitchFamily="49" charset="0"/>
+            </a:endParaRPr>
+          </a:p>
+          <a:p>
+            <a:pPr marL="0" indent="0">
+              <a:lnSpc>
+                <a:spcPct val="100000"/>
+              </a:lnSpc>
+              <a:spcBef>
+                <a:spcPts val="0"/>
+              </a:spcBef>
+              <a:spcAft>
+                <a:spcPts val="600"/>
+              </a:spcAft>
+              <a:buNone/>
+            </a:pPr>
+            <a:endParaRPr lang="en-US" sz="1400" dirty="0">
+              <a:solidFill>
+                <a:schemeClr val="accent6">
+                  <a:lumMod val="75000"/>
+                </a:schemeClr>
+              </a:solidFill>
+              <a:latin typeface="Courier New" panose="02070309020205020404" pitchFamily="49" charset="0"/>
+              <a:cs typeface="Courier New" panose="02070309020205020404" pitchFamily="49" charset="0"/>
+            </a:endParaRPr>
+          </a:p>
+          <a:p>
+            <a:pPr marL="0" indent="0">
+              <a:lnSpc>
+                <a:spcPct val="100000"/>
+              </a:lnSpc>
+              <a:spcBef>
+                <a:spcPts val="0"/>
+              </a:spcBef>
+              <a:spcAft>
+                <a:spcPts val="600"/>
+              </a:spcAft>
+              <a:buNone/>
+            </a:pPr>
+            <a:r>
+              <a:rPr lang="en-US" sz="1400" dirty="0">
+                <a:solidFill>
+                  <a:schemeClr val="accent6">
+                    <a:lumMod val="75000"/>
+                  </a:schemeClr>
+                </a:solidFill>
+                <a:latin typeface="Courier New" panose="02070309020205020404" pitchFamily="49" charset="0"/>
+                <a:cs typeface="Courier New" panose="02070309020205020404" pitchFamily="49" charset="0"/>
+              </a:rPr>
+              <a:t># Parameter in body.</a:t>
+            </a:r>
+          </a:p>
+          <a:p>
+            <a:pPr marL="0" indent="0">
+              <a:lnSpc>
+                <a:spcPct val="100000"/>
+              </a:lnSpc>
+              <a:spcBef>
+                <a:spcPts val="0"/>
+              </a:spcBef>
+              <a:spcAft>
+                <a:spcPts val="600"/>
+              </a:spcAft>
+              <a:buNone/>
+            </a:pPr>
+            <a:r>
+              <a:rPr lang="en-US" sz="1400" dirty="0">
+                <a:latin typeface="Courier New" panose="02070309020205020404" pitchFamily="49" charset="0"/>
+                <a:cs typeface="Courier New" panose="02070309020205020404" pitchFamily="49" charset="0"/>
+              </a:rPr>
+              <a:t>@app.</a:t>
+            </a:r>
+            <a:r>
+              <a:rPr lang="en-US" sz="1400" b="1" dirty="0">
+                <a:latin typeface="Courier New" panose="02070309020205020404" pitchFamily="49" charset="0"/>
+                <a:cs typeface="Courier New" panose="02070309020205020404" pitchFamily="49" charset="0"/>
+              </a:rPr>
+              <a:t>post</a:t>
+            </a:r>
+            <a:r>
+              <a:rPr lang="en-US" sz="1400" dirty="0">
+                <a:latin typeface="Courier New" panose="02070309020205020404" pitchFamily="49" charset="0"/>
+                <a:cs typeface="Courier New" panose="02070309020205020404" pitchFamily="49" charset="0"/>
+              </a:rPr>
+              <a:t>(</a:t>
+            </a:r>
+            <a:r>
+              <a:rPr lang="en-US" sz="1400" dirty="0">
+                <a:solidFill>
+                  <a:schemeClr val="accent2">
+                    <a:lumMod val="75000"/>
+                  </a:schemeClr>
+                </a:solidFill>
+                <a:latin typeface="Courier New" panose="02070309020205020404" pitchFamily="49" charset="0"/>
+                <a:cs typeface="Courier New" panose="02070309020205020404" pitchFamily="49" charset="0"/>
+              </a:rPr>
+              <a:t>"/add"</a:t>
+            </a:r>
+            <a:r>
+              <a:rPr lang="en-US" sz="1400" dirty="0">
+                <a:latin typeface="Courier New" panose="02070309020205020404" pitchFamily="49" charset="0"/>
+                <a:cs typeface="Courier New" panose="02070309020205020404" pitchFamily="49" charset="0"/>
+              </a:rPr>
+              <a:t>)</a:t>
+            </a:r>
+          </a:p>
+          <a:p>
+            <a:pPr marL="0" indent="0">
+              <a:lnSpc>
+                <a:spcPct val="100000"/>
+              </a:lnSpc>
+              <a:spcBef>
+                <a:spcPts val="0"/>
+              </a:spcBef>
+              <a:spcAft>
+                <a:spcPts val="600"/>
+              </a:spcAft>
+              <a:buNone/>
+            </a:pPr>
+            <a:r>
+              <a:rPr lang="en-US" sz="1400" dirty="0">
+                <a:solidFill>
+                  <a:srgbClr val="7030A0"/>
+                </a:solidFill>
+                <a:latin typeface="Courier New" panose="02070309020205020404" pitchFamily="49" charset="0"/>
+                <a:cs typeface="Courier New" panose="02070309020205020404" pitchFamily="49" charset="0"/>
+              </a:rPr>
+              <a:t>def </a:t>
+            </a:r>
+            <a:r>
+              <a:rPr lang="en-US" sz="1400" dirty="0" err="1">
+                <a:latin typeface="Courier New" panose="02070309020205020404" pitchFamily="49" charset="0"/>
+                <a:cs typeface="Courier New" panose="02070309020205020404" pitchFamily="49" charset="0"/>
+              </a:rPr>
+              <a:t>add_user</a:t>
+            </a:r>
+            <a:r>
+              <a:rPr lang="en-US" sz="1400" dirty="0">
+                <a:latin typeface="Courier New" panose="02070309020205020404" pitchFamily="49" charset="0"/>
+                <a:cs typeface="Courier New" panose="02070309020205020404" pitchFamily="49" charset="0"/>
+              </a:rPr>
+              <a:t>(user: User):</a:t>
+            </a:r>
+          </a:p>
+          <a:p>
+            <a:pPr marL="0" indent="0">
+              <a:lnSpc>
+                <a:spcPct val="100000"/>
+              </a:lnSpc>
+              <a:spcBef>
+                <a:spcPts val="0"/>
+              </a:spcBef>
+              <a:spcAft>
+                <a:spcPts val="600"/>
+              </a:spcAft>
+              <a:buNone/>
+            </a:pPr>
+            <a:r>
+              <a:rPr lang="en-US" sz="1400" dirty="0">
+                <a:latin typeface="Courier New" panose="02070309020205020404" pitchFamily="49" charset="0"/>
+                <a:cs typeface="Courier New" panose="02070309020205020404" pitchFamily="49" charset="0"/>
+              </a:rPr>
+              <a:t>  ...</a:t>
+            </a:r>
+            <a:endParaRPr lang="nl-NL" sz="1400" dirty="0">
+              <a:solidFill>
+                <a:schemeClr val="accent2">
+                  <a:lumMod val="75000"/>
+                </a:schemeClr>
+              </a:solidFill>
+              <a:latin typeface="Courier New" panose="02070309020205020404" pitchFamily="49" charset="0"/>
+              <a:cs typeface="Courier New" panose="02070309020205020404" pitchFamily="49" charset="0"/>
+            </a:endParaRPr>
+          </a:p>
+          <a:p>
+            <a:pPr marL="0" indent="0">
+              <a:lnSpc>
+                <a:spcPct val="100000"/>
+              </a:lnSpc>
+              <a:spcBef>
+                <a:spcPts val="0"/>
+              </a:spcBef>
+              <a:spcAft>
+                <a:spcPts val="600"/>
+              </a:spcAft>
+              <a:buNone/>
+            </a:pPr>
+            <a:endParaRPr lang="nl-NL" sz="1400" dirty="0">
+              <a:latin typeface="Courier New" panose="02070309020205020404" pitchFamily="49" charset="0"/>
+              <a:cs typeface="Courier New" panose="02070309020205020404" pitchFamily="49" charset="0"/>
+            </a:endParaRPr>
+          </a:p>
+        </p:txBody>
+      </p:sp>
+      <p:cxnSp>
+        <p:nvCxnSpPr>
+          <p:cNvPr id="6" name="Straight Connector 5">
+            <a:extLst>
+              <a:ext uri="{FF2B5EF4-FFF2-40B4-BE49-F238E27FC236}">
+                <a16:creationId xmlns:a16="http://schemas.microsoft.com/office/drawing/2014/main" id="{18BD9816-B16F-1218-E320-9C06838524DB}"/>
+              </a:ext>
+            </a:extLst>
+          </p:cNvPr>
+          <p:cNvCxnSpPr/>
+          <p:nvPr/>
+        </p:nvCxnSpPr>
+        <p:spPr>
+          <a:xfrm>
+            <a:off x="6337300" y="1397000"/>
+            <a:ext cx="0" cy="4838700"/>
+          </a:xfrm>
+          <a:prstGeom prst="line">
+            <a:avLst/>
+          </a:prstGeom>
+        </p:spPr>
+        <p:style>
+          <a:lnRef idx="3">
+            <a:schemeClr val="dk1"/>
+          </a:lnRef>
+          <a:fillRef idx="0">
+            <a:schemeClr val="dk1"/>
+          </a:fillRef>
+          <a:effectRef idx="2">
+            <a:schemeClr val="dk1"/>
+          </a:effectRef>
+          <a:fontRef idx="minor">
+            <a:schemeClr val="tx1"/>
+          </a:fontRef>
+        </p:style>
+      </p:cxnSp>
+    </p:spTree>
+    <p:extLst>
+      <p:ext uri="{BB962C8B-B14F-4D97-AF65-F5344CB8AC3E}">
+        <p14:creationId xmlns:p14="http://schemas.microsoft.com/office/powerpoint/2010/main" val="3722525393"/>
+      </p:ext>
+    </p:extLst>
+  </p:cSld>
+  <p:clrMapOvr>
+    <a:masterClrMapping/>
+  </p:clrMapOvr>
+</p:sld>
+</file>
+
+<file path=ppt/slides/slide22.xml><?xml version="1.0" encoding="utf-8"?>
+<p:sld xmlns:a="http://schemas.openxmlformats.org/drawingml/2006/main" xmlns:r="http://schemas.openxmlformats.org/officeDocument/2006/relationships" xmlns:p="http://schemas.openxmlformats.org/presentationml/2006/main">
+  <p:cSld>
+    <p:spTree>
+      <p:nvGrpSpPr>
+        <p:cNvPr id="1" name="">
+          <a:extLst>
+            <a:ext uri="{FF2B5EF4-FFF2-40B4-BE49-F238E27FC236}">
+              <a16:creationId xmlns:a16="http://schemas.microsoft.com/office/drawing/2014/main" id="{250C3FBE-067F-1A0C-41D4-B6713A9B3FCA}"/>
+            </a:ext>
+          </a:extLst>
+        </p:cNvPr>
+        <p:cNvGrpSpPr/>
+        <p:nvPr/>
+      </p:nvGrpSpPr>
+      <p:grpSpPr>
+        <a:xfrm>
+          <a:off x="0" y="0"/>
+          <a:ext cx="0" cy="0"/>
+          <a:chOff x="0" y="0"/>
+          <a:chExt cx="0" cy="0"/>
+        </a:xfrm>
+      </p:grpSpPr>
+      <p:sp>
+        <p:nvSpPr>
+          <p:cNvPr id="2" name="Title 1">
+            <a:extLst>
+              <a:ext uri="{FF2B5EF4-FFF2-40B4-BE49-F238E27FC236}">
+                <a16:creationId xmlns:a16="http://schemas.microsoft.com/office/drawing/2014/main" id="{0E5AD1FE-1192-D87C-68B1-6AA5BA816B84}"/>
+              </a:ext>
+            </a:extLst>
+          </p:cNvPr>
+          <p:cNvSpPr>
+            <a:spLocks noGrp="1"/>
+          </p:cNvSpPr>
+          <p:nvPr>
+            <p:ph type="title"/>
+          </p:nvPr>
+        </p:nvSpPr>
+        <p:spPr>
+          <a:xfrm>
+            <a:off x="838200" y="365126"/>
+            <a:ext cx="10515600" cy="718608"/>
+          </a:xfrm>
+        </p:spPr>
+        <p:txBody>
+          <a:bodyPr>
+            <a:normAutofit/>
+          </a:bodyPr>
+          <a:lstStyle/>
+          <a:p>
+            <a:r>
+              <a:rPr lang="nl-NL" sz="3600" noProof="0" dirty="0"/>
+              <a:t>Oefeningen 2</a:t>
+            </a:r>
+          </a:p>
+        </p:txBody>
+      </p:sp>
+      <p:sp>
+        <p:nvSpPr>
+          <p:cNvPr id="3" name="Content Placeholder 2">
+            <a:extLst>
+              <a:ext uri="{FF2B5EF4-FFF2-40B4-BE49-F238E27FC236}">
+                <a16:creationId xmlns:a16="http://schemas.microsoft.com/office/drawing/2014/main" id="{6CAC6F57-76E7-8BC4-EEC9-5B5E5DB63AEB}"/>
+              </a:ext>
+            </a:extLst>
+          </p:cNvPr>
+          <p:cNvSpPr>
+            <a:spLocks noGrp="1"/>
+          </p:cNvSpPr>
+          <p:nvPr>
+            <p:ph idx="1"/>
+          </p:nvPr>
+        </p:nvSpPr>
+        <p:spPr>
+          <a:xfrm>
+            <a:off x="838200" y="1456267"/>
+            <a:ext cx="10375900" cy="4720696"/>
+          </a:xfrm>
+        </p:spPr>
+        <p:txBody>
+          <a:bodyPr>
+            <a:noAutofit/>
+          </a:bodyPr>
+          <a:lstStyle/>
+          <a:p>
+            <a:pPr marL="457200" indent="-457200">
+              <a:buFont typeface="Arial" panose="020B0604020202020204" pitchFamily="34" charset="0"/>
+              <a:buAutoNum type="arabicPeriod"/>
+            </a:pPr>
+            <a:r>
+              <a:rPr lang="nl-NL" sz="1800" dirty="0"/>
+              <a:t>Maak het end point om nieuwe </a:t>
+            </a:r>
+            <a:r>
+              <a:rPr lang="nl-NL" sz="1800" dirty="0" err="1"/>
+              <a:t>To</a:t>
+            </a:r>
+            <a:r>
+              <a:rPr lang="nl-NL" sz="1800" dirty="0"/>
+              <a:t> Do items aan te maken:</a:t>
+            </a:r>
+          </a:p>
+          <a:p>
+            <a:pPr marL="457200" indent="-457200">
+              <a:buFont typeface="Arial" panose="020B0604020202020204" pitchFamily="34" charset="0"/>
+              <a:buAutoNum type="arabicPeriod"/>
+            </a:pPr>
+            <a:endParaRPr lang="nl-NL" sz="1800" dirty="0"/>
+          </a:p>
+          <a:p>
+            <a:pPr marL="914400" lvl="1" indent="-457200">
+              <a:buFont typeface="Arial" panose="020B0604020202020204" pitchFamily="34" charset="0"/>
+              <a:buAutoNum type="arabicPeriod"/>
+            </a:pPr>
+            <a:r>
+              <a:rPr lang="nl-NL" sz="1800" dirty="0"/>
+              <a:t>Blaat</a:t>
+            </a:r>
+          </a:p>
+          <a:p>
+            <a:pPr marL="0" indent="0">
+              <a:buNone/>
+            </a:pPr>
+            <a:endParaRPr lang="nl-NL" sz="1800" dirty="0"/>
+          </a:p>
+        </p:txBody>
+      </p:sp>
+    </p:spTree>
+    <p:extLst>
+      <p:ext uri="{BB962C8B-B14F-4D97-AF65-F5344CB8AC3E}">
+        <p14:creationId xmlns:p14="http://schemas.microsoft.com/office/powerpoint/2010/main" val="3696776232"/>
       </p:ext>
     </p:extLst>
   </p:cSld>
@@ -10999,7 +15307,7 @@
               <a:buNone/>
             </a:pPr>
             <a:r>
-              <a:rPr lang="nl-NL" sz="2000" b="1" dirty="0"/>
+              <a:rPr lang="nl-NL" sz="1800" b="1" dirty="0"/>
               <a:t>Goede gewoonte: Vertrouw invoer nooit!</a:t>
             </a:r>
           </a:p>
@@ -11012,15 +15320,15 @@
               <a:buChar char="-"/>
             </a:pPr>
             <a:r>
-              <a:rPr lang="nl-NL" sz="2000" dirty="0"/>
+              <a:rPr lang="nl-NL" sz="1800" dirty="0"/>
               <a:t>Inlezen van bestanden, invoer van een gebruiker, data uit </a:t>
             </a:r>
             <a:r>
-              <a:rPr lang="nl-NL" sz="2000" dirty="0" err="1"/>
+              <a:rPr lang="nl-NL" sz="1800" dirty="0" err="1"/>
               <a:t>API's</a:t>
             </a:r>
             <a:r>
-              <a:rPr lang="nl-NL" sz="2000" dirty="0"/>
+              <a:rPr lang="nl-NL" sz="1800" dirty="0"/>
               <a:t>, et cetera.</a:t>
             </a:r>
           </a:p>
@@ -11031,17 +15339,17 @@
               </a:spcAft>
               <a:buNone/>
             </a:pPr>
-            <a:endParaRPr lang="nl-NL" sz="2000" dirty="0"/>
-          </a:p>
-          <a:p>
-            <a:pPr marL="0" indent="0">
-              <a:spcAft>
-                <a:spcPts val="600"/>
-              </a:spcAft>
-              <a:buNone/>
-            </a:pPr>
-            <a:r>
-              <a:rPr lang="nl-NL" sz="2000" b="1" dirty="0"/>
+            <a:endParaRPr lang="nl-NL" sz="1800" dirty="0"/>
+          </a:p>
+          <a:p>
+            <a:pPr marL="0" indent="0">
+              <a:spcAft>
+                <a:spcPts val="600"/>
+              </a:spcAft>
+              <a:buNone/>
+            </a:pPr>
+            <a:r>
+              <a:rPr lang="nl-NL" sz="1800" b="1" dirty="0"/>
               <a:t>Volledigheid van gegevens:</a:t>
             </a:r>
           </a:p>
@@ -11054,7 +15362,7 @@
               <a:buChar char="-"/>
             </a:pPr>
             <a:r>
-              <a:rPr lang="nl-NL" sz="2000" dirty="0"/>
+              <a:rPr lang="nl-NL" sz="1800" dirty="0"/>
               <a:t>Ontbrekende waardes kunnen voor verrassingen zorgen.</a:t>
             </a:r>
           </a:p>
@@ -11067,7 +15375,7 @@
               <a:buChar char="-"/>
             </a:pPr>
             <a:r>
-              <a:rPr lang="nl-NL" sz="2000" dirty="0"/>
+              <a:rPr lang="nl-NL" sz="1800" dirty="0"/>
               <a:t>Extra informatie kan verloren gaan.</a:t>
             </a:r>
           </a:p>
@@ -11078,17 +15386,17 @@
               </a:spcAft>
               <a:buNone/>
             </a:pPr>
-            <a:endParaRPr lang="nl-NL" sz="2000" dirty="0"/>
-          </a:p>
-          <a:p>
-            <a:pPr marL="0" indent="0">
-              <a:spcAft>
-                <a:spcPts val="600"/>
-              </a:spcAft>
-              <a:buNone/>
-            </a:pPr>
-            <a:r>
-              <a:rPr lang="nl-NL" sz="2000" b="1" dirty="0"/>
+            <a:endParaRPr lang="nl-NL" sz="1800" dirty="0"/>
+          </a:p>
+          <a:p>
+            <a:pPr marL="0" indent="0">
+              <a:spcAft>
+                <a:spcPts val="600"/>
+              </a:spcAft>
+              <a:buNone/>
+            </a:pPr>
+            <a:r>
+              <a:rPr lang="nl-NL" sz="1800" b="1" dirty="0"/>
               <a:t>Veiligheidsrisico's:</a:t>
             </a:r>
           </a:p>
@@ -11101,7 +15409,7 @@
               <a:buChar char="-"/>
             </a:pPr>
             <a:r>
-              <a:rPr lang="nl-NL" sz="2000" dirty="0"/>
+              <a:rPr lang="nl-NL" sz="1800" dirty="0"/>
               <a:t>Extreem grote invoer kan systemen kwetsbaar of onbruikbaar maken.</a:t>
             </a:r>
           </a:p>
@@ -11114,7 +15422,7 @@
               <a:buChar char="-"/>
             </a:pPr>
             <a:r>
-              <a:rPr lang="nl-NL" sz="2000" dirty="0"/>
+              <a:rPr lang="nl-NL" sz="1800" dirty="0"/>
               <a:t>Commando's in de invoer worden per ongeluk uitgevoerd.</a:t>
             </a:r>
           </a:p>
@@ -11226,24 +15534,24 @@
               <a:buNone/>
             </a:pPr>
             <a:r>
-              <a:rPr lang="nl-NL" sz="2000" b="1" dirty="0"/>
+              <a:rPr lang="nl-NL" sz="1800" b="1" dirty="0"/>
               <a:t>SQL </a:t>
             </a:r>
             <a:r>
-              <a:rPr lang="nl-NL" sz="2000" b="1" dirty="0" err="1"/>
+              <a:rPr lang="nl-NL" sz="1800" b="1" dirty="0" err="1"/>
               <a:t>injection</a:t>
             </a:r>
-            <a:endParaRPr lang="nl-NL" sz="2000" b="1" dirty="0"/>
-          </a:p>
-          <a:p>
-            <a:pPr marL="0" indent="0">
-              <a:spcAft>
-                <a:spcPts val="600"/>
-              </a:spcAft>
-              <a:buNone/>
-            </a:pPr>
-            <a:r>
-              <a:rPr lang="nl-NL" sz="2000" dirty="0"/>
+            <a:endParaRPr lang="nl-NL" sz="1800" b="1" dirty="0"/>
+          </a:p>
+          <a:p>
+            <a:pPr marL="0" indent="0">
+              <a:spcAft>
+                <a:spcPts val="600"/>
+              </a:spcAft>
+              <a:buNone/>
+            </a:pPr>
+            <a:r>
+              <a:rPr lang="nl-NL" sz="1800" dirty="0"/>
               <a:t>Invoer doorgegeven aan SQL zonder controle.</a:t>
             </a:r>
           </a:p>
@@ -11255,7 +15563,7 @@
               <a:buNone/>
             </a:pPr>
             <a:r>
-              <a:rPr lang="nl-NL" sz="2000" dirty="0"/>
+              <a:rPr lang="nl-NL" sz="1800" dirty="0"/>
               <a:t>De invoer kan een commando bevatten.</a:t>
             </a:r>
           </a:p>
@@ -11266,83 +15574,83 @@
               </a:spcAft>
               <a:buNone/>
             </a:pPr>
-            <a:endParaRPr lang="nl-NL" sz="2000" dirty="0"/>
-          </a:p>
-          <a:p>
-            <a:pPr marL="0" indent="0">
-              <a:spcAft>
-                <a:spcPts val="600"/>
-              </a:spcAft>
-              <a:buNone/>
-            </a:pPr>
-            <a:endParaRPr lang="nl-NL" sz="2000" dirty="0"/>
-          </a:p>
-          <a:p>
-            <a:pPr marL="0" indent="0">
-              <a:spcAft>
-                <a:spcPts val="600"/>
-              </a:spcAft>
-              <a:buNone/>
-            </a:pPr>
-            <a:endParaRPr lang="nl-NL" sz="2000" dirty="0"/>
-          </a:p>
-          <a:p>
-            <a:pPr marL="0" indent="0">
-              <a:spcAft>
-                <a:spcPts val="600"/>
-              </a:spcAft>
-              <a:buNone/>
-            </a:pPr>
-            <a:r>
-              <a:rPr lang="nl-NL" sz="2000" b="1" dirty="0" err="1"/>
+            <a:endParaRPr lang="nl-NL" sz="1800" dirty="0"/>
+          </a:p>
+          <a:p>
+            <a:pPr marL="0" indent="0">
+              <a:spcAft>
+                <a:spcPts val="600"/>
+              </a:spcAft>
+              <a:buNone/>
+            </a:pPr>
+            <a:endParaRPr lang="nl-NL" sz="1800" dirty="0"/>
+          </a:p>
+          <a:p>
+            <a:pPr marL="0" indent="0">
+              <a:spcAft>
+                <a:spcPts val="600"/>
+              </a:spcAft>
+              <a:buNone/>
+            </a:pPr>
+            <a:endParaRPr lang="nl-NL" sz="1800" dirty="0"/>
+          </a:p>
+          <a:p>
+            <a:pPr marL="0" indent="0">
+              <a:spcAft>
+                <a:spcPts val="600"/>
+              </a:spcAft>
+              <a:buNone/>
+            </a:pPr>
+            <a:r>
+              <a:rPr lang="nl-NL" sz="1800" b="1" dirty="0" err="1"/>
               <a:t>Pickle</a:t>
             </a:r>
             <a:r>
-              <a:rPr lang="nl-NL" sz="2000" b="1" dirty="0"/>
+              <a:rPr lang="nl-NL" sz="1800" b="1" dirty="0"/>
               <a:t> bestanden</a:t>
             </a:r>
-            <a:endParaRPr lang="nl-NL" sz="2000" dirty="0"/>
-          </a:p>
-          <a:p>
-            <a:pPr marL="0" indent="0">
-              <a:spcAft>
-                <a:spcPts val="600"/>
-              </a:spcAft>
-              <a:buNone/>
-            </a:pPr>
-            <a:r>
-              <a:rPr lang="nl-NL" sz="2000" dirty="0"/>
+            <a:endParaRPr lang="nl-NL" sz="1800" dirty="0"/>
+          </a:p>
+          <a:p>
+            <a:pPr marL="0" indent="0">
+              <a:spcAft>
+                <a:spcPts val="600"/>
+              </a:spcAft>
+              <a:buNone/>
+            </a:pPr>
+            <a:r>
+              <a:rPr lang="nl-NL" sz="1800" dirty="0"/>
               <a:t>Inhoud van </a:t>
             </a:r>
             <a:r>
-              <a:rPr lang="nl-NL" sz="2000" dirty="0" err="1"/>
+              <a:rPr lang="nl-NL" sz="1800" dirty="0" err="1"/>
               <a:t>pickle</a:t>
             </a:r>
             <a:r>
-              <a:rPr lang="nl-NL" sz="2000" dirty="0"/>
+              <a:rPr lang="nl-NL" sz="1800" dirty="0"/>
               <a:t> bestand wordt met </a:t>
             </a:r>
             <a:r>
-              <a:rPr lang="nl-NL" sz="2000" dirty="0" err="1">
+              <a:rPr lang="nl-NL" sz="1800" dirty="0" err="1">
                 <a:latin typeface="Courier New" panose="02070309020205020404" pitchFamily="49" charset="0"/>
                 <a:cs typeface="Courier New" panose="02070309020205020404" pitchFamily="49" charset="0"/>
               </a:rPr>
               <a:t>eval</a:t>
             </a:r>
             <a:r>
-              <a:rPr lang="nl-NL" sz="2000" dirty="0">
+              <a:rPr lang="nl-NL" sz="1800" dirty="0">
                 <a:latin typeface="Courier New" panose="02070309020205020404" pitchFamily="49" charset="0"/>
                 <a:cs typeface="Courier New" panose="02070309020205020404" pitchFamily="49" charset="0"/>
               </a:rPr>
               <a:t>() </a:t>
             </a:r>
             <a:r>
-              <a:rPr lang="nl-NL" sz="2000" dirty="0">
+              <a:rPr lang="nl-NL" sz="1800" dirty="0">
                 <a:cs typeface="Courier New" panose="02070309020205020404" pitchFamily="49" charset="0"/>
               </a:rPr>
               <a:t>uitgevoerd als Python code.</a:t>
             </a:r>
-            <a:endParaRPr lang="nl-NL" sz="2000" dirty="0">
+            <a:endParaRPr lang="nl-NL" sz="1800" dirty="0">
               <a:latin typeface="Courier New" panose="02070309020205020404" pitchFamily="49" charset="0"/>
               <a:cs typeface="Courier New" panose="02070309020205020404" pitchFamily="49" charset="0"/>
             </a:endParaRPr>
@@ -12325,7 +16633,7 @@
               <a:buNone/>
             </a:pPr>
             <a:r>
-              <a:rPr lang="nl-NL" sz="2000" dirty="0"/>
+              <a:rPr lang="nl-NL" sz="1800" dirty="0"/>
               <a:t>Valideer Python data structuren met classes en type hints.</a:t>
             </a:r>
           </a:p>
@@ -12336,17 +16644,17 @@
               </a:spcAft>
               <a:buNone/>
             </a:pPr>
-            <a:endParaRPr lang="nl-NL" sz="2000" dirty="0"/>
-          </a:p>
-          <a:p>
-            <a:pPr marL="0" indent="0">
-              <a:spcAft>
-                <a:spcPts val="600"/>
-              </a:spcAft>
-              <a:buNone/>
-            </a:pPr>
-            <a:r>
-              <a:rPr lang="nl-NL" sz="2000" dirty="0"/>
+            <a:endParaRPr lang="nl-NL" sz="1800" dirty="0"/>
+          </a:p>
+          <a:p>
+            <a:pPr marL="0" indent="0">
+              <a:spcAft>
+                <a:spcPts val="600"/>
+              </a:spcAft>
+              <a:buNone/>
+            </a:pPr>
+            <a:r>
+              <a:rPr lang="nl-NL" sz="1800" dirty="0"/>
               <a:t>Definieer data structuur als een class.</a:t>
             </a:r>
           </a:p>
@@ -12357,17 +16665,17 @@
               </a:spcAft>
               <a:buNone/>
             </a:pPr>
-            <a:endParaRPr lang="nl-NL" sz="2000" dirty="0"/>
-          </a:p>
-          <a:p>
-            <a:pPr marL="0" indent="0">
-              <a:spcAft>
-                <a:spcPts val="600"/>
-              </a:spcAft>
-              <a:buNone/>
-            </a:pPr>
-            <a:r>
-              <a:rPr lang="nl-NL" sz="2000" dirty="0"/>
+            <a:endParaRPr lang="nl-NL" sz="1800" dirty="0"/>
+          </a:p>
+          <a:p>
+            <a:pPr marL="0" indent="0">
+              <a:spcAft>
+                <a:spcPts val="600"/>
+              </a:spcAft>
+              <a:buNone/>
+            </a:pPr>
+            <a:r>
+              <a:rPr lang="nl-NL" sz="1800" dirty="0"/>
               <a:t>Valideer data als:</a:t>
             </a:r>
           </a:p>
@@ -12380,7 +16688,7 @@
               <a:buChar char="-"/>
             </a:pPr>
             <a:r>
-              <a:rPr lang="nl-NL" sz="2000" dirty="0"/>
+              <a:rPr lang="nl-NL" sz="1800" dirty="0"/>
               <a:t>argumenten</a:t>
             </a:r>
           </a:p>
@@ -12393,10 +16701,10 @@
               <a:buChar char="-"/>
             </a:pPr>
             <a:r>
-              <a:rPr lang="nl-NL" sz="2000" dirty="0" err="1"/>
+              <a:rPr lang="nl-NL" sz="1800" dirty="0" err="1"/>
               <a:t>dict</a:t>
             </a:r>
-            <a:endParaRPr lang="nl-NL" sz="2000" dirty="0"/>
+            <a:endParaRPr lang="nl-NL" sz="1800" dirty="0"/>
           </a:p>
           <a:p>
             <a:pPr>
@@ -12407,7 +16715,7 @@
               <a:buChar char="-"/>
             </a:pPr>
             <a:r>
-              <a:rPr lang="nl-NL" sz="2000" dirty="0"/>
+              <a:rPr lang="nl-NL" sz="1800" dirty="0"/>
               <a:t>JSON</a:t>
             </a:r>
           </a:p>

--- a/python_course_4p/4_api_app/4_api_app.pptx
+++ b/python_course_4p/4_api_app/4_api_app.pptx
@@ -5,7 +5,7 @@
     <p:sldMasterId id="2147483648" r:id="rId1"/>
   </p:sldMasterIdLst>
   <p:notesMasterIdLst>
-    <p:notesMasterId r:id="rId24"/>
+    <p:notesMasterId r:id="rId26"/>
   </p:notesMasterIdLst>
   <p:sldIdLst>
     <p:sldId id="322" r:id="rId2"/>
@@ -30,6 +30,8 @@
     <p:sldId id="356" r:id="rId21"/>
     <p:sldId id="357" r:id="rId22"/>
     <p:sldId id="358" r:id="rId23"/>
+    <p:sldId id="359" r:id="rId24"/>
+    <p:sldId id="360" r:id="rId25"/>
   </p:sldIdLst>
   <p:sldSz cx="12192000" cy="6858000"/>
   <p:notesSz cx="6858000" cy="9144000"/>
@@ -230,7 +232,7 @@
           <a:p>
             <a:fld id="{7D183437-14DE-4969-B062-63D9C4A2E219}" type="datetimeFigureOut">
               <a:rPr lang="nl-NL" smtClean="0"/>
-              <a:t>26-10-2026</a:t>
+              <a:t>28-10-2026</a:t>
             </a:fld>
             <a:endParaRPr lang="nl-NL"/>
           </a:p>
@@ -647,7 +649,7 @@
           <a:p>
             <a:fld id="{0EBB069A-003F-4FC0-8534-236B0C5C7B5F}" type="datetimeFigureOut">
               <a:rPr lang="en-NL" smtClean="0"/>
-              <a:t>26/10/2026</a:t>
+              <a:t>28/10/2026</a:t>
             </a:fld>
             <a:endParaRPr lang="en-NL"/>
           </a:p>
@@ -847,7 +849,7 @@
           <a:p>
             <a:fld id="{0EBB069A-003F-4FC0-8534-236B0C5C7B5F}" type="datetimeFigureOut">
               <a:rPr lang="en-NL" smtClean="0"/>
-              <a:t>26/10/2026</a:t>
+              <a:t>28/10/2026</a:t>
             </a:fld>
             <a:endParaRPr lang="en-NL"/>
           </a:p>
@@ -1057,7 +1059,7 @@
           <a:p>
             <a:fld id="{0EBB069A-003F-4FC0-8534-236B0C5C7B5F}" type="datetimeFigureOut">
               <a:rPr lang="en-NL" smtClean="0"/>
-              <a:t>26/10/2026</a:t>
+              <a:t>28/10/2026</a:t>
             </a:fld>
             <a:endParaRPr lang="en-NL"/>
           </a:p>
@@ -1257,7 +1259,7 @@
           <a:p>
             <a:fld id="{0EBB069A-003F-4FC0-8534-236B0C5C7B5F}" type="datetimeFigureOut">
               <a:rPr lang="en-NL" smtClean="0"/>
-              <a:t>26/10/2026</a:t>
+              <a:t>28/10/2026</a:t>
             </a:fld>
             <a:endParaRPr lang="en-NL"/>
           </a:p>
@@ -1533,7 +1535,7 @@
           <a:p>
             <a:fld id="{0EBB069A-003F-4FC0-8534-236B0C5C7B5F}" type="datetimeFigureOut">
               <a:rPr lang="en-NL" smtClean="0"/>
-              <a:t>26/10/2026</a:t>
+              <a:t>28/10/2026</a:t>
             </a:fld>
             <a:endParaRPr lang="en-NL"/>
           </a:p>
@@ -1801,7 +1803,7 @@
           <a:p>
             <a:fld id="{0EBB069A-003F-4FC0-8534-236B0C5C7B5F}" type="datetimeFigureOut">
               <a:rPr lang="en-NL" smtClean="0"/>
-              <a:t>26/10/2026</a:t>
+              <a:t>28/10/2026</a:t>
             </a:fld>
             <a:endParaRPr lang="en-NL"/>
           </a:p>
@@ -2216,7 +2218,7 @@
           <a:p>
             <a:fld id="{0EBB069A-003F-4FC0-8534-236B0C5C7B5F}" type="datetimeFigureOut">
               <a:rPr lang="en-NL" smtClean="0"/>
-              <a:t>26/10/2026</a:t>
+              <a:t>28/10/2026</a:t>
             </a:fld>
             <a:endParaRPr lang="en-NL"/>
           </a:p>
@@ -2358,7 +2360,7 @@
           <a:p>
             <a:fld id="{0EBB069A-003F-4FC0-8534-236B0C5C7B5F}" type="datetimeFigureOut">
               <a:rPr lang="en-NL" smtClean="0"/>
-              <a:t>26/10/2026</a:t>
+              <a:t>28/10/2026</a:t>
             </a:fld>
             <a:endParaRPr lang="en-NL"/>
           </a:p>
@@ -2471,7 +2473,7 @@
           <a:p>
             <a:fld id="{0EBB069A-003F-4FC0-8534-236B0C5C7B5F}" type="datetimeFigureOut">
               <a:rPr lang="en-NL" smtClean="0"/>
-              <a:t>26/10/2026</a:t>
+              <a:t>28/10/2026</a:t>
             </a:fld>
             <a:endParaRPr lang="en-NL"/>
           </a:p>
@@ -2784,7 +2786,7 @@
           <a:p>
             <a:fld id="{0EBB069A-003F-4FC0-8534-236B0C5C7B5F}" type="datetimeFigureOut">
               <a:rPr lang="en-NL" smtClean="0"/>
-              <a:t>26/10/2026</a:t>
+              <a:t>28/10/2026</a:t>
             </a:fld>
             <a:endParaRPr lang="en-NL"/>
           </a:p>
@@ -3073,7 +3075,7 @@
           <a:p>
             <a:fld id="{0EBB069A-003F-4FC0-8534-236B0C5C7B5F}" type="datetimeFigureOut">
               <a:rPr lang="en-NL" smtClean="0"/>
-              <a:t>26/10/2026</a:t>
+              <a:t>28/10/2026</a:t>
             </a:fld>
             <a:endParaRPr lang="en-NL"/>
           </a:p>
@@ -3316,7 +3318,7 @@
           <a:p>
             <a:fld id="{0EBB069A-003F-4FC0-8534-236B0C5C7B5F}" type="datetimeFigureOut">
               <a:rPr lang="en-NL" smtClean="0"/>
-              <a:t>26/10/2026</a:t>
+              <a:t>28/10/2026</a:t>
             </a:fld>
             <a:endParaRPr lang="en-NL"/>
           </a:p>
@@ -9170,7 +9172,7 @@
             <a:pPr lvl="1"/>
             <a:r>
               <a:rPr lang="nl-NL" sz="1800" dirty="0"/>
-              <a:t>Een verplichte omschrijving.</a:t>
+              <a:t>Een verplichte omschrijving tussen de 3 en 250 karakters.</a:t>
             </a:r>
           </a:p>
           <a:p>
@@ -10127,7 +10129,7 @@
                   <a:latin typeface="Courier New" panose="02070309020205020404" pitchFamily="49" charset="0"/>
                   <a:cs typeface="Courier New" panose="02070309020205020404" pitchFamily="49" charset="0"/>
                 </a:rPr>
-                <a:t>POST /add + description</a:t>
+                <a:t>GET /add + description</a:t>
               </a:r>
             </a:p>
           </p:txBody>
@@ -10228,7 +10230,7 @@
                   <a:latin typeface="Courier New" panose="02070309020205020404" pitchFamily="49" charset="0"/>
                   <a:cs typeface="Courier New" panose="02070309020205020404" pitchFamily="49" charset="0"/>
                 </a:rPr>
-                <a:t>POST /update + id + status</a:t>
+                <a:t>GET /update + id + status</a:t>
               </a:r>
             </a:p>
           </p:txBody>
@@ -10329,7 +10331,7 @@
                   <a:latin typeface="Courier New" panose="02070309020205020404" pitchFamily="49" charset="0"/>
                   <a:cs typeface="Courier New" panose="02070309020205020404" pitchFamily="49" charset="0"/>
                 </a:rPr>
-                <a:t>POST /delete + id</a:t>
+                <a:t>GET /delete + id</a:t>
               </a:r>
             </a:p>
           </p:txBody>
@@ -12278,7 +12280,7 @@
                 <a:latin typeface="Courier New" panose="02070309020205020404" pitchFamily="49" charset="0"/>
                 <a:cs typeface="Courier New" panose="02070309020205020404" pitchFamily="49" charset="0"/>
               </a:rPr>
-              <a:t># Maak API aan.</a:t>
+              <a:t># Maak API app aan.</a:t>
             </a:r>
           </a:p>
           <a:p>
@@ -12295,18 +12297,11 @@
               <a:buNone/>
             </a:pPr>
             <a:r>
-              <a:rPr lang="nl-NL" sz="1400" dirty="0" err="1">
-                <a:latin typeface="Courier New" panose="02070309020205020404" pitchFamily="49" charset="0"/>
-                <a:cs typeface="Courier New" panose="02070309020205020404" pitchFamily="49" charset="0"/>
-              </a:rPr>
-              <a:t>api</a:t>
-            </a:r>
-            <a:r>
               <a:rPr lang="nl-NL" sz="1400" dirty="0">
                 <a:latin typeface="Courier New" panose="02070309020205020404" pitchFamily="49" charset="0"/>
                 <a:cs typeface="Courier New" panose="02070309020205020404" pitchFamily="49" charset="0"/>
               </a:rPr>
-              <a:t> = </a:t>
+              <a:t>app = </a:t>
             </a:r>
             <a:r>
               <a:rPr lang="nl-NL" sz="1400" dirty="0" err="1">
@@ -12770,7 +12765,7 @@
               <a:buNone/>
             </a:pPr>
             <a:r>
-              <a:rPr lang="nl-NL" sz="1800" dirty="0"/>
+              <a:rPr lang="nl-NL" sz="1600" dirty="0"/>
               <a:t>Drie manieren om data mee te geven:</a:t>
             </a:r>
           </a:p>
@@ -12781,17 +12776,17 @@
               </a:spcAft>
               <a:buNone/>
             </a:pPr>
-            <a:endParaRPr lang="nl-NL" sz="1800" dirty="0"/>
-          </a:p>
-          <a:p>
-            <a:pPr marL="0" indent="0">
-              <a:spcAft>
-                <a:spcPts val="600"/>
-              </a:spcAft>
-              <a:buNone/>
-            </a:pPr>
-            <a:r>
-              <a:rPr lang="nl-NL" sz="1800" b="1" dirty="0"/>
+            <a:endParaRPr lang="nl-NL" sz="1600" dirty="0"/>
+          </a:p>
+          <a:p>
+            <a:pPr marL="0" indent="0">
+              <a:spcAft>
+                <a:spcPts val="600"/>
+              </a:spcAft>
+              <a:buNone/>
+            </a:pPr>
+            <a:r>
+              <a:rPr lang="nl-NL" sz="1600" b="1" dirty="0"/>
               <a:t>In het pad</a:t>
             </a:r>
           </a:p>
@@ -12803,38 +12798,38 @@
               <a:buNone/>
             </a:pPr>
             <a:r>
-              <a:rPr lang="nl-NL" sz="1800" dirty="0"/>
+              <a:rPr lang="nl-NL" sz="1600" dirty="0"/>
               <a:t>http://localhost:8080/greet/</a:t>
             </a:r>
             <a:r>
-              <a:rPr lang="nl-NL" sz="1800" b="1" dirty="0">
+              <a:rPr lang="nl-NL" sz="1600" b="1" dirty="0">
                 <a:solidFill>
                   <a:schemeClr val="accent5">
                     <a:lumMod val="75000"/>
                   </a:schemeClr>
                 </a:solidFill>
               </a:rPr>
-              <a:t>John</a:t>
-            </a:r>
-          </a:p>
-          <a:p>
-            <a:pPr marL="0" indent="0">
-              <a:spcAft>
-                <a:spcPts val="600"/>
-              </a:spcAft>
-              <a:buNone/>
-            </a:pPr>
-            <a:endParaRPr lang="nl-NL" sz="1800" dirty="0"/>
-          </a:p>
-          <a:p>
-            <a:pPr marL="0" indent="0">
-              <a:spcAft>
-                <a:spcPts val="600"/>
-              </a:spcAft>
-              <a:buNone/>
-            </a:pPr>
-            <a:r>
-              <a:rPr lang="nl-NL" sz="1800" b="1" dirty="0"/>
+              <a:t>John/Doe</a:t>
+            </a:r>
+          </a:p>
+          <a:p>
+            <a:pPr marL="0" indent="0">
+              <a:spcAft>
+                <a:spcPts val="600"/>
+              </a:spcAft>
+              <a:buNone/>
+            </a:pPr>
+            <a:endParaRPr lang="nl-NL" sz="1600" dirty="0"/>
+          </a:p>
+          <a:p>
+            <a:pPr marL="0" indent="0">
+              <a:spcAft>
+                <a:spcPts val="600"/>
+              </a:spcAft>
+              <a:buNone/>
+            </a:pPr>
+            <a:r>
+              <a:rPr lang="nl-NL" sz="1600" b="1" dirty="0"/>
               <a:t>Als query</a:t>
             </a:r>
           </a:p>
@@ -12846,38 +12841,38 @@
               <a:buNone/>
             </a:pPr>
             <a:r>
-              <a:rPr lang="nl-NL" sz="1800" dirty="0"/>
+              <a:rPr lang="nl-NL" sz="1600" dirty="0"/>
               <a:t>http://localhost:8080/add</a:t>
             </a:r>
             <a:r>
-              <a:rPr lang="nl-NL" sz="1800" b="1" dirty="0">
+              <a:rPr lang="nl-NL" sz="1600" b="1" dirty="0">
                 <a:solidFill>
                   <a:schemeClr val="accent5">
                     <a:lumMod val="75000"/>
                   </a:schemeClr>
                 </a:solidFill>
               </a:rPr>
-              <a:t>?name=John</a:t>
-            </a:r>
-          </a:p>
-          <a:p>
-            <a:pPr marL="0" indent="0">
-              <a:spcAft>
-                <a:spcPts val="600"/>
-              </a:spcAft>
-              <a:buNone/>
-            </a:pPr>
-            <a:endParaRPr lang="nl-NL" sz="1800" b="1" dirty="0"/>
-          </a:p>
-          <a:p>
-            <a:pPr marL="0" indent="0">
-              <a:spcAft>
-                <a:spcPts val="600"/>
-              </a:spcAft>
-              <a:buNone/>
-            </a:pPr>
-            <a:r>
-              <a:rPr lang="nl-NL" sz="1800" b="1" dirty="0"/>
+              <a:t>?name=John&amp;last_name=Doe</a:t>
+            </a:r>
+          </a:p>
+          <a:p>
+            <a:pPr marL="0" indent="0">
+              <a:spcAft>
+                <a:spcPts val="600"/>
+              </a:spcAft>
+              <a:buNone/>
+            </a:pPr>
+            <a:endParaRPr lang="nl-NL" sz="1600" b="1" dirty="0"/>
+          </a:p>
+          <a:p>
+            <a:pPr marL="0" indent="0">
+              <a:spcAft>
+                <a:spcPts val="600"/>
+              </a:spcAft>
+              <a:buNone/>
+            </a:pPr>
+            <a:r>
+              <a:rPr lang="nl-NL" sz="1600" b="1" dirty="0"/>
               <a:t>Als body</a:t>
             </a:r>
           </a:p>
@@ -12889,7 +12884,7 @@
               <a:buNone/>
             </a:pPr>
             <a:r>
-              <a:rPr lang="nl-NL" sz="1800" dirty="0">
+              <a:rPr lang="nl-NL" sz="1600" dirty="0">
                 <a:solidFill>
                   <a:schemeClr val="accent5">
                     <a:lumMod val="75000"/>
@@ -12899,7 +12894,7 @@
               <a:t>{"name": "John", "</a:t>
             </a:r>
             <a:r>
-              <a:rPr lang="nl-NL" sz="1800" dirty="0" err="1">
+              <a:rPr lang="nl-NL" sz="1600" dirty="0" err="1">
                 <a:solidFill>
                   <a:schemeClr val="accent5">
                     <a:lumMod val="75000"/>
@@ -12909,7 +12904,7 @@
               <a:t>last_name</a:t>
             </a:r>
             <a:r>
-              <a:rPr lang="nl-NL" sz="1800" dirty="0">
+              <a:rPr lang="nl-NL" sz="1600" dirty="0">
                 <a:solidFill>
                   <a:schemeClr val="accent5">
                     <a:lumMod val="75000"/>
@@ -13206,6 +13201,30 @@
                 <a:latin typeface="Courier New" panose="02070309020205020404" pitchFamily="49" charset="0"/>
                 <a:cs typeface="Courier New" panose="02070309020205020404" pitchFamily="49" charset="0"/>
               </a:rPr>
+              <a:t>/</a:t>
+            </a:r>
+            <a:r>
+              <a:rPr lang="en-US" sz="1400" dirty="0">
+                <a:solidFill>
+                  <a:schemeClr val="accent5">
+                    <a:lumMod val="75000"/>
+                  </a:schemeClr>
+                </a:solidFill>
+                <a:latin typeface="Courier New" panose="02070309020205020404" pitchFamily="49" charset="0"/>
+                <a:cs typeface="Courier New" panose="02070309020205020404" pitchFamily="49" charset="0"/>
+              </a:rPr>
+              <a:t>{last_name}</a:t>
+            </a:r>
+            <a:r>
+              <a:rPr lang="en-US" sz="1400" dirty="0">
+                <a:solidFill>
+                  <a:schemeClr val="accent2">
+                    <a:lumMod val="75000"/>
+                  </a:schemeClr>
+                </a:solidFill>
+                <a:latin typeface="Courier New" panose="02070309020205020404" pitchFamily="49" charset="0"/>
+                <a:cs typeface="Courier New" panose="02070309020205020404" pitchFamily="49" charset="0"/>
+              </a:rPr>
               <a:t>"</a:t>
             </a:r>
             <a:r>
@@ -13412,7 +13431,21 @@
                 <a:latin typeface="Courier New" panose="02070309020205020404" pitchFamily="49" charset="0"/>
                 <a:cs typeface="Courier New" panose="02070309020205020404" pitchFamily="49" charset="0"/>
               </a:rPr>
-              <a:t>greet(name: str):</a:t>
+              <a:t>greet(name: str, </a:t>
+            </a:r>
+            <a:r>
+              <a:rPr lang="en-US" sz="1400" dirty="0" err="1">
+                <a:latin typeface="Courier New" panose="02070309020205020404" pitchFamily="49" charset="0"/>
+                <a:cs typeface="Courier New" panose="02070309020205020404" pitchFamily="49" charset="0"/>
+              </a:rPr>
+              <a:t>last_name</a:t>
+            </a:r>
+            <a:r>
+              <a:rPr lang="en-US" sz="1400" dirty="0">
+                <a:latin typeface="Courier New" panose="02070309020205020404" pitchFamily="49" charset="0"/>
+                <a:cs typeface="Courier New" panose="02070309020205020404" pitchFamily="49" charset="0"/>
+              </a:rPr>
+              <a:t>: str):</a:t>
             </a:r>
           </a:p>
           <a:p>
@@ -13681,6 +13714,50 @@
           </a:fontRef>
         </p:style>
       </p:cxnSp>
+      <p:sp>
+        <p:nvSpPr>
+          <p:cNvPr id="5" name="TextBox 4">
+            <a:extLst>
+              <a:ext uri="{FF2B5EF4-FFF2-40B4-BE49-F238E27FC236}">
+                <a16:creationId xmlns:a16="http://schemas.microsoft.com/office/drawing/2014/main" id="{0833D66C-9D05-F3F9-7F86-0744E090D6D0}"/>
+              </a:ext>
+            </a:extLst>
+          </p:cNvPr>
+          <p:cNvSpPr txBox="1"/>
+          <p:nvPr/>
+        </p:nvSpPr>
+        <p:spPr>
+          <a:xfrm>
+            <a:off x="9619967" y="6471982"/>
+            <a:ext cx="2499246" cy="307777"/>
+          </a:xfrm>
+          <a:prstGeom prst="rect">
+            <a:avLst/>
+          </a:prstGeom>
+          <a:noFill/>
+        </p:spPr>
+        <p:txBody>
+          <a:bodyPr wrap="square">
+            <a:spAutoFit/>
+          </a:bodyPr>
+          <a:lstStyle/>
+          <a:p>
+            <a:pPr algn="r"/>
+            <a:r>
+              <a:rPr lang="en-US" sz="1400" dirty="0"/>
+              <a:t>D: params </a:t>
+            </a:r>
+            <a:r>
+              <a:rPr lang="en-US" sz="1400" dirty="0" err="1"/>
+              <a:t>api</a:t>
+            </a:r>
+            <a:r>
+              <a:rPr lang="en-US" sz="1400" dirty="0"/>
+              <a:t>.</a:t>
+            </a:r>
+          </a:p>
+        </p:txBody>
+      </p:sp>
     </p:spTree>
     <p:extLst>
       <p:ext uri="{BB962C8B-B14F-4D97-AF65-F5344CB8AC3E}">
@@ -13780,13 +13857,12 @@
           </a:bodyPr>
           <a:lstStyle/>
           <a:p>
-            <a:pPr marL="457200" indent="-457200">
-              <a:buFont typeface="Arial" panose="020B0604020202020204" pitchFamily="34" charset="0"/>
-              <a:buAutoNum type="arabicPeriod"/>
+            <a:pPr marL="0" indent="0">
+              <a:buNone/>
             </a:pPr>
             <a:r>
               <a:rPr lang="nl-NL" sz="1800" dirty="0"/>
-              <a:t>Maak het end point om nieuwe </a:t>
+              <a:t>Maak het end point om een nieuw </a:t>
             </a:r>
             <a:r>
               <a:rPr lang="nl-NL" sz="1800" dirty="0" err="1"/>
@@ -13794,24 +13870,119 @@
             </a:r>
             <a:r>
               <a:rPr lang="nl-NL" sz="1800" dirty="0"/>
-              <a:t> Do items aan te maken:</a:t>
-            </a:r>
-          </a:p>
-          <a:p>
-            <a:pPr marL="457200" indent="-457200">
-              <a:buFont typeface="Arial" panose="020B0604020202020204" pitchFamily="34" charset="0"/>
-              <a:buAutoNum type="arabicPeriod"/>
+              <a:t> Do items te maken:</a:t>
+            </a:r>
+          </a:p>
+          <a:p>
+            <a:pPr marL="0" indent="0">
+              <a:buNone/>
             </a:pPr>
             <a:endParaRPr lang="nl-NL" sz="1800" dirty="0"/>
           </a:p>
           <a:p>
-            <a:pPr marL="914400" lvl="1" indent="-457200">
-              <a:buFont typeface="Arial" panose="020B0604020202020204" pitchFamily="34" charset="0"/>
-              <a:buAutoNum type="arabicPeriod"/>
-            </a:pPr>
             <a:r>
               <a:rPr lang="nl-NL" sz="1800" dirty="0"/>
-              <a:t>Blaat</a:t>
+              <a:t>Open </a:t>
+            </a:r>
+            <a:r>
+              <a:rPr lang="nl-NL" sz="1800" dirty="0" err="1">
+                <a:latin typeface="Courier New" panose="02070309020205020404" pitchFamily="49" charset="0"/>
+                <a:cs typeface="Courier New" panose="02070309020205020404" pitchFamily="49" charset="0"/>
+              </a:rPr>
+              <a:t>exercises</a:t>
+            </a:r>
+            <a:r>
+              <a:rPr lang="nl-NL" sz="1800" dirty="0">
+                <a:latin typeface="Courier New" panose="02070309020205020404" pitchFamily="49" charset="0"/>
+                <a:cs typeface="Courier New" panose="02070309020205020404" pitchFamily="49" charset="0"/>
+              </a:rPr>
+              <a:t>/1_api_create_endpoint.py</a:t>
+            </a:r>
+            <a:r>
+              <a:rPr lang="nl-NL" sz="1800" dirty="0"/>
+              <a:t>.</a:t>
+            </a:r>
+          </a:p>
+          <a:p>
+            <a:endParaRPr lang="nl-NL" sz="1800" dirty="0"/>
+          </a:p>
+          <a:p>
+            <a:r>
+              <a:rPr lang="nl-NL" sz="1800" dirty="0"/>
+              <a:t>Haal de beschrijving uit de </a:t>
+            </a:r>
+            <a:r>
+              <a:rPr lang="nl-NL" sz="1800" dirty="0" err="1">
+                <a:latin typeface="Courier New" panose="02070309020205020404" pitchFamily="49" charset="0"/>
+                <a:cs typeface="Courier New" panose="02070309020205020404" pitchFamily="49" charset="0"/>
+              </a:rPr>
+              <a:t>description</a:t>
+            </a:r>
+            <a:r>
+              <a:rPr lang="nl-NL" sz="1800" dirty="0"/>
+              <a:t> parameter van een GET </a:t>
+            </a:r>
+            <a:r>
+              <a:rPr lang="nl-NL" sz="1800" dirty="0" err="1"/>
+              <a:t>request</a:t>
+            </a:r>
+            <a:r>
+              <a:rPr lang="nl-NL" sz="1800" dirty="0"/>
+              <a:t>.</a:t>
+            </a:r>
+          </a:p>
+          <a:p>
+            <a:endParaRPr lang="nl-NL" sz="1800" dirty="0"/>
+          </a:p>
+          <a:p>
+            <a:r>
+              <a:rPr lang="nl-NL" sz="1800" dirty="0"/>
+              <a:t>Maak een </a:t>
+            </a:r>
+            <a:r>
+              <a:rPr lang="nl-NL" sz="1800" dirty="0" err="1">
+                <a:latin typeface="Courier New" panose="02070309020205020404" pitchFamily="49" charset="0"/>
+                <a:cs typeface="Courier New" panose="02070309020205020404" pitchFamily="49" charset="0"/>
+              </a:rPr>
+              <a:t>ToDoItem</a:t>
+            </a:r>
+            <a:r>
+              <a:rPr lang="nl-NL" sz="1800" dirty="0"/>
+              <a:t> aan met het </a:t>
+            </a:r>
+            <a:r>
+              <a:rPr lang="nl-NL" sz="1800" dirty="0" err="1"/>
+              <a:t>pydantic</a:t>
+            </a:r>
+            <a:r>
+              <a:rPr lang="nl-NL" sz="1800" dirty="0"/>
+              <a:t> model van de vorige opdracht.</a:t>
+            </a:r>
+          </a:p>
+          <a:p>
+            <a:endParaRPr lang="nl-NL" sz="1800" dirty="0"/>
+          </a:p>
+          <a:p>
+            <a:r>
+              <a:rPr lang="nl-NL" sz="1800" dirty="0"/>
+              <a:t>Schrijf het item naar een JSON-bestand in een </a:t>
+            </a:r>
+            <a:r>
+              <a:rPr lang="nl-NL" sz="1800" dirty="0" err="1"/>
+              <a:t>todo</a:t>
+            </a:r>
+            <a:r>
+              <a:rPr lang="nl-NL" sz="1800" dirty="0"/>
+              <a:t>-folder.</a:t>
+            </a:r>
+          </a:p>
+          <a:p>
+            <a:endParaRPr lang="nl-NL" sz="1800" dirty="0"/>
+          </a:p>
+          <a:p>
+            <a:r>
+              <a:rPr lang="nl-NL" sz="1800" dirty="0"/>
+              <a:t>Gebruik  het ID van het item als bestandsnaam</a:t>
             </a:r>
           </a:p>
           <a:p>
@@ -13826,6 +13997,1183 @@
     <p:extLst>
       <p:ext uri="{BB962C8B-B14F-4D97-AF65-F5344CB8AC3E}">
         <p14:creationId xmlns:p14="http://schemas.microsoft.com/office/powerpoint/2010/main" val="3696776232"/>
+      </p:ext>
+    </p:extLst>
+  </p:cSld>
+  <p:clrMapOvr>
+    <a:masterClrMapping/>
+  </p:clrMapOvr>
+</p:sld>
+</file>
+
+<file path=ppt/slides/slide23.xml><?xml version="1.0" encoding="utf-8"?>
+<p:sld xmlns:a="http://schemas.openxmlformats.org/drawingml/2006/main" xmlns:r="http://schemas.openxmlformats.org/officeDocument/2006/relationships" xmlns:p="http://schemas.openxmlformats.org/presentationml/2006/main">
+  <p:cSld>
+    <p:spTree>
+      <p:nvGrpSpPr>
+        <p:cNvPr id="1" name="">
+          <a:extLst>
+            <a:ext uri="{FF2B5EF4-FFF2-40B4-BE49-F238E27FC236}">
+              <a16:creationId xmlns:a16="http://schemas.microsoft.com/office/drawing/2014/main" id="{D4C6DEBF-0F09-811E-384B-EA6E0313D2A5}"/>
+            </a:ext>
+          </a:extLst>
+        </p:cNvPr>
+        <p:cNvGrpSpPr/>
+        <p:nvPr/>
+      </p:nvGrpSpPr>
+      <p:grpSpPr>
+        <a:xfrm>
+          <a:off x="0" y="0"/>
+          <a:ext cx="0" cy="0"/>
+          <a:chOff x="0" y="0"/>
+          <a:chExt cx="0" cy="0"/>
+        </a:xfrm>
+      </p:grpSpPr>
+      <p:sp>
+        <p:nvSpPr>
+          <p:cNvPr id="2" name="Title 1">
+            <a:extLst>
+              <a:ext uri="{FF2B5EF4-FFF2-40B4-BE49-F238E27FC236}">
+                <a16:creationId xmlns:a16="http://schemas.microsoft.com/office/drawing/2014/main" id="{79B436D9-2C79-CA55-6142-247664AC97DA}"/>
+              </a:ext>
+            </a:extLst>
+          </p:cNvPr>
+          <p:cNvSpPr>
+            <a:spLocks noGrp="1"/>
+          </p:cNvSpPr>
+          <p:nvPr>
+            <p:ph type="title"/>
+          </p:nvPr>
+        </p:nvSpPr>
+        <p:spPr>
+          <a:xfrm>
+            <a:off x="838200" y="365126"/>
+            <a:ext cx="10515600" cy="718608"/>
+          </a:xfrm>
+        </p:spPr>
+        <p:txBody>
+          <a:bodyPr>
+            <a:normAutofit/>
+          </a:bodyPr>
+          <a:lstStyle/>
+          <a:p>
+            <a:r>
+              <a:rPr lang="nl-NL" sz="3600" noProof="0" dirty="0"/>
+              <a:t>Oefeningen 2</a:t>
+            </a:r>
+          </a:p>
+        </p:txBody>
+      </p:sp>
+      <p:sp>
+        <p:nvSpPr>
+          <p:cNvPr id="3" name="Content Placeholder 2">
+            <a:extLst>
+              <a:ext uri="{FF2B5EF4-FFF2-40B4-BE49-F238E27FC236}">
+                <a16:creationId xmlns:a16="http://schemas.microsoft.com/office/drawing/2014/main" id="{F37DF745-2478-BB30-FBE4-CE7ED21C2D95}"/>
+              </a:ext>
+            </a:extLst>
+          </p:cNvPr>
+          <p:cNvSpPr>
+            <a:spLocks noGrp="1"/>
+          </p:cNvSpPr>
+          <p:nvPr>
+            <p:ph idx="1"/>
+          </p:nvPr>
+        </p:nvSpPr>
+        <p:spPr>
+          <a:xfrm>
+            <a:off x="838200" y="1456267"/>
+            <a:ext cx="10375900" cy="4720696"/>
+          </a:xfrm>
+        </p:spPr>
+        <p:txBody>
+          <a:bodyPr>
+            <a:noAutofit/>
+          </a:bodyPr>
+          <a:lstStyle/>
+          <a:p>
+            <a:pPr marL="0" indent="0">
+              <a:buNone/>
+            </a:pPr>
+            <a:r>
+              <a:rPr lang="nl-NL" sz="1800" dirty="0"/>
+              <a:t>Om je API op te starten gebruik:</a:t>
+            </a:r>
+          </a:p>
+          <a:p>
+            <a:pPr marL="0" indent="0">
+              <a:buNone/>
+            </a:pPr>
+            <a:endParaRPr lang="nl-NL" sz="1800" dirty="0"/>
+          </a:p>
+          <a:p>
+            <a:pPr marL="0" indent="0">
+              <a:buNone/>
+            </a:pPr>
+            <a:r>
+              <a:rPr lang="nl-NL" sz="1800" dirty="0" err="1">
+                <a:latin typeface="Courier New" panose="02070309020205020404" pitchFamily="49" charset="0"/>
+                <a:cs typeface="Courier New" panose="02070309020205020404" pitchFamily="49" charset="0"/>
+              </a:rPr>
+              <a:t>uvx</a:t>
+            </a:r>
+            <a:r>
+              <a:rPr lang="nl-NL" sz="1800" dirty="0">
+                <a:latin typeface="Courier New" panose="02070309020205020404" pitchFamily="49" charset="0"/>
+                <a:cs typeface="Courier New" panose="02070309020205020404" pitchFamily="49" charset="0"/>
+              </a:rPr>
+              <a:t> </a:t>
+            </a:r>
+            <a:r>
+              <a:rPr lang="nl-NL" sz="1800" dirty="0" err="1">
+                <a:latin typeface="Courier New" panose="02070309020205020404" pitchFamily="49" charset="0"/>
+                <a:cs typeface="Courier New" panose="02070309020205020404" pitchFamily="49" charset="0"/>
+              </a:rPr>
+              <a:t>fastapi</a:t>
+            </a:r>
+            <a:r>
+              <a:rPr lang="nl-NL" sz="1800" dirty="0">
+                <a:latin typeface="Courier New" panose="02070309020205020404" pitchFamily="49" charset="0"/>
+                <a:cs typeface="Courier New" panose="02070309020205020404" pitchFamily="49" charset="0"/>
+              </a:rPr>
+              <a:t>[standaard] run .\api_create.py</a:t>
+            </a:r>
+          </a:p>
+          <a:p>
+            <a:pPr marL="0" indent="0">
+              <a:buNone/>
+            </a:pPr>
+            <a:endParaRPr lang="nl-NL" sz="1800" dirty="0"/>
+          </a:p>
+          <a:p>
+            <a:pPr marL="0" indent="0">
+              <a:buNone/>
+            </a:pPr>
+            <a:r>
+              <a:rPr lang="nl-NL" sz="1800" dirty="0"/>
+              <a:t>Stoppen met CTRL + C</a:t>
+            </a:r>
+          </a:p>
+          <a:p>
+            <a:pPr marL="0" indent="0">
+              <a:buNone/>
+            </a:pPr>
+            <a:endParaRPr lang="nl-NL" sz="1800" dirty="0"/>
+          </a:p>
+          <a:p>
+            <a:pPr marL="0" indent="0">
+              <a:buNone/>
+            </a:pPr>
+            <a:endParaRPr lang="nl-NL" sz="1800" dirty="0"/>
+          </a:p>
+          <a:p>
+            <a:pPr marL="0" indent="0">
+              <a:buNone/>
+            </a:pPr>
+            <a:r>
+              <a:rPr lang="nl-NL" sz="1800" dirty="0"/>
+              <a:t>Om een item in te voeren, open een browser en ga naar:</a:t>
+            </a:r>
+          </a:p>
+          <a:p>
+            <a:pPr marL="0" indent="0">
+              <a:buNone/>
+            </a:pPr>
+            <a:endParaRPr lang="nl-NL" sz="1800" dirty="0"/>
+          </a:p>
+          <a:p>
+            <a:pPr marL="0" indent="0">
+              <a:buNone/>
+            </a:pPr>
+            <a:r>
+              <a:rPr lang="nl-NL" sz="1800" dirty="0">
+                <a:latin typeface="Courier New" panose="02070309020205020404" pitchFamily="49" charset="0"/>
+                <a:cs typeface="Courier New" panose="02070309020205020404" pitchFamily="49" charset="0"/>
+              </a:rPr>
+              <a:t>http://127.0.0.1:8000/add?description=&lt;beschrijving hier&gt;</a:t>
+            </a:r>
+          </a:p>
+        </p:txBody>
+      </p:sp>
+    </p:spTree>
+    <p:extLst>
+      <p:ext uri="{BB962C8B-B14F-4D97-AF65-F5344CB8AC3E}">
+        <p14:creationId xmlns:p14="http://schemas.microsoft.com/office/powerpoint/2010/main" val="2547045887"/>
+      </p:ext>
+    </p:extLst>
+  </p:cSld>
+  <p:clrMapOvr>
+    <a:masterClrMapping/>
+  </p:clrMapOvr>
+</p:sld>
+</file>
+
+<file path=ppt/slides/slide24.xml><?xml version="1.0" encoding="utf-8"?>
+<p:sld xmlns:a="http://schemas.openxmlformats.org/drawingml/2006/main" xmlns:r="http://schemas.openxmlformats.org/officeDocument/2006/relationships" xmlns:p="http://schemas.openxmlformats.org/presentationml/2006/main">
+  <p:cSld>
+    <p:spTree>
+      <p:nvGrpSpPr>
+        <p:cNvPr id="1" name="">
+          <a:extLst>
+            <a:ext uri="{FF2B5EF4-FFF2-40B4-BE49-F238E27FC236}">
+              <a16:creationId xmlns:a16="http://schemas.microsoft.com/office/drawing/2014/main" id="{EBEF6D58-3712-9EFD-1828-488751D1BEDA}"/>
+            </a:ext>
+          </a:extLst>
+        </p:cNvPr>
+        <p:cNvGrpSpPr/>
+        <p:nvPr/>
+      </p:nvGrpSpPr>
+      <p:grpSpPr>
+        <a:xfrm>
+          <a:off x="0" y="0"/>
+          <a:ext cx="0" cy="0"/>
+          <a:chOff x="0" y="0"/>
+          <a:chExt cx="0" cy="0"/>
+        </a:xfrm>
+      </p:grpSpPr>
+      <p:sp>
+        <p:nvSpPr>
+          <p:cNvPr id="2" name="Title 1">
+            <a:extLst>
+              <a:ext uri="{FF2B5EF4-FFF2-40B4-BE49-F238E27FC236}">
+                <a16:creationId xmlns:a16="http://schemas.microsoft.com/office/drawing/2014/main" id="{BCF2DA2B-05C7-97B5-C30C-BAFE63E5E878}"/>
+              </a:ext>
+            </a:extLst>
+          </p:cNvPr>
+          <p:cNvSpPr>
+            <a:spLocks noGrp="1"/>
+          </p:cNvSpPr>
+          <p:nvPr>
+            <p:ph type="title"/>
+          </p:nvPr>
+        </p:nvSpPr>
+        <p:spPr>
+          <a:xfrm>
+            <a:off x="838200" y="365126"/>
+            <a:ext cx="10515600" cy="718608"/>
+          </a:xfrm>
+        </p:spPr>
+        <p:txBody>
+          <a:bodyPr>
+            <a:normAutofit/>
+          </a:bodyPr>
+          <a:lstStyle/>
+          <a:p>
+            <a:r>
+              <a:rPr lang="nl-NL" sz="3600" dirty="0"/>
+              <a:t>De overige </a:t>
+            </a:r>
+            <a:r>
+              <a:rPr lang="nl-NL" sz="3600" dirty="0" err="1"/>
+              <a:t>endpoints</a:t>
+            </a:r>
+            <a:endParaRPr lang="nl-NL" sz="3600" noProof="0" dirty="0"/>
+          </a:p>
+        </p:txBody>
+      </p:sp>
+      <p:sp>
+        <p:nvSpPr>
+          <p:cNvPr id="3" name="Content Placeholder 2">
+            <a:extLst>
+              <a:ext uri="{FF2B5EF4-FFF2-40B4-BE49-F238E27FC236}">
+                <a16:creationId xmlns:a16="http://schemas.microsoft.com/office/drawing/2014/main" id="{24172C65-11DE-9ABE-AADF-90650C5B99D2}"/>
+              </a:ext>
+            </a:extLst>
+          </p:cNvPr>
+          <p:cNvSpPr>
+            <a:spLocks noGrp="1"/>
+          </p:cNvSpPr>
+          <p:nvPr>
+            <p:ph idx="1"/>
+          </p:nvPr>
+        </p:nvSpPr>
+        <p:spPr>
+          <a:xfrm>
+            <a:off x="838200" y="1456267"/>
+            <a:ext cx="5257800" cy="4720696"/>
+          </a:xfrm>
+        </p:spPr>
+        <p:txBody>
+          <a:bodyPr>
+            <a:noAutofit/>
+          </a:bodyPr>
+          <a:lstStyle/>
+          <a:p>
+            <a:pPr marL="0" indent="0">
+              <a:spcAft>
+                <a:spcPts val="600"/>
+              </a:spcAft>
+              <a:buNone/>
+            </a:pPr>
+            <a:r>
+              <a:rPr lang="nl-NL" sz="1600" dirty="0">
+                <a:latin typeface="Courier New" panose="02070309020205020404" pitchFamily="49" charset="0"/>
+                <a:cs typeface="Courier New" panose="02070309020205020404" pitchFamily="49" charset="0"/>
+              </a:rPr>
+              <a:t>/</a:t>
+            </a:r>
+          </a:p>
+          <a:p>
+            <a:pPr marL="0" indent="0">
+              <a:spcAft>
+                <a:spcPts val="600"/>
+              </a:spcAft>
+              <a:buNone/>
+            </a:pPr>
+            <a:r>
+              <a:rPr lang="nl-NL" sz="1600" dirty="0"/>
+              <a:t>Leest alle JSON files uit de </a:t>
+            </a:r>
+            <a:r>
+              <a:rPr lang="nl-NL" sz="1600" dirty="0" err="1"/>
+              <a:t>To</a:t>
+            </a:r>
+            <a:r>
+              <a:rPr lang="nl-NL" sz="1600" dirty="0"/>
+              <a:t> Do folder.</a:t>
+            </a:r>
+          </a:p>
+          <a:p>
+            <a:pPr marL="0" indent="0">
+              <a:spcAft>
+                <a:spcPts val="600"/>
+              </a:spcAft>
+              <a:buNone/>
+            </a:pPr>
+            <a:r>
+              <a:rPr lang="nl-NL" sz="1600" dirty="0"/>
+              <a:t>Geeft deze als lijst van </a:t>
+            </a:r>
+            <a:r>
+              <a:rPr lang="nl-NL" sz="1600" dirty="0" err="1"/>
+              <a:t>ToDoItems</a:t>
+            </a:r>
+            <a:r>
+              <a:rPr lang="nl-NL" sz="1600" dirty="0"/>
+              <a:t> terug.</a:t>
+            </a:r>
+          </a:p>
+          <a:p>
+            <a:pPr marL="0" indent="0">
+              <a:spcAft>
+                <a:spcPts val="600"/>
+              </a:spcAft>
+              <a:buNone/>
+            </a:pPr>
+            <a:endParaRPr lang="nl-NL" sz="1600" dirty="0"/>
+          </a:p>
+          <a:p>
+            <a:pPr marL="0" indent="0">
+              <a:spcAft>
+                <a:spcPts val="600"/>
+              </a:spcAft>
+              <a:buNone/>
+            </a:pPr>
+            <a:r>
+              <a:rPr lang="nl-NL" sz="1600" dirty="0">
+                <a:latin typeface="Courier New" panose="02070309020205020404" pitchFamily="49" charset="0"/>
+                <a:cs typeface="Courier New" panose="02070309020205020404" pitchFamily="49" charset="0"/>
+              </a:rPr>
+              <a:t>/</a:t>
+            </a:r>
+            <a:r>
+              <a:rPr lang="nl-NL" sz="1600" dirty="0" err="1">
+                <a:latin typeface="Courier New" panose="02070309020205020404" pitchFamily="49" charset="0"/>
+                <a:cs typeface="Courier New" panose="02070309020205020404" pitchFamily="49" charset="0"/>
+              </a:rPr>
+              <a:t>update?id</a:t>
+            </a:r>
+            <a:r>
+              <a:rPr lang="nl-NL" sz="1600" dirty="0">
+                <a:latin typeface="Courier New" panose="02070309020205020404" pitchFamily="49" charset="0"/>
+                <a:cs typeface="Courier New" panose="02070309020205020404" pitchFamily="49" charset="0"/>
+              </a:rPr>
+              <a:t>=…&amp;status=…</a:t>
+            </a:r>
+          </a:p>
+          <a:p>
+            <a:pPr marL="0" indent="0">
+              <a:spcAft>
+                <a:spcPts val="600"/>
+              </a:spcAft>
+              <a:buNone/>
+            </a:pPr>
+            <a:r>
+              <a:rPr lang="nl-NL" sz="1600" dirty="0"/>
+              <a:t>Zet status van het </a:t>
+            </a:r>
+            <a:r>
+              <a:rPr lang="nl-NL" sz="1600" dirty="0" err="1"/>
+              <a:t>ToDoItem</a:t>
+            </a:r>
+            <a:r>
+              <a:rPr lang="nl-NL" sz="1600" dirty="0"/>
+              <a:t> op </a:t>
+            </a:r>
+            <a:r>
+              <a:rPr lang="nl-NL" sz="1600" dirty="0">
+                <a:latin typeface="Courier New" panose="02070309020205020404" pitchFamily="49" charset="0"/>
+                <a:cs typeface="Courier New" panose="02070309020205020404" pitchFamily="49" charset="0"/>
+              </a:rPr>
+              <a:t>Active</a:t>
+            </a:r>
+            <a:r>
+              <a:rPr lang="nl-NL" sz="1600" dirty="0"/>
+              <a:t> of </a:t>
+            </a:r>
+            <a:r>
+              <a:rPr lang="nl-NL" sz="1600" dirty="0" err="1">
+                <a:latin typeface="Courier New" panose="02070309020205020404" pitchFamily="49" charset="0"/>
+                <a:cs typeface="Courier New" panose="02070309020205020404" pitchFamily="49" charset="0"/>
+              </a:rPr>
+              <a:t>Done</a:t>
+            </a:r>
+            <a:r>
+              <a:rPr lang="nl-NL" sz="1600" dirty="0"/>
+              <a:t>.</a:t>
+            </a:r>
+          </a:p>
+          <a:p>
+            <a:pPr marL="0" indent="0">
+              <a:spcAft>
+                <a:spcPts val="600"/>
+              </a:spcAft>
+              <a:buNone/>
+            </a:pPr>
+            <a:r>
+              <a:rPr lang="nl-NL" sz="1600" dirty="0"/>
+              <a:t>Overschrijf het JSON-bestand in de </a:t>
+            </a:r>
+            <a:r>
+              <a:rPr lang="nl-NL" sz="1600" dirty="0" err="1"/>
+              <a:t>To</a:t>
+            </a:r>
+            <a:r>
+              <a:rPr lang="nl-NL" sz="1600" dirty="0"/>
+              <a:t> Do folder.</a:t>
+            </a:r>
+          </a:p>
+          <a:p>
+            <a:pPr marL="0" indent="0">
+              <a:spcAft>
+                <a:spcPts val="600"/>
+              </a:spcAft>
+              <a:buNone/>
+            </a:pPr>
+            <a:endParaRPr lang="nl-NL" sz="1600" dirty="0"/>
+          </a:p>
+          <a:p>
+            <a:pPr marL="0" indent="0">
+              <a:spcAft>
+                <a:spcPts val="600"/>
+              </a:spcAft>
+              <a:buNone/>
+            </a:pPr>
+            <a:endParaRPr lang="nl-NL" sz="1600" dirty="0"/>
+          </a:p>
+          <a:p>
+            <a:pPr marL="0" indent="0">
+              <a:spcAft>
+                <a:spcPts val="600"/>
+              </a:spcAft>
+              <a:buNone/>
+            </a:pPr>
+            <a:r>
+              <a:rPr lang="nl-NL" sz="1600" dirty="0">
+                <a:latin typeface="Courier New" panose="02070309020205020404" pitchFamily="49" charset="0"/>
+                <a:cs typeface="Courier New" panose="02070309020205020404" pitchFamily="49" charset="0"/>
+              </a:rPr>
+              <a:t>/</a:t>
+            </a:r>
+            <a:r>
+              <a:rPr lang="nl-NL" sz="1600" dirty="0" err="1">
+                <a:latin typeface="Courier New" panose="02070309020205020404" pitchFamily="49" charset="0"/>
+                <a:cs typeface="Courier New" panose="02070309020205020404" pitchFamily="49" charset="0"/>
+              </a:rPr>
+              <a:t>delete?id</a:t>
+            </a:r>
+            <a:r>
+              <a:rPr lang="nl-NL" sz="1600" dirty="0">
+                <a:latin typeface="Courier New" panose="02070309020205020404" pitchFamily="49" charset="0"/>
+                <a:cs typeface="Courier New" panose="02070309020205020404" pitchFamily="49" charset="0"/>
+              </a:rPr>
+              <a:t>=…</a:t>
+            </a:r>
+            <a:endParaRPr lang="nl-NL" sz="1600" dirty="0"/>
+          </a:p>
+          <a:p>
+            <a:pPr marL="0" indent="0">
+              <a:spcAft>
+                <a:spcPts val="600"/>
+              </a:spcAft>
+              <a:buNone/>
+            </a:pPr>
+            <a:r>
+              <a:rPr lang="nl-NL" sz="1600" dirty="0"/>
+              <a:t>Verwijderd het JSON bestand met het opgegeven </a:t>
+            </a:r>
+            <a:r>
+              <a:rPr lang="nl-NL" sz="1600"/>
+              <a:t>ID.</a:t>
+            </a:r>
+            <a:endParaRPr lang="nl-NL" sz="1600" dirty="0"/>
+          </a:p>
+        </p:txBody>
+      </p:sp>
+      <p:sp>
+        <p:nvSpPr>
+          <p:cNvPr id="4" name="Content Placeholder 2">
+            <a:extLst>
+              <a:ext uri="{FF2B5EF4-FFF2-40B4-BE49-F238E27FC236}">
+                <a16:creationId xmlns:a16="http://schemas.microsoft.com/office/drawing/2014/main" id="{BDBC0DFA-4E08-4F97-A95B-3820EE32F204}"/>
+              </a:ext>
+            </a:extLst>
+          </p:cNvPr>
+          <p:cNvSpPr txBox="1">
+            <a:spLocks/>
+          </p:cNvSpPr>
+          <p:nvPr/>
+        </p:nvSpPr>
+        <p:spPr>
+          <a:xfrm>
+            <a:off x="6750050" y="1456267"/>
+            <a:ext cx="4603750" cy="4720696"/>
+          </a:xfrm>
+          <a:prstGeom prst="rect">
+            <a:avLst/>
+          </a:prstGeom>
+        </p:spPr>
+        <p:txBody>
+          <a:bodyPr vert="horz" lIns="91440" tIns="45720" rIns="91440" bIns="45720" rtlCol="0">
+            <a:normAutofit/>
+          </a:bodyPr>
+          <a:lstStyle>
+            <a:lvl1pPr marL="228600" indent="-228600" algn="l" defTabSz="914400" rtl="0" eaLnBrk="1" latinLnBrk="0" hangingPunct="1">
+              <a:lnSpc>
+                <a:spcPct val="90000"/>
+              </a:lnSpc>
+              <a:spcBef>
+                <a:spcPts val="1000"/>
+              </a:spcBef>
+              <a:buFont typeface="Arial" panose="020B0604020202020204" pitchFamily="34" charset="0"/>
+              <a:buChar char="•"/>
+              <a:defRPr sz="2800" kern="1200">
+                <a:solidFill>
+                  <a:schemeClr val="tx1"/>
+                </a:solidFill>
+                <a:latin typeface="+mn-lt"/>
+                <a:ea typeface="+mn-ea"/>
+                <a:cs typeface="+mn-cs"/>
+              </a:defRPr>
+            </a:lvl1pPr>
+            <a:lvl2pPr marL="685800" indent="-228600" algn="l" defTabSz="914400" rtl="0" eaLnBrk="1" latinLnBrk="0" hangingPunct="1">
+              <a:lnSpc>
+                <a:spcPct val="90000"/>
+              </a:lnSpc>
+              <a:spcBef>
+                <a:spcPts val="500"/>
+              </a:spcBef>
+              <a:buFont typeface="Arial" panose="020B0604020202020204" pitchFamily="34" charset="0"/>
+              <a:buChar char="•"/>
+              <a:defRPr sz="2400" kern="1200">
+                <a:solidFill>
+                  <a:schemeClr val="tx1"/>
+                </a:solidFill>
+                <a:latin typeface="+mn-lt"/>
+                <a:ea typeface="+mn-ea"/>
+                <a:cs typeface="+mn-cs"/>
+              </a:defRPr>
+            </a:lvl2pPr>
+            <a:lvl3pPr marL="1143000" indent="-228600" algn="l" defTabSz="914400" rtl="0" eaLnBrk="1" latinLnBrk="0" hangingPunct="1">
+              <a:lnSpc>
+                <a:spcPct val="90000"/>
+              </a:lnSpc>
+              <a:spcBef>
+                <a:spcPts val="500"/>
+              </a:spcBef>
+              <a:buFont typeface="Arial" panose="020B0604020202020204" pitchFamily="34" charset="0"/>
+              <a:buChar char="•"/>
+              <a:defRPr sz="2000" kern="1200">
+                <a:solidFill>
+                  <a:schemeClr val="tx1"/>
+                </a:solidFill>
+                <a:latin typeface="+mn-lt"/>
+                <a:ea typeface="+mn-ea"/>
+                <a:cs typeface="+mn-cs"/>
+              </a:defRPr>
+            </a:lvl3pPr>
+            <a:lvl4pPr marL="1600200" indent="-228600" algn="l" defTabSz="914400" rtl="0" eaLnBrk="1" latinLnBrk="0" hangingPunct="1">
+              <a:lnSpc>
+                <a:spcPct val="90000"/>
+              </a:lnSpc>
+              <a:spcBef>
+                <a:spcPts val="500"/>
+              </a:spcBef>
+              <a:buFont typeface="Arial" panose="020B0604020202020204" pitchFamily="34" charset="0"/>
+              <a:buChar char="•"/>
+              <a:defRPr sz="1800" kern="1200">
+                <a:solidFill>
+                  <a:schemeClr val="tx1"/>
+                </a:solidFill>
+                <a:latin typeface="+mn-lt"/>
+                <a:ea typeface="+mn-ea"/>
+                <a:cs typeface="+mn-cs"/>
+              </a:defRPr>
+            </a:lvl4pPr>
+            <a:lvl5pPr marL="2057400" indent="-228600" algn="l" defTabSz="914400" rtl="0" eaLnBrk="1" latinLnBrk="0" hangingPunct="1">
+              <a:lnSpc>
+                <a:spcPct val="90000"/>
+              </a:lnSpc>
+              <a:spcBef>
+                <a:spcPts val="500"/>
+              </a:spcBef>
+              <a:buFont typeface="Arial" panose="020B0604020202020204" pitchFamily="34" charset="0"/>
+              <a:buChar char="•"/>
+              <a:defRPr sz="1800" kern="1200">
+                <a:solidFill>
+                  <a:schemeClr val="tx1"/>
+                </a:solidFill>
+                <a:latin typeface="+mn-lt"/>
+                <a:ea typeface="+mn-ea"/>
+                <a:cs typeface="+mn-cs"/>
+              </a:defRPr>
+            </a:lvl5pPr>
+            <a:lvl6pPr marL="2514600" indent="-228600" algn="l" defTabSz="914400" rtl="0" eaLnBrk="1" latinLnBrk="0" hangingPunct="1">
+              <a:lnSpc>
+                <a:spcPct val="90000"/>
+              </a:lnSpc>
+              <a:spcBef>
+                <a:spcPts val="500"/>
+              </a:spcBef>
+              <a:buFont typeface="Arial" panose="020B0604020202020204" pitchFamily="34" charset="0"/>
+              <a:buChar char="•"/>
+              <a:defRPr sz="1800" kern="1200">
+                <a:solidFill>
+                  <a:schemeClr val="tx1"/>
+                </a:solidFill>
+                <a:latin typeface="+mn-lt"/>
+                <a:ea typeface="+mn-ea"/>
+                <a:cs typeface="+mn-cs"/>
+              </a:defRPr>
+            </a:lvl6pPr>
+            <a:lvl7pPr marL="2971800" indent="-228600" algn="l" defTabSz="914400" rtl="0" eaLnBrk="1" latinLnBrk="0" hangingPunct="1">
+              <a:lnSpc>
+                <a:spcPct val="90000"/>
+              </a:lnSpc>
+              <a:spcBef>
+                <a:spcPts val="500"/>
+              </a:spcBef>
+              <a:buFont typeface="Arial" panose="020B0604020202020204" pitchFamily="34" charset="0"/>
+              <a:buChar char="•"/>
+              <a:defRPr sz="1800" kern="1200">
+                <a:solidFill>
+                  <a:schemeClr val="tx1"/>
+                </a:solidFill>
+                <a:latin typeface="+mn-lt"/>
+                <a:ea typeface="+mn-ea"/>
+                <a:cs typeface="+mn-cs"/>
+              </a:defRPr>
+            </a:lvl7pPr>
+            <a:lvl8pPr marL="3429000" indent="-228600" algn="l" defTabSz="914400" rtl="0" eaLnBrk="1" latinLnBrk="0" hangingPunct="1">
+              <a:lnSpc>
+                <a:spcPct val="90000"/>
+              </a:lnSpc>
+              <a:spcBef>
+                <a:spcPts val="500"/>
+              </a:spcBef>
+              <a:buFont typeface="Arial" panose="020B0604020202020204" pitchFamily="34" charset="0"/>
+              <a:buChar char="•"/>
+              <a:defRPr sz="1800" kern="1200">
+                <a:solidFill>
+                  <a:schemeClr val="tx1"/>
+                </a:solidFill>
+                <a:latin typeface="+mn-lt"/>
+                <a:ea typeface="+mn-ea"/>
+                <a:cs typeface="+mn-cs"/>
+              </a:defRPr>
+            </a:lvl8pPr>
+            <a:lvl9pPr marL="3886200" indent="-228600" algn="l" defTabSz="914400" rtl="0" eaLnBrk="1" latinLnBrk="0" hangingPunct="1">
+              <a:lnSpc>
+                <a:spcPct val="90000"/>
+              </a:lnSpc>
+              <a:spcBef>
+                <a:spcPts val="500"/>
+              </a:spcBef>
+              <a:buFont typeface="Arial" panose="020B0604020202020204" pitchFamily="34" charset="0"/>
+              <a:buChar char="•"/>
+              <a:defRPr sz="1800" kern="1200">
+                <a:solidFill>
+                  <a:schemeClr val="tx1"/>
+                </a:solidFill>
+                <a:latin typeface="+mn-lt"/>
+                <a:ea typeface="+mn-ea"/>
+                <a:cs typeface="+mn-cs"/>
+              </a:defRPr>
+            </a:lvl9pPr>
+          </a:lstStyle>
+          <a:p>
+            <a:pPr marL="0" indent="0">
+              <a:lnSpc>
+                <a:spcPct val="100000"/>
+              </a:lnSpc>
+              <a:spcBef>
+                <a:spcPts val="0"/>
+              </a:spcBef>
+              <a:spcAft>
+                <a:spcPts val="600"/>
+              </a:spcAft>
+              <a:buNone/>
+            </a:pPr>
+            <a:endParaRPr lang="nl-NL" sz="1400" dirty="0">
+              <a:latin typeface="Courier New" panose="02070309020205020404" pitchFamily="49" charset="0"/>
+              <a:cs typeface="Courier New" panose="02070309020205020404" pitchFamily="49" charset="0"/>
+            </a:endParaRPr>
+          </a:p>
+          <a:p>
+            <a:pPr marL="0" indent="0">
+              <a:lnSpc>
+                <a:spcPct val="100000"/>
+              </a:lnSpc>
+              <a:spcBef>
+                <a:spcPts val="0"/>
+              </a:spcBef>
+              <a:spcAft>
+                <a:spcPts val="600"/>
+              </a:spcAft>
+              <a:buNone/>
+            </a:pPr>
+            <a:endParaRPr lang="nl-NL" sz="1400" dirty="0">
+              <a:latin typeface="Courier New" panose="02070309020205020404" pitchFamily="49" charset="0"/>
+              <a:cs typeface="Courier New" panose="02070309020205020404" pitchFamily="49" charset="0"/>
+            </a:endParaRPr>
+          </a:p>
+          <a:p>
+            <a:pPr marL="0" indent="0">
+              <a:lnSpc>
+                <a:spcPct val="100000"/>
+              </a:lnSpc>
+              <a:spcBef>
+                <a:spcPts val="0"/>
+              </a:spcBef>
+              <a:spcAft>
+                <a:spcPts val="600"/>
+              </a:spcAft>
+              <a:buNone/>
+            </a:pPr>
+            <a:r>
+              <a:rPr lang="nl-NL" sz="1400" dirty="0" err="1">
+                <a:latin typeface="Courier New" panose="02070309020205020404" pitchFamily="49" charset="0"/>
+                <a:cs typeface="Courier New" panose="02070309020205020404" pitchFamily="49" charset="0"/>
+              </a:rPr>
+              <a:t>Path</a:t>
+            </a:r>
+            <a:r>
+              <a:rPr lang="nl-NL" sz="1400" dirty="0">
+                <a:latin typeface="Courier New" panose="02070309020205020404" pitchFamily="49" charset="0"/>
+                <a:cs typeface="Courier New" panose="02070309020205020404" pitchFamily="49" charset="0"/>
+              </a:rPr>
+              <a:t>("</a:t>
+            </a:r>
+            <a:r>
+              <a:rPr lang="nl-NL" sz="1400" dirty="0" err="1">
+                <a:latin typeface="Courier New" panose="02070309020205020404" pitchFamily="49" charset="0"/>
+                <a:cs typeface="Courier New" panose="02070309020205020404" pitchFamily="49" charset="0"/>
+              </a:rPr>
+              <a:t>todo_folder</a:t>
+            </a:r>
+            <a:r>
+              <a:rPr lang="nl-NL" sz="1400" dirty="0">
+                <a:latin typeface="Courier New" panose="02070309020205020404" pitchFamily="49" charset="0"/>
+                <a:cs typeface="Courier New" panose="02070309020205020404" pitchFamily="49" charset="0"/>
+              </a:rPr>
+              <a:t>").</a:t>
+            </a:r>
+            <a:r>
+              <a:rPr lang="nl-NL" sz="1400" dirty="0" err="1">
+                <a:latin typeface="Courier New" panose="02070309020205020404" pitchFamily="49" charset="0"/>
+                <a:cs typeface="Courier New" panose="02070309020205020404" pitchFamily="49" charset="0"/>
+              </a:rPr>
+              <a:t>glob</a:t>
+            </a:r>
+            <a:r>
+              <a:rPr lang="nl-NL" sz="1400" dirty="0">
+                <a:latin typeface="Courier New" panose="02070309020205020404" pitchFamily="49" charset="0"/>
+                <a:cs typeface="Courier New" panose="02070309020205020404" pitchFamily="49" charset="0"/>
+              </a:rPr>
+              <a:t>("*.</a:t>
+            </a:r>
+            <a:r>
+              <a:rPr lang="nl-NL" sz="1400" dirty="0" err="1">
+                <a:latin typeface="Courier New" panose="02070309020205020404" pitchFamily="49" charset="0"/>
+                <a:cs typeface="Courier New" panose="02070309020205020404" pitchFamily="49" charset="0"/>
+              </a:rPr>
+              <a:t>json</a:t>
+            </a:r>
+            <a:r>
+              <a:rPr lang="nl-NL" sz="1400" dirty="0">
+                <a:latin typeface="Courier New" panose="02070309020205020404" pitchFamily="49" charset="0"/>
+                <a:cs typeface="Courier New" panose="02070309020205020404" pitchFamily="49" charset="0"/>
+              </a:rPr>
+              <a:t>")</a:t>
+            </a:r>
+          </a:p>
+          <a:p>
+            <a:pPr marL="0" indent="0">
+              <a:lnSpc>
+                <a:spcPct val="100000"/>
+              </a:lnSpc>
+              <a:spcBef>
+                <a:spcPts val="0"/>
+              </a:spcBef>
+              <a:spcAft>
+                <a:spcPts val="600"/>
+              </a:spcAft>
+              <a:buNone/>
+            </a:pPr>
+            <a:endParaRPr lang="nl-NL" sz="1400" dirty="0">
+              <a:latin typeface="Courier New" panose="02070309020205020404" pitchFamily="49" charset="0"/>
+              <a:cs typeface="Courier New" panose="02070309020205020404" pitchFamily="49" charset="0"/>
+            </a:endParaRPr>
+          </a:p>
+          <a:p>
+            <a:pPr marL="0" indent="0">
+              <a:lnSpc>
+                <a:spcPct val="100000"/>
+              </a:lnSpc>
+              <a:spcBef>
+                <a:spcPts val="0"/>
+              </a:spcBef>
+              <a:spcAft>
+                <a:spcPts val="600"/>
+              </a:spcAft>
+              <a:buNone/>
+            </a:pPr>
+            <a:endParaRPr lang="nl-NL" sz="1400" dirty="0">
+              <a:latin typeface="Courier New" panose="02070309020205020404" pitchFamily="49" charset="0"/>
+              <a:cs typeface="Courier New" panose="02070309020205020404" pitchFamily="49" charset="0"/>
+            </a:endParaRPr>
+          </a:p>
+          <a:p>
+            <a:pPr marL="0" indent="0">
+              <a:lnSpc>
+                <a:spcPct val="100000"/>
+              </a:lnSpc>
+              <a:spcBef>
+                <a:spcPts val="0"/>
+              </a:spcBef>
+              <a:spcAft>
+                <a:spcPts val="600"/>
+              </a:spcAft>
+              <a:buNone/>
+            </a:pPr>
+            <a:endParaRPr lang="nl-NL" sz="1400" dirty="0">
+              <a:latin typeface="Courier New" panose="02070309020205020404" pitchFamily="49" charset="0"/>
+              <a:cs typeface="Courier New" panose="02070309020205020404" pitchFamily="49" charset="0"/>
+            </a:endParaRPr>
+          </a:p>
+          <a:p>
+            <a:pPr marL="0" indent="0">
+              <a:lnSpc>
+                <a:spcPct val="100000"/>
+              </a:lnSpc>
+              <a:spcBef>
+                <a:spcPts val="0"/>
+              </a:spcBef>
+              <a:spcAft>
+                <a:spcPts val="600"/>
+              </a:spcAft>
+              <a:buNone/>
+            </a:pPr>
+            <a:endParaRPr lang="nl-NL" sz="1400" dirty="0">
+              <a:latin typeface="Courier New" panose="02070309020205020404" pitchFamily="49" charset="0"/>
+              <a:cs typeface="Courier New" panose="02070309020205020404" pitchFamily="49" charset="0"/>
+            </a:endParaRPr>
+          </a:p>
+          <a:p>
+            <a:pPr marL="0" indent="0">
+              <a:lnSpc>
+                <a:spcPct val="100000"/>
+              </a:lnSpc>
+              <a:spcBef>
+                <a:spcPts val="0"/>
+              </a:spcBef>
+              <a:spcAft>
+                <a:spcPts val="600"/>
+              </a:spcAft>
+              <a:buNone/>
+            </a:pPr>
+            <a:r>
+              <a:rPr lang="nl-NL" sz="1400" dirty="0">
+                <a:latin typeface="Courier New" panose="02070309020205020404" pitchFamily="49" charset="0"/>
+                <a:cs typeface="Courier New" panose="02070309020205020404" pitchFamily="49" charset="0"/>
+              </a:rPr>
+              <a:t>open(…, </a:t>
+            </a:r>
+            <a:r>
+              <a:rPr lang="nl-NL" sz="1400" b="1" dirty="0">
+                <a:latin typeface="Courier New" panose="02070309020205020404" pitchFamily="49" charset="0"/>
+                <a:cs typeface="Courier New" panose="02070309020205020404" pitchFamily="49" charset="0"/>
+              </a:rPr>
+              <a:t>"w"</a:t>
+            </a:r>
+            <a:r>
+              <a:rPr lang="nl-NL" sz="1400" dirty="0">
+                <a:latin typeface="Courier New" panose="02070309020205020404" pitchFamily="49" charset="0"/>
+                <a:cs typeface="Courier New" panose="02070309020205020404" pitchFamily="49" charset="0"/>
+              </a:rPr>
+              <a:t>, </a:t>
+            </a:r>
+            <a:r>
+              <a:rPr lang="nl-NL" sz="1400" dirty="0" err="1">
+                <a:latin typeface="Courier New" panose="02070309020205020404" pitchFamily="49" charset="0"/>
+                <a:cs typeface="Courier New" panose="02070309020205020404" pitchFamily="49" charset="0"/>
+              </a:rPr>
+              <a:t>encoding</a:t>
+            </a:r>
+            <a:r>
+              <a:rPr lang="nl-NL" sz="1400" dirty="0">
+                <a:latin typeface="Courier New" panose="02070309020205020404" pitchFamily="49" charset="0"/>
+                <a:cs typeface="Courier New" panose="02070309020205020404" pitchFamily="49" charset="0"/>
+              </a:rPr>
+              <a:t>="utf8")</a:t>
+            </a:r>
+          </a:p>
+          <a:p>
+            <a:pPr marL="0" indent="0">
+              <a:lnSpc>
+                <a:spcPct val="100000"/>
+              </a:lnSpc>
+              <a:spcBef>
+                <a:spcPts val="0"/>
+              </a:spcBef>
+              <a:spcAft>
+                <a:spcPts val="600"/>
+              </a:spcAft>
+              <a:buNone/>
+            </a:pPr>
+            <a:endParaRPr lang="nl-NL" sz="1400" dirty="0">
+              <a:latin typeface="Courier New" panose="02070309020205020404" pitchFamily="49" charset="0"/>
+              <a:cs typeface="Courier New" panose="02070309020205020404" pitchFamily="49" charset="0"/>
+            </a:endParaRPr>
+          </a:p>
+          <a:p>
+            <a:pPr marL="0" indent="0">
+              <a:lnSpc>
+                <a:spcPct val="100000"/>
+              </a:lnSpc>
+              <a:spcBef>
+                <a:spcPts val="0"/>
+              </a:spcBef>
+              <a:spcAft>
+                <a:spcPts val="600"/>
+              </a:spcAft>
+              <a:buNone/>
+            </a:pPr>
+            <a:endParaRPr lang="nl-NL" sz="1400" dirty="0">
+              <a:latin typeface="Courier New" panose="02070309020205020404" pitchFamily="49" charset="0"/>
+              <a:cs typeface="Courier New" panose="02070309020205020404" pitchFamily="49" charset="0"/>
+            </a:endParaRPr>
+          </a:p>
+          <a:p>
+            <a:pPr marL="0" indent="0">
+              <a:lnSpc>
+                <a:spcPct val="100000"/>
+              </a:lnSpc>
+              <a:spcBef>
+                <a:spcPts val="0"/>
+              </a:spcBef>
+              <a:spcAft>
+                <a:spcPts val="600"/>
+              </a:spcAft>
+              <a:buNone/>
+            </a:pPr>
+            <a:endParaRPr lang="en-US" sz="1400" dirty="0">
+              <a:latin typeface="Courier New" panose="02070309020205020404" pitchFamily="49" charset="0"/>
+              <a:cs typeface="Courier New" panose="02070309020205020404" pitchFamily="49" charset="0"/>
+            </a:endParaRPr>
+          </a:p>
+          <a:p>
+            <a:pPr marL="0" indent="0">
+              <a:lnSpc>
+                <a:spcPct val="100000"/>
+              </a:lnSpc>
+              <a:spcBef>
+                <a:spcPts val="0"/>
+              </a:spcBef>
+              <a:spcAft>
+                <a:spcPts val="600"/>
+              </a:spcAft>
+              <a:buNone/>
+            </a:pPr>
+            <a:endParaRPr lang="en-US" sz="1400" dirty="0">
+              <a:latin typeface="Courier New" panose="02070309020205020404" pitchFamily="49" charset="0"/>
+              <a:cs typeface="Courier New" panose="02070309020205020404" pitchFamily="49" charset="0"/>
+            </a:endParaRPr>
+          </a:p>
+          <a:p>
+            <a:pPr marL="0" indent="0">
+              <a:lnSpc>
+                <a:spcPct val="100000"/>
+              </a:lnSpc>
+              <a:spcBef>
+                <a:spcPts val="0"/>
+              </a:spcBef>
+              <a:spcAft>
+                <a:spcPts val="600"/>
+              </a:spcAft>
+              <a:buNone/>
+            </a:pPr>
+            <a:endParaRPr lang="en-US" sz="1400" dirty="0">
+              <a:latin typeface="Courier New" panose="02070309020205020404" pitchFamily="49" charset="0"/>
+              <a:cs typeface="Courier New" panose="02070309020205020404" pitchFamily="49" charset="0"/>
+            </a:endParaRPr>
+          </a:p>
+          <a:p>
+            <a:pPr marL="0" indent="0">
+              <a:lnSpc>
+                <a:spcPct val="100000"/>
+              </a:lnSpc>
+              <a:spcBef>
+                <a:spcPts val="0"/>
+              </a:spcBef>
+              <a:spcAft>
+                <a:spcPts val="600"/>
+              </a:spcAft>
+              <a:buNone/>
+            </a:pPr>
+            <a:endParaRPr lang="en-US" sz="1400" dirty="0">
+              <a:latin typeface="Courier New" panose="02070309020205020404" pitchFamily="49" charset="0"/>
+              <a:cs typeface="Courier New" panose="02070309020205020404" pitchFamily="49" charset="0"/>
+            </a:endParaRPr>
+          </a:p>
+          <a:p>
+            <a:pPr marL="0" indent="0">
+              <a:lnSpc>
+                <a:spcPct val="100000"/>
+              </a:lnSpc>
+              <a:spcBef>
+                <a:spcPts val="0"/>
+              </a:spcBef>
+              <a:spcAft>
+                <a:spcPts val="600"/>
+              </a:spcAft>
+              <a:buNone/>
+            </a:pPr>
+            <a:r>
+              <a:rPr lang="en-US" sz="1400" dirty="0" err="1">
+                <a:latin typeface="Courier New" panose="02070309020205020404" pitchFamily="49" charset="0"/>
+                <a:cs typeface="Courier New" panose="02070309020205020404" pitchFamily="49" charset="0"/>
+              </a:rPr>
+              <a:t>os.remove</a:t>
+            </a:r>
+            <a:r>
+              <a:rPr lang="en-US" sz="1400" dirty="0">
+                <a:latin typeface="Courier New" panose="02070309020205020404" pitchFamily="49" charset="0"/>
+                <a:cs typeface="Courier New" panose="02070309020205020404" pitchFamily="49" charset="0"/>
+              </a:rPr>
+              <a:t>("</a:t>
+            </a:r>
+            <a:r>
+              <a:rPr lang="en-US" sz="1400" dirty="0" err="1">
+                <a:latin typeface="Courier New" panose="02070309020205020404" pitchFamily="49" charset="0"/>
+                <a:cs typeface="Courier New" panose="02070309020205020404" pitchFamily="49" charset="0"/>
+              </a:rPr>
+              <a:t>filename.json</a:t>
+            </a:r>
+            <a:r>
+              <a:rPr lang="en-US" sz="1400" dirty="0">
+                <a:latin typeface="Courier New" panose="02070309020205020404" pitchFamily="49" charset="0"/>
+                <a:cs typeface="Courier New" panose="02070309020205020404" pitchFamily="49" charset="0"/>
+              </a:rPr>
+              <a:t>")</a:t>
+            </a:r>
+          </a:p>
+        </p:txBody>
+      </p:sp>
+      <p:cxnSp>
+        <p:nvCxnSpPr>
+          <p:cNvPr id="6" name="Straight Connector 5">
+            <a:extLst>
+              <a:ext uri="{FF2B5EF4-FFF2-40B4-BE49-F238E27FC236}">
+                <a16:creationId xmlns:a16="http://schemas.microsoft.com/office/drawing/2014/main" id="{02B5AC2C-6398-7F94-A224-CD0F301DA6D0}"/>
+              </a:ext>
+            </a:extLst>
+          </p:cNvPr>
+          <p:cNvCxnSpPr/>
+          <p:nvPr/>
+        </p:nvCxnSpPr>
+        <p:spPr>
+          <a:xfrm>
+            <a:off x="6337300" y="1397000"/>
+            <a:ext cx="0" cy="4838700"/>
+          </a:xfrm>
+          <a:prstGeom prst="line">
+            <a:avLst/>
+          </a:prstGeom>
+        </p:spPr>
+        <p:style>
+          <a:lnRef idx="3">
+            <a:schemeClr val="dk1"/>
+          </a:lnRef>
+          <a:fillRef idx="0">
+            <a:schemeClr val="dk1"/>
+          </a:fillRef>
+          <a:effectRef idx="2">
+            <a:schemeClr val="dk1"/>
+          </a:effectRef>
+          <a:fontRef idx="minor">
+            <a:schemeClr val="tx1"/>
+          </a:fontRef>
+        </p:style>
+      </p:cxnSp>
+      <p:sp>
+        <p:nvSpPr>
+          <p:cNvPr id="5" name="TextBox 4">
+            <a:extLst>
+              <a:ext uri="{FF2B5EF4-FFF2-40B4-BE49-F238E27FC236}">
+                <a16:creationId xmlns:a16="http://schemas.microsoft.com/office/drawing/2014/main" id="{4DC51970-2AD7-A300-61EE-B6204FB4EB80}"/>
+              </a:ext>
+            </a:extLst>
+          </p:cNvPr>
+          <p:cNvSpPr txBox="1"/>
+          <p:nvPr/>
+        </p:nvSpPr>
+        <p:spPr>
+          <a:xfrm>
+            <a:off x="9619967" y="6471982"/>
+            <a:ext cx="2499246" cy="307777"/>
+          </a:xfrm>
+          <a:prstGeom prst="rect">
+            <a:avLst/>
+          </a:prstGeom>
+          <a:noFill/>
+        </p:spPr>
+        <p:txBody>
+          <a:bodyPr wrap="square">
+            <a:spAutoFit/>
+          </a:bodyPr>
+          <a:lstStyle/>
+          <a:p>
+            <a:pPr algn="r"/>
+            <a:r>
+              <a:rPr lang="en-US" sz="1400" dirty="0"/>
+              <a:t>D: params </a:t>
+            </a:r>
+            <a:r>
+              <a:rPr lang="en-US" sz="1400" dirty="0" err="1"/>
+              <a:t>api</a:t>
+            </a:r>
+            <a:r>
+              <a:rPr lang="en-US" sz="1400" dirty="0"/>
+              <a:t>.</a:t>
+            </a:r>
+          </a:p>
+        </p:txBody>
+      </p:sp>
+    </p:spTree>
+    <p:extLst>
+      <p:ext uri="{BB962C8B-B14F-4D97-AF65-F5344CB8AC3E}">
+        <p14:creationId xmlns:p14="http://schemas.microsoft.com/office/powerpoint/2010/main" val="2439698916"/>
       </p:ext>
     </p:extLst>
   </p:cSld>
